--- a/Snow2026_may_CPT.pptx
+++ b/Snow2026_may_CPT.pptx
@@ -76,7 +76,6 @@
     <p:sldId id="324" r:id="rId70"/>
     <p:sldId id="325" r:id="rId71"/>
     <p:sldId id="326" r:id="rId72"/>
-    <p:sldId id="327" r:id="rId73"/>
   </p:sldIdLst>
   <p:sldSz cx="9144000" cy="5143500" type="screen16x9"/>
   <p:notesSz cx="6858000" cy="9144000"/>
@@ -4296,12 +4295,12 @@
       </p:grpSpPr>
       <p:sp>
         <p:nvSpPr>
-          <p:cNvPr id="3" name="Content Placeholder 2"/>
-          <p:cNvSpPr>
-            <a:spLocks noGrp="1"/>
-          </p:cNvSpPr>
-          <p:nvPr>
-            <p:ph idx="1" sz="half"/>
+          <p:cNvPr id="2" name="Title 1"/>
+          <p:cNvSpPr>
+            <a:spLocks noGrp="1"/>
+          </p:cNvSpPr>
+          <p:nvPr>
+            <p:ph type="title"/>
           </p:nvPr>
         </p:nvSpPr>
         <p:spPr/>
@@ -4310,16 +4309,29 @@
           <a:lstStyle/>
           <a:p>
             <a:pPr lvl="0" indent="0" marL="0">
-              <a:spcBef>
-                <a:spcPts val="3000"/>
-              </a:spcBef>
               <a:buNone/>
             </a:pPr>
             <a:r>
-              <a:rPr b="1"/>
+              <a:rPr/>
               <a:t>Total male composition fix</a:t>
             </a:r>
           </a:p>
+        </p:txBody>
+      </p:sp>
+      <p:sp>
+        <p:nvSpPr>
+          <p:cNvPr id="3" name="Content Placeholder 2"/>
+          <p:cNvSpPr>
+            <a:spLocks noGrp="1"/>
+          </p:cNvSpPr>
+          <p:nvPr>
+            <p:ph idx="1" sz="half"/>
+          </p:nvPr>
+        </p:nvSpPr>
+        <p:spPr/>
+        <p:txBody>
+          <a:bodyPr/>
+          <a:lstStyle/>
           <a:p>
             <a:pPr lvl="0"/>
             <a:r>
@@ -4397,12 +4409,12 @@
       </p:grpSpPr>
       <p:sp>
         <p:nvSpPr>
-          <p:cNvPr id="3" name="Content Placeholder 2"/>
-          <p:cNvSpPr>
-            <a:spLocks noGrp="1"/>
-          </p:cNvSpPr>
-          <p:nvPr>
-            <p:ph idx="1"/>
+          <p:cNvPr id="2" name="Title 1"/>
+          <p:cNvSpPr>
+            <a:spLocks noGrp="1"/>
+          </p:cNvSpPr>
+          <p:nvPr>
+            <p:ph type="title"/>
           </p:nvPr>
         </p:nvSpPr>
         <p:spPr/>
@@ -4411,40 +4423,15 @@
           <a:lstStyle/>
           <a:p>
             <a:pPr lvl="0" indent="0" marL="0">
-              <a:spcBef>
-                <a:spcPts val="3000"/>
-              </a:spcBef>
               <a:buNone/>
             </a:pPr>
             <a:r>
-              <a:rPr b="1"/>
+              <a:rPr/>
               <a:t>Plus group at &gt;135 mm CW</a:t>
             </a:r>
           </a:p>
         </p:txBody>
       </p:sp>
-    </p:spTree>
-  </p:cSld>
-</p:sld>
-</file>
-
-<file path=ppt/slides/slide18.xml><?xml version="1.0" encoding="utf-8"?>
-<p:sld xmlns:a="http://schemas.openxmlformats.org/drawingml/2006/main" xmlns:r="http://schemas.openxmlformats.org/officeDocument/2006/relationships" xmlns:p="http://schemas.openxmlformats.org/presentationml/2006/main">
-  <p:cSld>
-    <p:spTree>
-      <p:nvGrpSpPr>
-        <p:cNvPr id="1" name=""/>
-        <p:cNvGrpSpPr/>
-        <p:nvPr/>
-      </p:nvGrpSpPr>
-      <p:grpSpPr>
-        <a:xfrm>
-          <a:off x="0" y="0"/>
-          <a:ext cx="0" cy="0"/>
-          <a:chOff x="0" y="0"/>
-          <a:chExt cx="0" cy="0"/>
-        </a:xfrm>
-      </p:grpSpPr>
       <p:sp>
         <p:nvSpPr>
           <p:cNvPr id="3" name="Content Placeholder 2"/>
@@ -4557,6 +4544,242 @@
 </p:sld>
 </file>
 
+<file path=ppt/slides/slide18.xml><?xml version="1.0" encoding="utf-8"?>
+<p:sld xmlns:a="http://schemas.openxmlformats.org/drawingml/2006/main" xmlns:r="http://schemas.openxmlformats.org/officeDocument/2006/relationships" xmlns:p="http://schemas.openxmlformats.org/presentationml/2006/main">
+  <p:cSld>
+    <p:spTree>
+      <p:nvGrpSpPr>
+        <p:cNvPr id="1" name=""/>
+        <p:cNvGrpSpPr/>
+        <p:nvPr/>
+      </p:nvGrpSpPr>
+      <p:grpSpPr>
+        <a:xfrm>
+          <a:off x="0" y="0"/>
+          <a:ext cx="0" cy="0"/>
+          <a:chOff x="0" y="0"/>
+          <a:chExt cx="0" cy="0"/>
+        </a:xfrm>
+      </p:grpSpPr>
+      <p:sp>
+        <p:nvSpPr>
+          <p:cNvPr id="2" name="Title 1"/>
+          <p:cNvSpPr>
+            <a:spLocks noGrp="1"/>
+          </p:cNvSpPr>
+          <p:nvPr>
+            <p:ph type="title"/>
+          </p:nvPr>
+        </p:nvSpPr>
+        <p:spPr/>
+        <p:txBody>
+          <a:bodyPr/>
+          <a:lstStyle/>
+          <a:p>
+            <a:pPr lvl="0" indent="0" marL="0">
+              <a:buNone/>
+            </a:pPr>
+            <a:r>
+              <a:rPr/>
+              <a:t>Axis 2 – Immature survey biomass index</a:t>
+            </a:r>
+          </a:p>
+        </p:txBody>
+      </p:sp>
+      <p:graphicFrame>
+        <p:nvGraphicFramePr>
+          <p:cNvPr id="6" name="Content Placeholder 5"/>
+          <p:cNvGraphicFramePr>
+            <a:graphicFrameLocks noGrp="1"/>
+          </p:cNvGraphicFramePr>
+          <p:nvPr>
+            <p:ph idx="1"/>
+          </p:nvPr>
+        </p:nvGraphicFramePr>
+        <p:xfrm>
+          <a:off x="457200" y="1193800"/>
+          <a:ext cx="8229600" cy="3390900"/>
+        </p:xfrm>
+        <a:graphic>
+          <a:graphicData uri="http://schemas.openxmlformats.org/drawingml/2006/table">
+            <a:tbl>
+              <a:tblPr firstRow="1" bandRow="1">
+                <a:tableStyleId>{5C22544A-7EE6-4342-B048-85BDC9FD1C3A}</a:tableStyleId>
+              </a:tblPr>
+              <a:tblGrid>
+                <a:gridCol w="2743200"/>
+                <a:gridCol w="2743200"/>
+                <a:gridCol w="2743200"/>
+              </a:tblGrid>
+              <a:tr h="0">
+                <a:tc>
+                  <a:txBody>
+                    <a:bodyPr/>
+                    <a:lstStyle/>
+                    <a:p>
+                      <a:pPr lvl="0" indent="0" marL="0">
+                        <a:buNone/>
+                      </a:pPr>
+                      <a:r>
+                        <a:rPr/>
+                        <a:t>Model</a:t>
+                      </a:r>
+                    </a:p>
+                  </a:txBody>
+                  <a:tcPr/>
+                </a:tc>
+                <a:tc>
+                  <a:txBody>
+                    <a:bodyPr/>
+                    <a:lstStyle/>
+                    <a:p>
+                      <a:pPr lvl="0" indent="0" marL="0">
+                        <a:buNone/>
+                      </a:pPr>
+                      <a:r>
+                        <a:rPr/>
+                        <a:t>Abr.</a:t>
+                      </a:r>
+                    </a:p>
+                  </a:txBody>
+                  <a:tcPr/>
+                </a:tc>
+                <a:tc>
+                  <a:txBody>
+                    <a:bodyPr/>
+                    <a:lstStyle/>
+                    <a:p>
+                      <a:pPr lvl="0" indent="0" marL="0">
+                        <a:buNone/>
+                      </a:pPr>
+                      <a:r>
+                        <a:rPr/>
+                        <a:t>Description</a:t>
+                      </a:r>
+                    </a:p>
+                  </a:txBody>
+                  <a:tcPr/>
+                </a:tc>
+              </a:tr>
+              <a:tr h="0">
+                <a:tc>
+                  <a:txBody>
+                    <a:bodyPr/>
+                    <a:lstStyle/>
+                    <a:p>
+                      <a:pPr lvl="0" indent="0" marL="0">
+                        <a:buNone/>
+                      </a:pPr>
+                      <a:r>
+                        <a:rPr>
+                          <a:latin typeface="Courier"/>
+                        </a:rPr>
+                        <a:t>25.1d</a:t>
+                      </a:r>
+                    </a:p>
+                  </a:txBody>
+                </a:tc>
+                <a:tc>
+                  <a:txBody>
+                    <a:bodyPr/>
+                    <a:lstStyle/>
+                    <a:p>
+                      <a:pPr lvl="0" indent="0" marL="0">
+                        <a:buNone/>
+                      </a:pPr>
+                      <a:r>
+                        <a:rPr/>
+                        <a:t>update + compfix + imm_surv</a:t>
+                      </a:r>
+                    </a:p>
+                  </a:txBody>
+                </a:tc>
+                <a:tc>
+                  <a:txBody>
+                    <a:bodyPr/>
+                    <a:lstStyle/>
+                    <a:p>
+                      <a:pPr lvl="0" indent="0" marL="0">
+                        <a:buNone/>
+                      </a:pPr>
+                      <a:r>
+                        <a:rPr>
+                          <a:latin typeface="Courier"/>
+                        </a:rPr>
+                        <a:t>25.1b</a:t>
+                      </a:r>
+                      <a:r>
+                        <a:rPr/>
+                        <a:t> + immature index</a:t>
+                      </a:r>
+                    </a:p>
+                  </a:txBody>
+                </a:tc>
+              </a:tr>
+              <a:tr h="0">
+                <a:tc>
+                  <a:txBody>
+                    <a:bodyPr/>
+                    <a:lstStyle/>
+                    <a:p>
+                      <a:pPr lvl="0" indent="0" marL="0">
+                        <a:buNone/>
+                      </a:pPr>
+                      <a:r>
+                        <a:rPr>
+                          <a:latin typeface="Courier"/>
+                        </a:rPr>
+                        <a:t>25.1e</a:t>
+                      </a:r>
+                    </a:p>
+                  </a:txBody>
+                </a:tc>
+                <a:tc>
+                  <a:txBody>
+                    <a:bodyPr/>
+                    <a:lstStyle/>
+                    <a:p>
+                      <a:pPr lvl="0" indent="0" marL="0">
+                        <a:buNone/>
+                      </a:pPr>
+                      <a:r>
+                        <a:rPr/>
+                        <a:t>update + plus group + imm_surv</a:t>
+                      </a:r>
+                    </a:p>
+                  </a:txBody>
+                </a:tc>
+                <a:tc>
+                  <a:txBody>
+                    <a:bodyPr/>
+                    <a:lstStyle/>
+                    <a:p>
+                      <a:pPr lvl="0" indent="0" marL="0">
+                        <a:buNone/>
+                      </a:pPr>
+                      <a:r>
+                        <a:rPr>
+                          <a:latin typeface="Courier"/>
+                        </a:rPr>
+                        <a:t>25.1c</a:t>
+                      </a:r>
+                      <a:r>
+                        <a:rPr/>
+                        <a:t> + immature index</a:t>
+                      </a:r>
+                    </a:p>
+                  </a:txBody>
+                </a:tc>
+              </a:tr>
+            </a:tbl>
+          </a:graphicData>
+        </a:graphic>
+      </p:graphicFrame>
+    </p:spTree>
+  </p:cSld>
+</p:sld>
+</file>
+
 <file path=ppt/slides/slide19.xml><?xml version="1.0" encoding="utf-8"?>
 <p:sld xmlns:a="http://schemas.openxmlformats.org/drawingml/2006/main" xmlns:r="http://schemas.openxmlformats.org/officeDocument/2006/relationships" xmlns:p="http://schemas.openxmlformats.org/presentationml/2006/main">
   <p:cSld>
@@ -4584,7 +4807,12 @@
             <p:ph type="title"/>
           </p:nvPr>
         </p:nvSpPr>
-        <p:spPr/>
+        <p:spPr>
+          <a:xfrm>
+            <a:off x="457201" y="204787"/>
+            <a:ext cx="3008313" cy="871538"/>
+          </a:xfrm>
+        </p:spPr>
         <p:txBody>
           <a:bodyPr/>
           <a:lstStyle/>
@@ -4594,200 +4822,109 @@
             </a:pPr>
             <a:r>
               <a:rPr/>
-              <a:t>Axis 2 – Immature survey biomass index</a:t>
-            </a:r>
-          </a:p>
-        </p:txBody>
-      </p:sp>
-      <p:graphicFrame>
-        <p:nvGraphicFramePr>
-          <p:cNvPr id="6" name="Content Placeholder 5"/>
-          <p:cNvGraphicFramePr>
-            <a:graphicFrameLocks noGrp="1"/>
-          </p:cNvGraphicFramePr>
-          <p:nvPr>
-            <p:ph idx="1"/>
-          </p:nvPr>
-        </p:nvGraphicFramePr>
-        <p:xfrm>
-          <a:off x="457200" y="1193800"/>
-          <a:ext cx="8229600" cy="3390900"/>
-        </p:xfrm>
-        <a:graphic>
-          <a:graphicData uri="http://schemas.openxmlformats.org/drawingml/2006/table">
-            <a:tbl>
-              <a:tblPr firstRow="1" bandRow="1">
-                <a:tableStyleId>{5C22544A-7EE6-4342-B048-85BDC9FD1C3A}</a:tableStyleId>
-              </a:tblPr>
-              <a:tblGrid>
-                <a:gridCol w="2743200"/>
-                <a:gridCol w="2743200"/>
-                <a:gridCol w="2743200"/>
-              </a:tblGrid>
-              <a:tr h="0">
-                <a:tc>
-                  <a:txBody>
-                    <a:bodyPr/>
-                    <a:lstStyle/>
-                    <a:p>
-                      <a:pPr lvl="0" indent="0" marL="0">
-                        <a:buNone/>
-                      </a:pPr>
-                      <a:r>
-                        <a:rPr/>
-                        <a:t>Model</a:t>
-                      </a:r>
-                    </a:p>
-                  </a:txBody>
-                  <a:tcPr/>
-                </a:tc>
-                <a:tc>
-                  <a:txBody>
-                    <a:bodyPr/>
-                    <a:lstStyle/>
-                    <a:p>
-                      <a:pPr lvl="0" indent="0" marL="0">
-                        <a:buNone/>
-                      </a:pPr>
-                      <a:r>
-                        <a:rPr/>
-                        <a:t>Abr.</a:t>
-                      </a:r>
-                    </a:p>
-                  </a:txBody>
-                  <a:tcPr/>
-                </a:tc>
-                <a:tc>
-                  <a:txBody>
-                    <a:bodyPr/>
-                    <a:lstStyle/>
-                    <a:p>
-                      <a:pPr lvl="0" indent="0" marL="0">
-                        <a:buNone/>
-                      </a:pPr>
-                      <a:r>
-                        <a:rPr/>
-                        <a:t>Description</a:t>
-                      </a:r>
-                    </a:p>
-                  </a:txBody>
-                  <a:tcPr/>
-                </a:tc>
-              </a:tr>
-              <a:tr h="0">
-                <a:tc>
-                  <a:txBody>
-                    <a:bodyPr/>
-                    <a:lstStyle/>
-                    <a:p>
-                      <a:pPr lvl="0" indent="0" marL="0">
-                        <a:buNone/>
-                      </a:pPr>
-                      <a:r>
-                        <a:rPr>
-                          <a:latin typeface="Courier"/>
-                        </a:rPr>
-                        <a:t>25.1d</a:t>
-                      </a:r>
-                    </a:p>
-                  </a:txBody>
-                </a:tc>
-                <a:tc>
-                  <a:txBody>
-                    <a:bodyPr/>
-                    <a:lstStyle/>
-                    <a:p>
-                      <a:pPr lvl="0" indent="0" marL="0">
-                        <a:buNone/>
-                      </a:pPr>
-                      <a:r>
-                        <a:rPr/>
-                        <a:t>update + compfix + imm_surv</a:t>
-                      </a:r>
-                    </a:p>
-                  </a:txBody>
-                </a:tc>
-                <a:tc>
-                  <a:txBody>
-                    <a:bodyPr/>
-                    <a:lstStyle/>
-                    <a:p>
-                      <a:pPr lvl="0" indent="0" marL="0">
-                        <a:buNone/>
-                      </a:pPr>
-                      <a:r>
-                        <a:rPr>
-                          <a:latin typeface="Courier"/>
-                        </a:rPr>
-                        <a:t>25.1b</a:t>
-                      </a:r>
-                      <a:r>
-                        <a:rPr/>
-                        <a:t> + immature index</a:t>
-                      </a:r>
-                    </a:p>
-                  </a:txBody>
-                </a:tc>
-              </a:tr>
-              <a:tr h="0">
-                <a:tc>
-                  <a:txBody>
-                    <a:bodyPr/>
-                    <a:lstStyle/>
-                    <a:p>
-                      <a:pPr lvl="0" indent="0" marL="0">
-                        <a:buNone/>
-                      </a:pPr>
-                      <a:r>
-                        <a:rPr>
-                          <a:latin typeface="Courier"/>
-                        </a:rPr>
-                        <a:t>25.1e</a:t>
-                      </a:r>
-                    </a:p>
-                  </a:txBody>
-                </a:tc>
-                <a:tc>
-                  <a:txBody>
-                    <a:bodyPr/>
-                    <a:lstStyle/>
-                    <a:p>
-                      <a:pPr lvl="0" indent="0" marL="0">
-                        <a:buNone/>
-                      </a:pPr>
-                      <a:r>
-                        <a:rPr/>
-                        <a:t>update + plus group + imm_surv</a:t>
-                      </a:r>
-                    </a:p>
-                  </a:txBody>
-                </a:tc>
-                <a:tc>
-                  <a:txBody>
-                    <a:bodyPr/>
-                    <a:lstStyle/>
-                    <a:p>
-                      <a:pPr lvl="0" indent="0" marL="0">
-                        <a:buNone/>
-                      </a:pPr>
-                      <a:r>
-                        <a:rPr>
-                          <a:latin typeface="Courier"/>
-                        </a:rPr>
-                        <a:t>25.1c</a:t>
-                      </a:r>
-                      <a:r>
-                        <a:rPr/>
-                        <a:t> + immature index</a:t>
-                      </a:r>
-                    </a:p>
-                  </a:txBody>
-                </a:tc>
-              </a:tr>
-            </a:tbl>
-          </a:graphicData>
-        </a:graphic>
-      </p:graphicFrame>
+              <a:t>NMFS immature survey biomass index</a:t>
+            </a:r>
+          </a:p>
+        </p:txBody>
+      </p:sp>
+      <mc:AlternateContent xmlns:mc="http://schemas.openxmlformats.org/markup-compatibility/2006">
+        <mc:Choice xmlns:a14="http://schemas.microsoft.com/office/drawing/2010/main" Requires="a14">
+          <p:sp>
+            <p:nvSpPr>
+              <p:cNvPr id="4" name="Text Placeholder 3"/>
+              <p:cNvSpPr>
+                <a:spLocks noGrp="1"/>
+              </p:cNvSpPr>
+              <p:nvPr>
+                <p:ph idx="2" sz="half" type="body"/>
+              </p:nvPr>
+            </p:nvSpPr>
+            <p:spPr/>
+            <p:txBody>
+              <a:bodyPr/>
+              <a:lstStyle/>
+              <a:p>
+                <a:pPr lvl="0"/>
+                <a:r>
+                  <a:rPr b="1"/>
+                  <a:t>Removes the bimodality</a:t>
+                </a:r>
+                <a:r>
+                  <a:rPr/>
+                  <a:t> observed in jitter analyses (see Results).</a:t>
+                </a:r>
+              </a:p>
+              <a:p>
+                <a:pPr lvl="0"/>
+                <a:r>
+                  <a:rPr/>
+                  <a:t>Comes with a </a:t>
+                </a:r>
+                <a:r>
+                  <a:rPr b="1"/>
+                  <a:t>substantially higher estimate of mature male </a:t>
+                </a:r>
+                <a14:m>
+                  <m:oMath xmlns:m="http://schemas.openxmlformats.org/officeDocument/2006/math">
+                    <m:r>
+                      <m:t>M</m:t>
+                    </m:r>
+                  </m:oMath>
+                </a14:m>
+                <a:r>
+                  <a:rPr/>
+                  <a:t> (&gt; 0.6) that propagates into reference points.</a:t>
+                </a:r>
+              </a:p>
+              <a:p>
+                <a:pPr lvl="0"/>
+                <a:r>
+                  <a:rPr/>
+                  <a:t>Combination of immature index + hybrids was </a:t>
+                </a:r>
+                <a:r>
+                  <a:rPr b="1"/>
+                  <a:t>not explored</a:t>
+                </a:r>
+                <a:r>
+                  <a:rPr/>
+                  <a:t>.</a:t>
+                </a:r>
+              </a:p>
+            </p:txBody>
+          </p:sp>
+        </mc:Choice>
+      </mc:AlternateContent>
+      <p:pic>
+        <p:nvPicPr>
+          <p:cNvPr descr="Snow2026_may_CPT_files/figure-pptx/idx-imm-1.png" id="0" name="Picture 1"/>
+          <p:cNvPicPr>
+            <a:picLocks noGrp="1" noChangeAspect="1"/>
+          </p:cNvPicPr>
+          <p:nvPr/>
+        </p:nvPicPr>
+        <p:blipFill>
+          <a:blip r:embed="rId2"/>
+          <a:stretch>
+            <a:fillRect/>
+          </a:stretch>
+        </p:blipFill>
+        <p:spPr bwMode="auto">
+          <a:xfrm>
+            <a:off x="3568700" y="990600"/>
+            <a:ext cx="5105400" cy="2806700"/>
+          </a:xfrm>
+          <a:prstGeom prst="rect">
+            <a:avLst/>
+          </a:prstGeom>
+          <a:noFill/>
+          <a:ln w="9525">
+            <a:noFill/>
+            <a:headEnd/>
+            <a:tailEnd/>
+          </a:ln>
+        </p:spPr>
+      </p:pic>
     </p:spTree>
   </p:cSld>
 </p:sld>
@@ -4862,131 +4999,330 @@
           <a:chExt cx="0" cy="0"/>
         </a:xfrm>
       </p:grpSpPr>
-      <mc:AlternateContent xmlns:mc="http://schemas.openxmlformats.org/markup-compatibility/2006">
-        <mc:Choice xmlns:a14="http://schemas.microsoft.com/office/drawing/2010/main" Requires="a14">
-          <p:sp>
-            <p:nvSpPr>
-              <p:cNvPr id="4" name="Text Placeholder 3"/>
-              <p:cNvSpPr>
-                <a:spLocks noGrp="1"/>
-              </p:cNvSpPr>
-              <p:nvPr>
-                <p:ph idx="2" sz="half" type="body"/>
-              </p:nvPr>
-            </p:nvSpPr>
-            <p:spPr/>
-            <p:txBody>
-              <a:bodyPr/>
-              <a:lstStyle/>
-              <a:p>
-                <a:pPr lvl="0" indent="0" marL="0">
-                  <a:spcBef>
-                    <a:spcPts val="3000"/>
-                  </a:spcBef>
-                  <a:buNone/>
-                </a:pPr>
-                <a:r>
-                  <a:rPr b="1"/>
-                  <a:t>NMFS immature survey biomass index</a:t>
-                </a:r>
-              </a:p>
-              <a:p>
-                <a:pPr lvl="0"/>
-                <a:r>
-                  <a:rPr/>
-                  <a:t>Immature index provides </a:t>
-                </a:r>
-                <a:r>
-                  <a:rPr b="1"/>
-                  <a:t>information on immature abundance</a:t>
-                </a:r>
-                <a:r>
-                  <a:rPr/>
-                  <a:t>.</a:t>
-                </a:r>
-              </a:p>
-              <a:p>
-                <a:pPr lvl="0"/>
-                <a:r>
-                  <a:rPr b="1"/>
-                  <a:t>Removes the bimodality</a:t>
-                </a:r>
-                <a:r>
-                  <a:rPr/>
-                  <a:t> observed in jitter analyses (see Results).</a:t>
-                </a:r>
-              </a:p>
-              <a:p>
-                <a:pPr lvl="0"/>
-                <a:r>
-                  <a:rPr/>
-                  <a:t>Comes with a </a:t>
-                </a:r>
-                <a:r>
-                  <a:rPr b="1"/>
-                  <a:t>substantially higher estimate of mature male </a:t>
-                </a:r>
-                <a14:m>
-                  <m:oMath xmlns:m="http://schemas.openxmlformats.org/officeDocument/2006/math">
-                    <m:r>
-                      <m:t>M</m:t>
-                    </m:r>
-                  </m:oMath>
-                </a14:m>
-                <a:r>
-                  <a:rPr/>
-                  <a:t> (&gt; 0.6) that propagates into reference points.</a:t>
-                </a:r>
-              </a:p>
-              <a:p>
-                <a:pPr lvl="0"/>
-                <a:r>
-                  <a:rPr/>
-                  <a:t>Combination of immature index + hybrids was </a:t>
-                </a:r>
-                <a:r>
-                  <a:rPr b="1"/>
-                  <a:t>not explored</a:t>
-                </a:r>
-                <a:r>
-                  <a:rPr/>
-                  <a:t>.</a:t>
-                </a:r>
-              </a:p>
-            </p:txBody>
-          </p:sp>
-        </mc:Choice>
-      </mc:AlternateContent>
-      <p:pic>
-        <p:nvPicPr>
-          <p:cNvPr descr="Snow2026_may_CPT_files/figure-pptx/idx-imm-1.png" id="0" name="Picture 1"/>
-          <p:cNvPicPr>
-            <a:picLocks noGrp="1" noChangeAspect="1"/>
-          </p:cNvPicPr>
-          <p:nvPr/>
-        </p:nvPicPr>
-        <p:blipFill>
-          <a:blip r:embed="rId2"/>
-          <a:stretch>
-            <a:fillRect/>
-          </a:stretch>
-        </p:blipFill>
-        <p:spPr bwMode="auto">
-          <a:xfrm>
-            <a:off x="3568700" y="1371600"/>
-            <a:ext cx="5105400" cy="2044700"/>
-          </a:xfrm>
-          <a:prstGeom prst="rect">
-            <a:avLst/>
-          </a:prstGeom>
-          <a:noFill/>
-          <a:ln w="9525">
-            <a:noFill/>
-            <a:headEnd/>
-            <a:tailEnd/>
-          </a:ln>
-        </p:spPr>
-      </p:pic>
+      <p:sp>
+        <p:nvSpPr>
+          <p:cNvPr id="2" name="Title 1"/>
+          <p:cNvSpPr>
+            <a:spLocks noGrp="1"/>
+          </p:cNvSpPr>
+          <p:nvPr>
+            <p:ph type="title"/>
+          </p:nvPr>
+        </p:nvSpPr>
+        <p:spPr/>
+        <p:txBody>
+          <a:bodyPr/>
+          <a:lstStyle/>
+          <a:p>
+            <a:pPr lvl="0" indent="0" marL="0">
+              <a:buNone/>
+            </a:pPr>
+            <a:r>
+              <a:rPr/>
+              <a:t>Axis 3 – New maturity workflow</a:t>
+            </a:r>
+          </a:p>
+        </p:txBody>
+      </p:sp>
+      <p:graphicFrame>
+        <p:nvGraphicFramePr>
+          <p:cNvPr id="6" name="Content Placeholder 5"/>
+          <p:cNvGraphicFramePr>
+            <a:graphicFrameLocks noGrp="1"/>
+          </p:cNvGraphicFramePr>
+          <p:nvPr>
+            <p:ph idx="1"/>
+          </p:nvPr>
+        </p:nvGraphicFramePr>
+        <p:xfrm>
+          <a:off x="457200" y="1193800"/>
+          <a:ext cx="8229600" cy="3390900"/>
+        </p:xfrm>
+        <a:graphic>
+          <a:graphicData uri="http://schemas.openxmlformats.org/drawingml/2006/table">
+            <a:tbl>
+              <a:tblPr firstRow="1" bandRow="1">
+                <a:tableStyleId>{5C22544A-7EE6-4342-B048-85BDC9FD1C3A}</a:tableStyleId>
+              </a:tblPr>
+              <a:tblGrid>
+                <a:gridCol w="1739900"/>
+                <a:gridCol w="3238500"/>
+                <a:gridCol w="3238500"/>
+              </a:tblGrid>
+              <a:tr h="0">
+                <a:tc>
+                  <a:txBody>
+                    <a:bodyPr/>
+                    <a:lstStyle/>
+                    <a:p>
+                      <a:pPr lvl="0" indent="0" marL="0">
+                        <a:buNone/>
+                      </a:pPr>
+                      <a:r>
+                        <a:rPr/>
+                        <a:t>Model</a:t>
+                      </a:r>
+                    </a:p>
+                  </a:txBody>
+                  <a:tcPr/>
+                </a:tc>
+                <a:tc>
+                  <a:txBody>
+                    <a:bodyPr/>
+                    <a:lstStyle/>
+                    <a:p>
+                      <a:pPr lvl="0" indent="0" marL="0">
+                        <a:buNone/>
+                      </a:pPr>
+                      <a:r>
+                        <a:rPr/>
+                        <a:t>Abr.</a:t>
+                      </a:r>
+                    </a:p>
+                  </a:txBody>
+                  <a:tcPr/>
+                </a:tc>
+                <a:tc>
+                  <a:txBody>
+                    <a:bodyPr/>
+                    <a:lstStyle/>
+                    <a:p>
+                      <a:pPr lvl="0" indent="0" marL="0">
+                        <a:buNone/>
+                      </a:pPr>
+                      <a:r>
+                        <a:rPr/>
+                        <a:t>Description</a:t>
+                      </a:r>
+                    </a:p>
+                  </a:txBody>
+                  <a:tcPr/>
+                </a:tc>
+              </a:tr>
+              <a:tr h="0">
+                <a:tc>
+                  <a:txBody>
+                    <a:bodyPr/>
+                    <a:lstStyle/>
+                    <a:p>
+                      <a:pPr lvl="0" indent="0" marL="0">
+                        <a:buNone/>
+                      </a:pPr>
+                      <a:r>
+                        <a:rPr>
+                          <a:latin typeface="Courier"/>
+                        </a:rPr>
+                        <a:t>25.2a</a:t>
+                      </a:r>
+                    </a:p>
+                  </a:txBody>
+                </a:tc>
+                <a:tc>
+                  <a:txBody>
+                    <a:bodyPr/>
+                    <a:lstStyle/>
+                    <a:p>
+                      <a:pPr lvl="0" indent="0" marL="0">
+                        <a:buNone/>
+                      </a:pPr>
+                      <a:r>
+                        <a:rPr/>
+                        <a:t>update + new_mat</a:t>
+                      </a:r>
+                    </a:p>
+                  </a:txBody>
+                </a:tc>
+                <a:tc>
+                  <a:txBody>
+                    <a:bodyPr/>
+                    <a:lstStyle/>
+                    <a:p>
+                      <a:pPr lvl="0" indent="0" marL="0">
+                        <a:buNone/>
+                      </a:pPr>
+                      <a:r>
+                        <a:rPr>
+                          <a:latin typeface="Courier"/>
+                        </a:rPr>
+                        <a:t>25.1a</a:t>
+                      </a:r>
+                      <a:r>
+                        <a:rPr/>
+                        <a:t> + new ogive</a:t>
+                      </a:r>
+                    </a:p>
+                  </a:txBody>
+                </a:tc>
+              </a:tr>
+              <a:tr h="0">
+                <a:tc>
+                  <a:txBody>
+                    <a:bodyPr/>
+                    <a:lstStyle/>
+                    <a:p>
+                      <a:pPr lvl="0" indent="0" marL="0">
+                        <a:buNone/>
+                      </a:pPr>
+                      <a:r>
+                        <a:rPr>
+                          <a:latin typeface="Courier"/>
+                        </a:rPr>
+                        <a:t>25.2b</a:t>
+                      </a:r>
+                    </a:p>
+                  </a:txBody>
+                </a:tc>
+                <a:tc>
+                  <a:txBody>
+                    <a:bodyPr/>
+                    <a:lstStyle/>
+                    <a:p>
+                      <a:pPr lvl="0" indent="0" marL="0">
+                        <a:buNone/>
+                      </a:pPr>
+                      <a:r>
+                        <a:rPr/>
+                        <a:t>update + compfix + new_mat</a:t>
+                      </a:r>
+                    </a:p>
+                  </a:txBody>
+                </a:tc>
+                <a:tc>
+                  <a:txBody>
+                    <a:bodyPr/>
+                    <a:lstStyle/>
+                    <a:p>
+                      <a:pPr lvl="0" indent="0" marL="0">
+                        <a:buNone/>
+                      </a:pPr>
+                      <a:r>
+                        <a:rPr>
+                          <a:latin typeface="Courier"/>
+                        </a:rPr>
+                        <a:t>25.1b</a:t>
+                      </a:r>
+                      <a:r>
+                        <a:rPr/>
+                        <a:t> + new ogive</a:t>
+                      </a:r>
+                    </a:p>
+                  </a:txBody>
+                </a:tc>
+              </a:tr>
+              <a:tr h="0">
+                <a:tc>
+                  <a:txBody>
+                    <a:bodyPr/>
+                    <a:lstStyle/>
+                    <a:p>
+                      <a:pPr lvl="0" indent="0" marL="0">
+                        <a:buNone/>
+                      </a:pPr>
+                      <a:r>
+                        <a:rPr>
+                          <a:latin typeface="Courier"/>
+                        </a:rPr>
+                        <a:t>25.2c</a:t>
+                      </a:r>
+                    </a:p>
+                  </a:txBody>
+                </a:tc>
+                <a:tc>
+                  <a:txBody>
+                    <a:bodyPr/>
+                    <a:lstStyle/>
+                    <a:p>
+                      <a:pPr lvl="0" indent="0" marL="0">
+                        <a:buNone/>
+                      </a:pPr>
+                      <a:r>
+                        <a:rPr/>
+                        <a:t>update + compfix + plus_group + new_mat</a:t>
+                      </a:r>
+                    </a:p>
+                  </a:txBody>
+                </a:tc>
+                <a:tc>
+                  <a:txBody>
+                    <a:bodyPr/>
+                    <a:lstStyle/>
+                    <a:p>
+                      <a:pPr lvl="0" indent="0" marL="0">
+                        <a:buNone/>
+                      </a:pPr>
+                      <a:r>
+                        <a:rPr>
+                          <a:latin typeface="Courier"/>
+                        </a:rPr>
+                        <a:t>25.1c</a:t>
+                      </a:r>
+                      <a:r>
+                        <a:rPr/>
+                        <a:t> + new ogive</a:t>
+                      </a:r>
+                    </a:p>
+                  </a:txBody>
+                </a:tc>
+              </a:tr>
+              <a:tr h="0">
+                <a:tc>
+                  <a:txBody>
+                    <a:bodyPr/>
+                    <a:lstStyle/>
+                    <a:p>
+                      <a:pPr lvl="0" indent="0" marL="0">
+                        <a:buNone/>
+                      </a:pPr>
+                      <a:r>
+                        <a:rPr>
+                          <a:latin typeface="Courier"/>
+                        </a:rPr>
+                        <a:t>25.2d</a:t>
+                      </a:r>
+                    </a:p>
+                  </a:txBody>
+                </a:tc>
+                <a:tc>
+                  <a:txBody>
+                    <a:bodyPr/>
+                    <a:lstStyle/>
+                    <a:p>
+                      <a:pPr lvl="0" indent="0" marL="0">
+                        <a:buNone/>
+                      </a:pPr>
+                      <a:r>
+                        <a:rPr/>
+                        <a:t>update + compfix + plus_group + new_mat + imm_surv</a:t>
+                      </a:r>
+                    </a:p>
+                  </a:txBody>
+                </a:tc>
+                <a:tc>
+                  <a:txBody>
+                    <a:bodyPr/>
+                    <a:lstStyle/>
+                    <a:p>
+                      <a:pPr lvl="0" indent="0" marL="0">
+                        <a:buNone/>
+                      </a:pPr>
+                      <a:r>
+                        <a:rPr>
+                          <a:latin typeface="Courier"/>
+                        </a:rPr>
+                        <a:t>25.1c</a:t>
+                      </a:r>
+                      <a:r>
+                        <a:rPr/>
+                        <a:t> + new + immature survey</a:t>
+                      </a:r>
+                    </a:p>
+                  </a:txBody>
+                </a:tc>
+              </a:tr>
+            </a:tbl>
+          </a:graphicData>
+        </a:graphic>
+      </p:graphicFrame>
     </p:spTree>
   </p:cSld>
 </p:sld>
@@ -5019,7 +5355,12 @@
             <p:ph type="title"/>
           </p:nvPr>
         </p:nvSpPr>
-        <p:spPr/>
+        <p:spPr>
+          <a:xfrm>
+            <a:off x="457201" y="204787"/>
+            <a:ext cx="3008313" cy="871538"/>
+          </a:xfrm>
+        </p:spPr>
         <p:txBody>
           <a:bodyPr/>
           <a:lstStyle/>
@@ -5029,332 +5370,11 @@
             </a:pPr>
             <a:r>
               <a:rPr/>
-              <a:t>Axis 3 – New maturity workflow</a:t>
-            </a:r>
-          </a:p>
-        </p:txBody>
-      </p:sp>
-      <p:graphicFrame>
-        <p:nvGraphicFramePr>
-          <p:cNvPr id="6" name="Content Placeholder 5"/>
-          <p:cNvGraphicFramePr>
-            <a:graphicFrameLocks noGrp="1"/>
-          </p:cNvGraphicFramePr>
-          <p:nvPr>
-            <p:ph idx="1"/>
-          </p:nvPr>
-        </p:nvGraphicFramePr>
-        <p:xfrm>
-          <a:off x="457200" y="1193800"/>
-          <a:ext cx="8229600" cy="3390900"/>
-        </p:xfrm>
-        <a:graphic>
-          <a:graphicData uri="http://schemas.openxmlformats.org/drawingml/2006/table">
-            <a:tbl>
-              <a:tblPr firstRow="1" bandRow="1">
-                <a:tableStyleId>{5C22544A-7EE6-4342-B048-85BDC9FD1C3A}</a:tableStyleId>
-              </a:tblPr>
-              <a:tblGrid>
-                <a:gridCol w="1739900"/>
-                <a:gridCol w="3238500"/>
-                <a:gridCol w="3238500"/>
-              </a:tblGrid>
-              <a:tr h="0">
-                <a:tc>
-                  <a:txBody>
-                    <a:bodyPr/>
-                    <a:lstStyle/>
-                    <a:p>
-                      <a:pPr lvl="0" indent="0" marL="0">
-                        <a:buNone/>
-                      </a:pPr>
-                      <a:r>
-                        <a:rPr/>
-                        <a:t>Model</a:t>
-                      </a:r>
-                    </a:p>
-                  </a:txBody>
-                  <a:tcPr/>
-                </a:tc>
-                <a:tc>
-                  <a:txBody>
-                    <a:bodyPr/>
-                    <a:lstStyle/>
-                    <a:p>
-                      <a:pPr lvl="0" indent="0" marL="0">
-                        <a:buNone/>
-                      </a:pPr>
-                      <a:r>
-                        <a:rPr/>
-                        <a:t>Abr.</a:t>
-                      </a:r>
-                    </a:p>
-                  </a:txBody>
-                  <a:tcPr/>
-                </a:tc>
-                <a:tc>
-                  <a:txBody>
-                    <a:bodyPr/>
-                    <a:lstStyle/>
-                    <a:p>
-                      <a:pPr lvl="0" indent="0" marL="0">
-                        <a:buNone/>
-                      </a:pPr>
-                      <a:r>
-                        <a:rPr/>
-                        <a:t>Description</a:t>
-                      </a:r>
-                    </a:p>
-                  </a:txBody>
-                  <a:tcPr/>
-                </a:tc>
-              </a:tr>
-              <a:tr h="0">
-                <a:tc>
-                  <a:txBody>
-                    <a:bodyPr/>
-                    <a:lstStyle/>
-                    <a:p>
-                      <a:pPr lvl="0" indent="0" marL="0">
-                        <a:buNone/>
-                      </a:pPr>
-                      <a:r>
-                        <a:rPr>
-                          <a:latin typeface="Courier"/>
-                        </a:rPr>
-                        <a:t>25.2a</a:t>
-                      </a:r>
-                    </a:p>
-                  </a:txBody>
-                </a:tc>
-                <a:tc>
-                  <a:txBody>
-                    <a:bodyPr/>
-                    <a:lstStyle/>
-                    <a:p>
-                      <a:pPr lvl="0" indent="0" marL="0">
-                        <a:buNone/>
-                      </a:pPr>
-                      <a:r>
-                        <a:rPr/>
-                        <a:t>update + new_mat</a:t>
-                      </a:r>
-                    </a:p>
-                  </a:txBody>
-                </a:tc>
-                <a:tc>
-                  <a:txBody>
-                    <a:bodyPr/>
-                    <a:lstStyle/>
-                    <a:p>
-                      <a:pPr lvl="0" indent="0" marL="0">
-                        <a:buNone/>
-                      </a:pPr>
-                      <a:r>
-                        <a:rPr>
-                          <a:latin typeface="Courier"/>
-                        </a:rPr>
-                        <a:t>25.1a</a:t>
-                      </a:r>
-                      <a:r>
-                        <a:rPr/>
-                        <a:t> + new ogive</a:t>
-                      </a:r>
-                    </a:p>
-                  </a:txBody>
-                </a:tc>
-              </a:tr>
-              <a:tr h="0">
-                <a:tc>
-                  <a:txBody>
-                    <a:bodyPr/>
-                    <a:lstStyle/>
-                    <a:p>
-                      <a:pPr lvl="0" indent="0" marL="0">
-                        <a:buNone/>
-                      </a:pPr>
-                      <a:r>
-                        <a:rPr>
-                          <a:latin typeface="Courier"/>
-                        </a:rPr>
-                        <a:t>25.2b</a:t>
-                      </a:r>
-                    </a:p>
-                  </a:txBody>
-                </a:tc>
-                <a:tc>
-                  <a:txBody>
-                    <a:bodyPr/>
-                    <a:lstStyle/>
-                    <a:p>
-                      <a:pPr lvl="0" indent="0" marL="0">
-                        <a:buNone/>
-                      </a:pPr>
-                      <a:r>
-                        <a:rPr/>
-                        <a:t>update + compfix + new_mat</a:t>
-                      </a:r>
-                    </a:p>
-                  </a:txBody>
-                </a:tc>
-                <a:tc>
-                  <a:txBody>
-                    <a:bodyPr/>
-                    <a:lstStyle/>
-                    <a:p>
-                      <a:pPr lvl="0" indent="0" marL="0">
-                        <a:buNone/>
-                      </a:pPr>
-                      <a:r>
-                        <a:rPr>
-                          <a:latin typeface="Courier"/>
-                        </a:rPr>
-                        <a:t>25.1b</a:t>
-                      </a:r>
-                      <a:r>
-                        <a:rPr/>
-                        <a:t> + new ogive</a:t>
-                      </a:r>
-                    </a:p>
-                  </a:txBody>
-                </a:tc>
-              </a:tr>
-              <a:tr h="0">
-                <a:tc>
-                  <a:txBody>
-                    <a:bodyPr/>
-                    <a:lstStyle/>
-                    <a:p>
-                      <a:pPr lvl="0" indent="0" marL="0">
-                        <a:buNone/>
-                      </a:pPr>
-                      <a:r>
-                        <a:rPr>
-                          <a:latin typeface="Courier"/>
-                        </a:rPr>
-                        <a:t>25.2c</a:t>
-                      </a:r>
-                    </a:p>
-                  </a:txBody>
-                </a:tc>
-                <a:tc>
-                  <a:txBody>
-                    <a:bodyPr/>
-                    <a:lstStyle/>
-                    <a:p>
-                      <a:pPr lvl="0" indent="0" marL="0">
-                        <a:buNone/>
-                      </a:pPr>
-                      <a:r>
-                        <a:rPr/>
-                        <a:t>update + compfix + plus_group + new_mat</a:t>
-                      </a:r>
-                    </a:p>
-                  </a:txBody>
-                </a:tc>
-                <a:tc>
-                  <a:txBody>
-                    <a:bodyPr/>
-                    <a:lstStyle/>
-                    <a:p>
-                      <a:pPr lvl="0" indent="0" marL="0">
-                        <a:buNone/>
-                      </a:pPr>
-                      <a:r>
-                        <a:rPr>
-                          <a:latin typeface="Courier"/>
-                        </a:rPr>
-                        <a:t>25.1c</a:t>
-                      </a:r>
-                      <a:r>
-                        <a:rPr/>
-                        <a:t> + new ogive</a:t>
-                      </a:r>
-                    </a:p>
-                  </a:txBody>
-                </a:tc>
-              </a:tr>
-              <a:tr h="0">
-                <a:tc>
-                  <a:txBody>
-                    <a:bodyPr/>
-                    <a:lstStyle/>
-                    <a:p>
-                      <a:pPr lvl="0" indent="0" marL="0">
-                        <a:buNone/>
-                      </a:pPr>
-                      <a:r>
-                        <a:rPr>
-                          <a:latin typeface="Courier"/>
-                        </a:rPr>
-                        <a:t>25.2d</a:t>
-                      </a:r>
-                    </a:p>
-                  </a:txBody>
-                </a:tc>
-                <a:tc>
-                  <a:txBody>
-                    <a:bodyPr/>
-                    <a:lstStyle/>
-                    <a:p>
-                      <a:pPr lvl="0" indent="0" marL="0">
-                        <a:buNone/>
-                      </a:pPr>
-                      <a:r>
-                        <a:rPr/>
-                        <a:t>update + compfix + plus_group + new_mat + imm_surv</a:t>
-                      </a:r>
-                    </a:p>
-                  </a:txBody>
-                </a:tc>
-                <a:tc>
-                  <a:txBody>
-                    <a:bodyPr/>
-                    <a:lstStyle/>
-                    <a:p>
-                      <a:pPr lvl="0" indent="0" marL="0">
-                        <a:buNone/>
-                      </a:pPr>
-                      <a:r>
-                        <a:rPr>
-                          <a:latin typeface="Courier"/>
-                        </a:rPr>
-                        <a:t>25.1c</a:t>
-                      </a:r>
-                      <a:r>
-                        <a:rPr/>
-                        <a:t> + new + immature survey</a:t>
-                      </a:r>
-                    </a:p>
-                  </a:txBody>
-                </a:tc>
-              </a:tr>
-            </a:tbl>
-          </a:graphicData>
-        </a:graphic>
-      </p:graphicFrame>
-    </p:spTree>
-  </p:cSld>
-</p:sld>
-</file>
-
-<file path=ppt/slides/slide22.xml><?xml version="1.0" encoding="utf-8"?>
-<p:sld xmlns:a="http://schemas.openxmlformats.org/drawingml/2006/main" xmlns:r="http://schemas.openxmlformats.org/officeDocument/2006/relationships" xmlns:p="http://schemas.openxmlformats.org/presentationml/2006/main">
-  <p:cSld>
-    <p:spTree>
-      <p:nvGrpSpPr>
-        <p:cNvPr id="1" name=""/>
-        <p:cNvGrpSpPr/>
-        <p:nvPr/>
-      </p:nvGrpSpPr>
-      <p:grpSpPr>
-        <a:xfrm>
-          <a:off x="0" y="0"/>
-          <a:ext cx="0" cy="0"/>
-          <a:chOff x="0" y="0"/>
-          <a:chExt cx="0" cy="0"/>
-        </a:xfrm>
-      </p:grpSpPr>
+              <a:t>New maturity workflow (Kodiak / Ryznar, in prep)</a:t>
+            </a:r>
+          </a:p>
+        </p:txBody>
+      </p:sp>
       <mc:AlternateContent xmlns:mc="http://schemas.openxmlformats.org/markup-compatibility/2006">
         <mc:Choice xmlns:a14="http://schemas.microsoft.com/office/drawing/2010/main" Requires="a14">
           <p:sp>
@@ -5374,10 +5394,6 @@
               <a:p>
                 <a:pPr lvl="0"/>
                 <a:r>
-                  <a:rPr/>
-                  <a:t>New workflow: </a:t>
-                </a:r>
-                <a:r>
                   <a:rPr b="1">
                     <a:latin typeface="Courier"/>
                   </a:rPr>
@@ -5411,7 +5427,21 @@
                 <a:pPr lvl="0"/>
                 <a:r>
                   <a:rPr/>
-                  <a:t>New workflow has a </a:t>
+                  <a:t>Population-level annual ogive obtained by integrating the predicted surface across stations.</a:t>
+                </a:r>
+              </a:p>
+              <a:p>
+                <a:pPr lvl="0"/>
+                <a:r>
+                  <a:rPr/>
+                  <a:t>Replaces the legacy “fit a curve to chela ratios per year/size” approach.</a:t>
+                </a:r>
+              </a:p>
+              <a:p>
+                <a:pPr lvl="0"/>
+                <a:r>
+                  <a:rPr/>
+                  <a:t>Has a </a:t>
                 </a:r>
                 <a:r>
                   <a:rPr b="1"/>
@@ -5444,120 +5474,6 @@
                 </a:r>
               </a:p>
               <a:p>
-                <a:pPr lvl="0" indent="0" marL="0">
-                  <a:spcBef>
-                    <a:spcPts val="3000"/>
-                  </a:spcBef>
-                  <a:buNone/>
-                </a:pPr>
-                <a:r>
-                  <a:rPr b="1"/>
-                  <a:t>New maturity workflow (Kodiak / Ryznar, in prep)</a:t>
-                </a:r>
-              </a:p>
-              <a:p>
-                <a:pPr lvl="0"/>
-                <a:r>
-                  <a:rPr/>
-                  <a:t>Replaces the legacy “fit a curve to chela ratios per year/size” approach with a single </a:t>
-                </a:r>
-                <a:r>
-                  <a:rPr b="1">
-                    <a:latin typeface="Courier"/>
-                  </a:rPr>
-                  <a:t>sdmTMB</a:t>
-                </a:r>
-                <a:r>
-                  <a:rPr b="1"/>
-                  <a:t> spatiotemporal model</a:t>
-                </a:r>
-                <a:r>
-                  <a:rPr/>
-                  <a:t> fit to chela maturity classifications across all years and stations.</a:t>
-                </a:r>
-              </a:p>
-              <a:p>
-                <a:pPr lvl="0"/>
-                <a:r>
-                  <a:rPr/>
-                  <a:t>Borrows information across years and locations for size bins with sparse chela data.</a:t>
-                </a:r>
-              </a:p>
-              <a:p>
-                <a:pPr lvl="0"/>
-                <a:r>
-                  <a:rPr/>
-                  <a:t>Does not extrapolate the predicted spatial probability surface beyond stations with measured crab.</a:t>
-                </a:r>
-              </a:p>
-              <a:p>
-                <a:pPr lvl="0"/>
-                <a:r>
-                  <a:rPr/>
-                  <a:t>Population-level annual ogive obtained by integrating the predicted surface across stations.</a:t>
-                </a:r>
-              </a:p>
-              <a:p>
-                <a:pPr lvl="0"/>
-                <a:r>
-                  <a:rPr b="1"/>
-                  <a:t>Result:</a:t>
-                </a:r>
-                <a:r>
-                  <a:rPr/>
-                  <a:t> much weaker temporal trend in </a:t>
-                </a:r>
-                <a14:m>
-                  <m:oMath xmlns:m="http://schemas.openxmlformats.org/officeDocument/2006/math">
-                    <m:r>
-                      <m:rPr>
-                        <m:sty m:val="p"/>
-                      </m:rPr>
-                      <m:t>Pr</m:t>
-                    </m:r>
-                  </m:oMath>
-                </a14:m>
-                <a:r>
-                  <a:rPr/>
-                  <a:t>(terminal molt) at intermediate sizes.</a:t>
-                </a:r>
-              </a:p>
-              <a:p>
-                <a:pPr lvl="1"/>
-                <a:r>
-                  <a:rPr/>
-                  <a:t>Legacy: at 77 mm, ~0.2 (early 1990s) </a:t>
-                </a:r>
-                <a14:m>
-                  <m:oMath xmlns:m="http://schemas.openxmlformats.org/officeDocument/2006/math">
-                    <m:r>
-                      <m:rPr>
-                        <m:sty m:val="p"/>
-                      </m:rPr>
-                      <m:t>→</m:t>
-                    </m:r>
-                  </m:oMath>
-                </a14:m>
-                <a:r>
-                  <a:rPr/>
-                  <a:t> ~0.5 (post-2010).</a:t>
-                </a:r>
-              </a:p>
-              <a:p>
-                <a:pPr lvl="1"/>
-                <a:r>
-                  <a:rPr/>
-                  <a:t>New: ~0.35–0.45 throughout the time series.</a:t>
-                </a:r>
-              </a:p>
-              <a:p>
-                <a:pPr lvl="0"/>
-                <a:r>
-                  <a:rPr/>
-                  <a:t>Updated time series of mature male survey abundance and immature/mature comp data; female time series unchanged.</a:t>
-                </a:r>
-              </a:p>
-              <a:p>
                 <a:pPr lvl="0"/>
                 <a:r>
                   <a:rPr/>
@@ -5570,18 +5486,6 @@
                 <a:r>
                   <a:rPr/>
                   <a:t> – a known limitation.</a:t>
-                </a:r>
-              </a:p>
-              <a:p>
-                <a:pPr lvl="0" indent="0" marL="0">
-                  <a:spcBef>
-                    <a:spcPts val="3000"/>
-                  </a:spcBef>
-                  <a:buNone/>
-                </a:pPr>
-                <a:r>
-                  <a:rPr b="1"/>
-                  <a:t>Maturity ogive – legacy vs. new workflow</a:t>
                 </a:r>
               </a:p>
             </p:txBody>
@@ -5623,6 +5527,58 @@
 </p:sld>
 </file>
 
+<file path=ppt/slides/slide22.xml><?xml version="1.0" encoding="utf-8"?>
+<p:sld xmlns:a="http://schemas.openxmlformats.org/drawingml/2006/main" xmlns:r="http://schemas.openxmlformats.org/officeDocument/2006/relationships" xmlns:p="http://schemas.openxmlformats.org/presentationml/2006/main">
+  <p:cSld>
+    <p:spTree>
+      <p:nvGrpSpPr>
+        <p:cNvPr id="1" name=""/>
+        <p:cNvGrpSpPr/>
+        <p:nvPr/>
+      </p:nvGrpSpPr>
+      <p:grpSpPr>
+        <a:xfrm>
+          <a:off x="0" y="0"/>
+          <a:ext cx="0" cy="0"/>
+          <a:chOff x="0" y="0"/>
+          <a:chExt cx="0" cy="0"/>
+        </a:xfrm>
+      </p:grpSpPr>
+      <p:pic>
+        <p:nvPicPr>
+          <p:cNvPr descr="Snow2026_may_CPT_files/figure-pptx/predmat-timeseries-1.png" id="0" name="Picture 1"/>
+          <p:cNvPicPr>
+            <a:picLocks noGrp="1" noChangeAspect="1"/>
+          </p:cNvPicPr>
+          <p:nvPr/>
+        </p:nvPicPr>
+        <p:blipFill>
+          <a:blip r:embed="rId2"/>
+          <a:stretch>
+            <a:fillRect/>
+          </a:stretch>
+        </p:blipFill>
+        <p:spPr bwMode="auto">
+          <a:xfrm>
+            <a:off x="508000" y="1193800"/>
+            <a:ext cx="8115300" cy="3390900"/>
+          </a:xfrm>
+          <a:prstGeom prst="rect">
+            <a:avLst/>
+          </a:prstGeom>
+          <a:noFill/>
+          <a:ln w="9525">
+            <a:noFill/>
+            <a:headEnd/>
+            <a:tailEnd/>
+          </a:ln>
+        </p:spPr>
+      </p:pic>
+    </p:spTree>
+  </p:cSld>
+</p:sld>
+</file>
+
 <file path=ppt/slides/slide23.xml><?xml version="1.0" encoding="utf-8"?>
 <p:sld xmlns:a="http://schemas.openxmlformats.org/drawingml/2006/main" xmlns:r="http://schemas.openxmlformats.org/officeDocument/2006/relationships" xmlns:p="http://schemas.openxmlformats.org/presentationml/2006/main">
   <p:cSld>
@@ -5642,12 +5598,12 @@
       </p:grpSpPr>
       <p:sp>
         <p:nvSpPr>
-          <p:cNvPr id="4" name="Text Placeholder 3"/>
-          <p:cNvSpPr>
-            <a:spLocks noGrp="1"/>
-          </p:cNvSpPr>
-          <p:nvPr>
-            <p:ph idx="2" sz="half" type="body"/>
+          <p:cNvPr id="2" name="Title 1"/>
+          <p:cNvSpPr>
+            <a:spLocks noGrp="1"/>
+          </p:cNvSpPr>
+          <p:nvPr>
+            <p:ph type="title"/>
           </p:nvPr>
         </p:nvSpPr>
         <p:spPr/>
@@ -5656,21 +5612,18 @@
           <a:lstStyle/>
           <a:p>
             <a:pPr lvl="0" indent="0" marL="0">
-              <a:spcBef>
-                <a:spcPts val="3000"/>
-              </a:spcBef>
               <a:buNone/>
             </a:pPr>
             <a:r>
-              <a:rPr b="1"/>
-              <a:t>P(mature) over time – 50, 80, 101 mm</a:t>
+              <a:rPr/>
+              <a:t>NMFS survey biomass index – mature crab (maturity effect)</a:t>
             </a:r>
           </a:p>
         </p:txBody>
       </p:sp>
       <p:pic>
         <p:nvPicPr>
-          <p:cNvPr descr="Snow2026_may_CPT_files/figure-pptx/predmat-timeseries-1.png" id="0" name="Picture 1"/>
+          <p:cNvPr descr="Snow2026_may_CPT_files/figure-pptx/idx-mature-newmat-1.png" id="0" name="Picture 1"/>
           <p:cNvPicPr>
             <a:picLocks noGrp="1" noChangeAspect="1"/>
           </p:cNvPicPr>
@@ -5684,8 +5637,8 @@
         </p:blipFill>
         <p:spPr bwMode="auto">
           <a:xfrm>
-            <a:off x="3568700" y="1333500"/>
-            <a:ext cx="5105400" cy="2133600"/>
+            <a:off x="1181100" y="1193800"/>
+            <a:ext cx="6781800" cy="3390900"/>
           </a:xfrm>
           <a:prstGeom prst="rect">
             <a:avLst/>
@@ -5720,37 +5673,9 @@
           <a:chExt cx="0" cy="0"/>
         </a:xfrm>
       </p:grpSpPr>
-      <p:sp>
-        <p:nvSpPr>
-          <p:cNvPr id="4" name="Text Placeholder 3"/>
-          <p:cNvSpPr>
-            <a:spLocks noGrp="1"/>
-          </p:cNvSpPr>
-          <p:nvPr>
-            <p:ph idx="2" sz="half" type="body"/>
-          </p:nvPr>
-        </p:nvSpPr>
-        <p:spPr/>
-        <p:txBody>
-          <a:bodyPr/>
-          <a:lstStyle/>
-          <a:p>
-            <a:pPr lvl="0" indent="0" marL="0">
-              <a:spcBef>
-                <a:spcPts val="3000"/>
-              </a:spcBef>
-              <a:buNone/>
-            </a:pPr>
-            <a:r>
-              <a:rPr b="1"/>
-              <a:t>NMFS survey biomass index – mature crab (maturity effect)</a:t>
-            </a:r>
-          </a:p>
-        </p:txBody>
-      </p:sp>
       <p:pic>
         <p:nvPicPr>
-          <p:cNvPr descr="Snow2026_may_CPT_files/figure-pptx/idx-mature-newmat-1.png" id="0" name="Picture 1"/>
+          <p:cNvPr descr="Snow2026_may_CPT_files/figure-pptx/comp-survey-newmat-1.png" id="0" name="Picture 1"/>
           <p:cNvPicPr>
             <a:picLocks noGrp="1" noChangeAspect="1"/>
           </p:cNvPicPr>
@@ -5764,8 +5689,8 @@
         </p:blipFill>
         <p:spPr bwMode="auto">
           <a:xfrm>
-            <a:off x="3568700" y="1117600"/>
-            <a:ext cx="5105400" cy="2552700"/>
+            <a:off x="596900" y="1193800"/>
+            <a:ext cx="7937500" cy="3390900"/>
           </a:xfrm>
           <a:prstGeom prst="rect">
             <a:avLst/>
@@ -5802,12 +5727,12 @@
       </p:grpSpPr>
       <p:sp>
         <p:nvSpPr>
-          <p:cNvPr id="4" name="Text Placeholder 3"/>
-          <p:cNvSpPr>
-            <a:spLocks noGrp="1"/>
-          </p:cNvSpPr>
-          <p:nvPr>
-            <p:ph idx="2" sz="half" type="body"/>
+          <p:cNvPr id="2" name="Title 1"/>
+          <p:cNvSpPr>
+            <a:spLocks noGrp="1"/>
+          </p:cNvSpPr>
+          <p:nvPr>
+            <p:ph type="title"/>
           </p:nvPr>
         </p:nvSpPr>
         <p:spPr/>
@@ -5816,48 +5741,314 @@
           <a:lstStyle/>
           <a:p>
             <a:pPr lvl="0" indent="0" marL="0">
-              <a:spcBef>
-                <a:spcPts val="3000"/>
-              </a:spcBef>
               <a:buNone/>
             </a:pPr>
             <a:r>
-              <a:rPr b="1"/>
-              <a:t>NMFS survey composition – mature males (maturity effect)</a:t>
-            </a:r>
-          </a:p>
-        </p:txBody>
-      </p:sp>
-      <p:pic>
-        <p:nvPicPr>
-          <p:cNvPr descr="Snow2026_may_CPT_files/figure-pptx/comp-survey-newmat-1.png" id="0" name="Picture 1"/>
-          <p:cNvPicPr>
-            <a:picLocks noGrp="1" noChangeAspect="1"/>
-          </p:cNvPicPr>
-          <p:nvPr/>
-        </p:nvPicPr>
-        <p:blipFill>
-          <a:blip r:embed="rId2"/>
-          <a:stretch>
-            <a:fillRect/>
-          </a:stretch>
-        </p:blipFill>
-        <p:spPr bwMode="auto">
-          <a:xfrm>
-            <a:off x="3568700" y="1308100"/>
-            <a:ext cx="5105400" cy="2184400"/>
-          </a:xfrm>
-          <a:prstGeom prst="rect">
-            <a:avLst/>
-          </a:prstGeom>
-          <a:noFill/>
-          <a:ln w="9525">
-            <a:noFill/>
-            <a:headEnd/>
-            <a:tailEnd/>
-          </a:ln>
-        </p:spPr>
-      </p:pic>
+              <a:rPr/>
+              <a:t>Axis 4 – Hybrid treatment</a:t>
+            </a:r>
+          </a:p>
+        </p:txBody>
+      </p:sp>
+      <p:graphicFrame>
+        <p:nvGraphicFramePr>
+          <p:cNvPr id="6" name="Content Placeholder 5"/>
+          <p:cNvGraphicFramePr>
+            <a:graphicFrameLocks noGrp="1"/>
+          </p:cNvGraphicFramePr>
+          <p:nvPr>
+            <p:ph idx="1"/>
+          </p:nvPr>
+        </p:nvGraphicFramePr>
+        <p:xfrm>
+          <a:off x="457200" y="1193800"/>
+          <a:ext cx="8229600" cy="3390900"/>
+        </p:xfrm>
+        <a:graphic>
+          <a:graphicData uri="http://schemas.openxmlformats.org/drawingml/2006/table">
+            <a:tbl>
+              <a:tblPr firstRow="1" bandRow="1">
+                <a:tableStyleId>{5C22544A-7EE6-4342-B048-85BDC9FD1C3A}</a:tableStyleId>
+              </a:tblPr>
+              <a:tblGrid>
+                <a:gridCol w="1739900"/>
+                <a:gridCol w="3238500"/>
+                <a:gridCol w="3238500"/>
+              </a:tblGrid>
+              <a:tr h="0">
+                <a:tc>
+                  <a:txBody>
+                    <a:bodyPr/>
+                    <a:lstStyle/>
+                    <a:p>
+                      <a:pPr lvl="0" indent="0" marL="0">
+                        <a:buNone/>
+                      </a:pPr>
+                      <a:r>
+                        <a:rPr/>
+                        <a:t>Model</a:t>
+                      </a:r>
+                    </a:p>
+                  </a:txBody>
+                  <a:tcPr/>
+                </a:tc>
+                <a:tc>
+                  <a:txBody>
+                    <a:bodyPr/>
+                    <a:lstStyle/>
+                    <a:p>
+                      <a:pPr lvl="0" indent="0" marL="0">
+                        <a:buNone/>
+                      </a:pPr>
+                      <a:r>
+                        <a:rPr/>
+                        <a:t>Abr.</a:t>
+                      </a:r>
+                    </a:p>
+                  </a:txBody>
+                  <a:tcPr/>
+                </a:tc>
+                <a:tc>
+                  <a:txBody>
+                    <a:bodyPr/>
+                    <a:lstStyle/>
+                    <a:p>
+                      <a:pPr lvl="0" indent="0" marL="0">
+                        <a:buNone/>
+                      </a:pPr>
+                      <a:r>
+                        <a:rPr/>
+                        <a:t>Description</a:t>
+                      </a:r>
+                    </a:p>
+                  </a:txBody>
+                  <a:tcPr/>
+                </a:tc>
+              </a:tr>
+              <a:tr h="0">
+                <a:tc>
+                  <a:txBody>
+                    <a:bodyPr/>
+                    <a:lstStyle/>
+                    <a:p>
+                      <a:pPr lvl="0" indent="0" marL="0">
+                        <a:buNone/>
+                      </a:pPr>
+                      <a:r>
+                        <a:rPr>
+                          <a:latin typeface="Courier"/>
+                        </a:rPr>
+                        <a:t>25.3a</a:t>
+                      </a:r>
+                    </a:p>
+                  </a:txBody>
+                </a:tc>
+                <a:tc>
+                  <a:txBody>
+                    <a:bodyPr/>
+                    <a:lstStyle/>
+                    <a:p>
+                      <a:pPr lvl="0" indent="0" marL="0">
+                        <a:buNone/>
+                      </a:pPr>
+                      <a:r>
+                        <a:rPr/>
+                        <a:t>update + compfix + plus_group + hyb_fishery</a:t>
+                      </a:r>
+                    </a:p>
+                  </a:txBody>
+                </a:tc>
+                <a:tc>
+                  <a:txBody>
+                    <a:bodyPr/>
+                    <a:lstStyle/>
+                    <a:p>
+                      <a:pPr lvl="0" indent="0" marL="0">
+                        <a:buNone/>
+                      </a:pPr>
+                      <a:r>
+                        <a:rPr>
+                          <a:latin typeface="Courier"/>
+                        </a:rPr>
+                        <a:t>25.1c</a:t>
+                      </a:r>
+                      <a:r>
+                        <a:rPr/>
+                        <a:t> + hybrids in directed-fishery comp + discards</a:t>
+                      </a:r>
+                    </a:p>
+                  </a:txBody>
+                </a:tc>
+              </a:tr>
+              <a:tr h="0">
+                <a:tc>
+                  <a:txBody>
+                    <a:bodyPr/>
+                    <a:lstStyle/>
+                    <a:p>
+                      <a:pPr lvl="0" indent="0" marL="0">
+                        <a:buNone/>
+                      </a:pPr>
+                      <a:r>
+                        <a:rPr>
+                          <a:latin typeface="Courier"/>
+                        </a:rPr>
+                        <a:t>25.3b</a:t>
+                      </a:r>
+                    </a:p>
+                  </a:txBody>
+                </a:tc>
+                <a:tc>
+                  <a:txBody>
+                    <a:bodyPr/>
+                    <a:lstStyle/>
+                    <a:p>
+                      <a:pPr lvl="0" indent="0" marL="0">
+                        <a:buNone/>
+                      </a:pPr>
+                      <a:r>
+                        <a:rPr/>
+                        <a:t>update + compfix + plus_group + hyb_surv</a:t>
+                      </a:r>
+                    </a:p>
+                  </a:txBody>
+                </a:tc>
+                <a:tc>
+                  <a:txBody>
+                    <a:bodyPr/>
+                    <a:lstStyle/>
+                    <a:p>
+                      <a:pPr lvl="0" indent="0" marL="0">
+                        <a:buNone/>
+                      </a:pPr>
+                      <a:r>
+                        <a:rPr>
+                          <a:latin typeface="Courier"/>
+                        </a:rPr>
+                        <a:t>25.1c</a:t>
+                      </a:r>
+                      <a:r>
+                        <a:rPr/>
+                        <a:t> + hybrids in NMFS summer survey biomass + comp</a:t>
+                      </a:r>
+                    </a:p>
+                  </a:txBody>
+                </a:tc>
+              </a:tr>
+              <a:tr h="0">
+                <a:tc>
+                  <a:txBody>
+                    <a:bodyPr/>
+                    <a:lstStyle/>
+                    <a:p>
+                      <a:pPr lvl="0" indent="0" marL="0">
+                        <a:buNone/>
+                      </a:pPr>
+                      <a:r>
+                        <a:rPr>
+                          <a:latin typeface="Courier"/>
+                        </a:rPr>
+                        <a:t>25.3c</a:t>
+                      </a:r>
+                    </a:p>
+                  </a:txBody>
+                </a:tc>
+                <a:tc>
+                  <a:txBody>
+                    <a:bodyPr/>
+                    <a:lstStyle/>
+                    <a:p>
+                      <a:pPr lvl="0" indent="0" marL="0">
+                        <a:buNone/>
+                      </a:pPr>
+                      <a:r>
+                        <a:rPr/>
+                        <a:t>update + compfix + plus_group + hyb_both</a:t>
+                      </a:r>
+                    </a:p>
+                  </a:txBody>
+                </a:tc>
+                <a:tc>
+                  <a:txBody>
+                    <a:bodyPr/>
+                    <a:lstStyle/>
+                    <a:p>
+                      <a:pPr lvl="0" indent="0" marL="0">
+                        <a:buNone/>
+                      </a:pPr>
+                      <a:r>
+                        <a:rPr>
+                          <a:latin typeface="Courier"/>
+                        </a:rPr>
+                        <a:t>25.1c</a:t>
+                      </a:r>
+                      <a:r>
+                        <a:rPr/>
+                        <a:t> + hybrids in both survey and fishery</a:t>
+                      </a:r>
+                    </a:p>
+                  </a:txBody>
+                </a:tc>
+              </a:tr>
+              <a:tr h="0">
+                <a:tc>
+                  <a:txBody>
+                    <a:bodyPr/>
+                    <a:lstStyle/>
+                    <a:p>
+                      <a:pPr lvl="0" indent="0" marL="0">
+                        <a:buNone/>
+                      </a:pPr>
+                      <a:r>
+                        <a:rPr>
+                          <a:latin typeface="Courier"/>
+                        </a:rPr>
+                        <a:t>25.3d</a:t>
+                      </a:r>
+                    </a:p>
+                  </a:txBody>
+                </a:tc>
+                <a:tc>
+                  <a:txBody>
+                    <a:bodyPr/>
+                    <a:lstStyle/>
+                    <a:p>
+                      <a:pPr lvl="0" indent="0" marL="0">
+                        <a:buNone/>
+                      </a:pPr>
+                      <a:r>
+                        <a:rPr/>
+                        <a:t>update + compfix + plus_group + hyb_both + new_mat</a:t>
+                      </a:r>
+                    </a:p>
+                  </a:txBody>
+                </a:tc>
+                <a:tc>
+                  <a:txBody>
+                    <a:bodyPr/>
+                    <a:lstStyle/>
+                    <a:p>
+                      <a:pPr lvl="0" indent="0" marL="0">
+                        <a:buNone/>
+                      </a:pPr>
+                      <a:r>
+                        <a:rPr>
+                          <a:latin typeface="Courier"/>
+                        </a:rPr>
+                        <a:t>25.3c</a:t>
+                      </a:r>
+                      <a:r>
+                        <a:rPr/>
+                        <a:t> + new maturity workflow</a:t>
+                      </a:r>
+                    </a:p>
+                  </a:txBody>
+                </a:tc>
+              </a:tr>
+            </a:tbl>
+          </a:graphicData>
+        </a:graphic>
+      </p:graphicFrame>
     </p:spTree>
   </p:cSld>
 </p:sld>
@@ -5900,310 +6091,86 @@
             </a:pPr>
             <a:r>
               <a:rPr/>
-              <a:t>Axis 4 – Hybrid treatment</a:t>
-            </a:r>
-          </a:p>
-        </p:txBody>
-      </p:sp>
-      <p:graphicFrame>
-        <p:nvGraphicFramePr>
-          <p:cNvPr id="6" name="Content Placeholder 5"/>
-          <p:cNvGraphicFramePr>
-            <a:graphicFrameLocks noGrp="1"/>
-          </p:cNvGraphicFramePr>
+              <a:t>Hybrid data: directed-fishery discards</a:t>
+            </a:r>
+          </a:p>
+        </p:txBody>
+      </p:sp>
+      <p:sp>
+        <p:nvSpPr>
+          <p:cNvPr id="3" name="Content Placeholder 2"/>
+          <p:cNvSpPr>
+            <a:spLocks noGrp="1"/>
+          </p:cNvSpPr>
           <p:nvPr>
             <p:ph idx="1"/>
           </p:nvPr>
-        </p:nvGraphicFramePr>
-        <p:xfrm>
-          <a:off x="457200" y="1193800"/>
-          <a:ext cx="8229600" cy="3390900"/>
-        </p:xfrm>
-        <a:graphic>
-          <a:graphicData uri="http://schemas.openxmlformats.org/drawingml/2006/table">
-            <a:tbl>
-              <a:tblPr firstRow="1" bandRow="1">
-                <a:tableStyleId>{5C22544A-7EE6-4342-B048-85BDC9FD1C3A}</a:tableStyleId>
-              </a:tblPr>
-              <a:tblGrid>
-                <a:gridCol w="1739900"/>
-                <a:gridCol w="3238500"/>
-                <a:gridCol w="3238500"/>
-              </a:tblGrid>
-              <a:tr h="0">
-                <a:tc>
-                  <a:txBody>
-                    <a:bodyPr/>
-                    <a:lstStyle/>
-                    <a:p>
-                      <a:pPr lvl="0" indent="0" marL="0">
-                        <a:buNone/>
-                      </a:pPr>
-                      <a:r>
-                        <a:rPr/>
-                        <a:t>Model</a:t>
-                      </a:r>
-                    </a:p>
-                  </a:txBody>
-                  <a:tcPr/>
-                </a:tc>
-                <a:tc>
-                  <a:txBody>
-                    <a:bodyPr/>
-                    <a:lstStyle/>
-                    <a:p>
-                      <a:pPr lvl="0" indent="0" marL="0">
-                        <a:buNone/>
-                      </a:pPr>
-                      <a:r>
-                        <a:rPr/>
-                        <a:t>Abr.</a:t>
-                      </a:r>
-                    </a:p>
-                  </a:txBody>
-                  <a:tcPr/>
-                </a:tc>
-                <a:tc>
-                  <a:txBody>
-                    <a:bodyPr/>
-                    <a:lstStyle/>
-                    <a:p>
-                      <a:pPr lvl="0" indent="0" marL="0">
-                        <a:buNone/>
-                      </a:pPr>
-                      <a:r>
-                        <a:rPr/>
-                        <a:t>Description</a:t>
-                      </a:r>
-                    </a:p>
-                  </a:txBody>
-                  <a:tcPr/>
-                </a:tc>
-              </a:tr>
-              <a:tr h="0">
-                <a:tc>
-                  <a:txBody>
-                    <a:bodyPr/>
-                    <a:lstStyle/>
-                    <a:p>
-                      <a:pPr lvl="0" indent="0" marL="0">
-                        <a:buNone/>
-                      </a:pPr>
-                      <a:r>
-                        <a:rPr>
-                          <a:latin typeface="Courier"/>
-                        </a:rPr>
-                        <a:t>25.3a</a:t>
-                      </a:r>
-                    </a:p>
-                  </a:txBody>
-                </a:tc>
-                <a:tc>
-                  <a:txBody>
-                    <a:bodyPr/>
-                    <a:lstStyle/>
-                    <a:p>
-                      <a:pPr lvl="0" indent="0" marL="0">
-                        <a:buNone/>
-                      </a:pPr>
-                      <a:r>
-                        <a:rPr/>
-                        <a:t>update + compfix + plus_group + hyb_fishery</a:t>
-                      </a:r>
-                    </a:p>
-                  </a:txBody>
-                </a:tc>
-                <a:tc>
-                  <a:txBody>
-                    <a:bodyPr/>
-                    <a:lstStyle/>
-                    <a:p>
-                      <a:pPr lvl="0" indent="0" marL="0">
-                        <a:buNone/>
-                      </a:pPr>
-                      <a:r>
-                        <a:rPr>
-                          <a:latin typeface="Courier"/>
-                        </a:rPr>
-                        <a:t>25.1c</a:t>
-                      </a:r>
-                      <a:r>
-                        <a:rPr/>
-                        <a:t> + hybrids in directed-fishery comp + discards</a:t>
-                      </a:r>
-                    </a:p>
-                  </a:txBody>
-                </a:tc>
-              </a:tr>
-              <a:tr h="0">
-                <a:tc>
-                  <a:txBody>
-                    <a:bodyPr/>
-                    <a:lstStyle/>
-                    <a:p>
-                      <a:pPr lvl="0" indent="0" marL="0">
-                        <a:buNone/>
-                      </a:pPr>
-                      <a:r>
-                        <a:rPr>
-                          <a:latin typeface="Courier"/>
-                        </a:rPr>
-                        <a:t>25.3b</a:t>
-                      </a:r>
-                    </a:p>
-                  </a:txBody>
-                </a:tc>
-                <a:tc>
-                  <a:txBody>
-                    <a:bodyPr/>
-                    <a:lstStyle/>
-                    <a:p>
-                      <a:pPr lvl="0" indent="0" marL="0">
-                        <a:buNone/>
-                      </a:pPr>
-                      <a:r>
-                        <a:rPr/>
-                        <a:t>update + compfix + plus_group + hyb_surv</a:t>
-                      </a:r>
-                    </a:p>
-                  </a:txBody>
-                </a:tc>
-                <a:tc>
-                  <a:txBody>
-                    <a:bodyPr/>
-                    <a:lstStyle/>
-                    <a:p>
-                      <a:pPr lvl="0" indent="0" marL="0">
-                        <a:buNone/>
-                      </a:pPr>
-                      <a:r>
-                        <a:rPr>
-                          <a:latin typeface="Courier"/>
-                        </a:rPr>
-                        <a:t>25.1c</a:t>
-                      </a:r>
-                      <a:r>
-                        <a:rPr/>
-                        <a:t> + hybrids in NMFS summer survey biomass + comp</a:t>
-                      </a:r>
-                    </a:p>
-                  </a:txBody>
-                </a:tc>
-              </a:tr>
-              <a:tr h="0">
-                <a:tc>
-                  <a:txBody>
-                    <a:bodyPr/>
-                    <a:lstStyle/>
-                    <a:p>
-                      <a:pPr lvl="0" indent="0" marL="0">
-                        <a:buNone/>
-                      </a:pPr>
-                      <a:r>
-                        <a:rPr>
-                          <a:latin typeface="Courier"/>
-                        </a:rPr>
-                        <a:t>25.3c</a:t>
-                      </a:r>
-                    </a:p>
-                  </a:txBody>
-                </a:tc>
-                <a:tc>
-                  <a:txBody>
-                    <a:bodyPr/>
-                    <a:lstStyle/>
-                    <a:p>
-                      <a:pPr lvl="0" indent="0" marL="0">
-                        <a:buNone/>
-                      </a:pPr>
-                      <a:r>
-                        <a:rPr/>
-                        <a:t>update + compfix + plus_group + hyb_both</a:t>
-                      </a:r>
-                    </a:p>
-                  </a:txBody>
-                </a:tc>
-                <a:tc>
-                  <a:txBody>
-                    <a:bodyPr/>
-                    <a:lstStyle/>
-                    <a:p>
-                      <a:pPr lvl="0" indent="0" marL="0">
-                        <a:buNone/>
-                      </a:pPr>
-                      <a:r>
-                        <a:rPr>
-                          <a:latin typeface="Courier"/>
-                        </a:rPr>
-                        <a:t>25.1c</a:t>
-                      </a:r>
-                      <a:r>
-                        <a:rPr/>
-                        <a:t> + hybrids in both survey and fishery</a:t>
-                      </a:r>
-                    </a:p>
-                  </a:txBody>
-                </a:tc>
-              </a:tr>
-              <a:tr h="0">
-                <a:tc>
-                  <a:txBody>
-                    <a:bodyPr/>
-                    <a:lstStyle/>
-                    <a:p>
-                      <a:pPr lvl="0" indent="0" marL="0">
-                        <a:buNone/>
-                      </a:pPr>
-                      <a:r>
-                        <a:rPr>
-                          <a:latin typeface="Courier"/>
-                        </a:rPr>
-                        <a:t>25.3d</a:t>
-                      </a:r>
-                    </a:p>
-                  </a:txBody>
-                </a:tc>
-                <a:tc>
-                  <a:txBody>
-                    <a:bodyPr/>
-                    <a:lstStyle/>
-                    <a:p>
-                      <a:pPr lvl="0" indent="0" marL="0">
-                        <a:buNone/>
-                      </a:pPr>
-                      <a:r>
-                        <a:rPr/>
-                        <a:t>update + compfix + plus_group + hyb_both + new_mat</a:t>
-                      </a:r>
-                    </a:p>
-                  </a:txBody>
-                </a:tc>
-                <a:tc>
-                  <a:txBody>
-                    <a:bodyPr/>
-                    <a:lstStyle/>
-                    <a:p>
-                      <a:pPr lvl="0" indent="0" marL="0">
-                        <a:buNone/>
-                      </a:pPr>
-                      <a:r>
-                        <a:rPr>
-                          <a:latin typeface="Courier"/>
-                        </a:rPr>
-                        <a:t>25.3c</a:t>
-                      </a:r>
-                      <a:r>
-                        <a:rPr/>
-                        <a:t> + new maturity workflow</a:t>
-                      </a:r>
-                    </a:p>
-                  </a:txBody>
-                </a:tc>
-              </a:tr>
-            </a:tbl>
-          </a:graphicData>
-        </a:graphic>
-      </p:graphicFrame>
+        </p:nvSpPr>
+        <p:spPr/>
+        <p:txBody>
+          <a:bodyPr/>
+          <a:lstStyle/>
+          <a:p>
+            <a:pPr lvl="0"/>
+            <a:r>
+              <a:rPr/>
+              <a:t>ADF&amp;G provided hybrid data as a </a:t>
+            </a:r>
+            <a:r>
+              <a:rPr b="1"/>
+              <a:t>separate species code</a:t>
+            </a:r>
+            <a:r>
+              <a:rPr/>
+              <a:t> (lumped opilio-, bairdi-, and unspecified-type).</a:t>
+            </a:r>
+          </a:p>
+          <a:p>
+            <a:pPr lvl="0"/>
+            <a:r>
+              <a:rPr/>
+              <a:t>Hybrid weights computed using </a:t>
+            </a:r>
+            <a:r>
+              <a:rPr b="1"/>
+              <a:t>snow crab L–W parameters</a:t>
+            </a:r>
+            <a:r>
+              <a:rPr/>
+              <a:t> (most hybrids are opilio-type).</a:t>
+            </a:r>
+          </a:p>
+          <a:p>
+            <a:pPr lvl="0"/>
+            <a:r>
+              <a:rPr/>
+              <a:t>Hybrid data are </a:t>
+            </a:r>
+            <a:r>
+              <a:rPr b="1"/>
+              <a:t>additive</a:t>
+            </a:r>
+            <a:r>
+              <a:rPr/>
+              <a:t> to existing snow-crab time series</a:t>
+            </a:r>
+          </a:p>
+          <a:p>
+            <a:pPr lvl="0"/>
+            <a:r>
+              <a:rPr/>
+              <a:t>CV on directed discards held at 0.7. Observer non-directed bycatch unchanged.</a:t>
+            </a:r>
+          </a:p>
+          <a:p>
+            <a:pPr lvl="0"/>
+            <a:r>
+              <a:rPr/>
+              <a:t>Retained hybrids cannot be separated from retained snow crab (hybrids already retained under snow IFQ; cannot be separated).</a:t>
+            </a:r>
+          </a:p>
+        </p:txBody>
+      </p:sp>
     </p:spTree>
   </p:cSld>
 </p:sld>
@@ -6233,7 +6200,7 @@
             <a:spLocks noGrp="1"/>
           </p:cNvSpPr>
           <p:nvPr>
-            <p:ph idx="1"/>
+            <p:ph idx="1" sz="half"/>
           </p:nvPr>
         </p:nvSpPr>
         <p:spPr/>
@@ -6244,123 +6211,6 @@
             <a:pPr lvl="0"/>
             <a:r>
               <a:rPr/>
-              <a:t>ADF&amp;G provided hybrid data as a </a:t>
-            </a:r>
-            <a:r>
-              <a:rPr b="1"/>
-              <a:t>separate species code</a:t>
-            </a:r>
-            <a:r>
-              <a:rPr/>
-              <a:t> (lumped opilio-, bairdi-, and unspecified-type).</a:t>
-            </a:r>
-          </a:p>
-          <a:p>
-            <a:pPr lvl="0"/>
-            <a:r>
-              <a:rPr/>
-              <a:t>Hybrid weights computed using </a:t>
-            </a:r>
-            <a:r>
-              <a:rPr b="1"/>
-              <a:t>snow crab L–W parameters</a:t>
-            </a:r>
-            <a:r>
-              <a:rPr/>
-              <a:t> (most hybrids are opilio-type).</a:t>
-            </a:r>
-          </a:p>
-          <a:p>
-            <a:pPr lvl="0"/>
-            <a:r>
-              <a:rPr/>
-              <a:t>Hybrid data are </a:t>
-            </a:r>
-            <a:r>
-              <a:rPr b="1"/>
-              <a:t>additive</a:t>
-            </a:r>
-            <a:r>
-              <a:rPr/>
-              <a:t> to existing snow-crab time series, </a:t>
-            </a:r>
-            <a:r>
-              <a:rPr b="1"/>
-              <a:t>except retained catch</a:t>
-            </a:r>
-            <a:r>
-              <a:rPr/>
-              <a:t> (hybrids already retained under snow IFQ; cannot be separated).</a:t>
-            </a:r>
-          </a:p>
-          <a:p>
-            <a:pPr lvl="0"/>
-            <a:r>
-              <a:rPr/>
-              <a:t>CV on directed discards held at 0.7. Observer non-directed bycatch unchanged.</a:t>
-            </a:r>
-          </a:p>
-          <a:p>
-            <a:pPr lvl="0" indent="0" marL="0">
-              <a:spcBef>
-                <a:spcPts val="3000"/>
-              </a:spcBef>
-              <a:buNone/>
-            </a:pPr>
-            <a:r>
-              <a:rPr b="1"/>
-              <a:t>Hybrid data: directed-fishery discards</a:t>
-            </a:r>
-          </a:p>
-        </p:txBody>
-      </p:sp>
-    </p:spTree>
-  </p:cSld>
-</p:sld>
-</file>
-
-<file path=ppt/slides/slide28.xml><?xml version="1.0" encoding="utf-8"?>
-<p:sld xmlns:a="http://schemas.openxmlformats.org/drawingml/2006/main" xmlns:r="http://schemas.openxmlformats.org/officeDocument/2006/relationships" xmlns:p="http://schemas.openxmlformats.org/presentationml/2006/main">
-  <p:cSld>
-    <p:spTree>
-      <p:nvGrpSpPr>
-        <p:cNvPr id="1" name=""/>
-        <p:cNvGrpSpPr/>
-        <p:nvPr/>
-      </p:nvGrpSpPr>
-      <p:grpSpPr>
-        <a:xfrm>
-          <a:off x="0" y="0"/>
-          <a:ext cx="0" cy="0"/>
-          <a:chOff x="0" y="0"/>
-          <a:chExt cx="0" cy="0"/>
-        </a:xfrm>
-      </p:grpSpPr>
-      <p:sp>
-        <p:nvSpPr>
-          <p:cNvPr id="3" name="Content Placeholder 2"/>
-          <p:cNvSpPr>
-            <a:spLocks noGrp="1"/>
-          </p:cNvSpPr>
-          <p:nvPr>
-            <p:ph idx="1" sz="half"/>
-          </p:nvPr>
-        </p:nvSpPr>
-        <p:spPr/>
-        <p:txBody>
-          <a:bodyPr/>
-          <a:lstStyle/>
-          <a:p>
-            <a:pPr lvl="0"/>
-            <a:r>
-              <a:rPr/>
-              <a:t>ADF&amp;G provided directed-fishery discards lumped across all hybrid types.</a:t>
-            </a:r>
-          </a:p>
-          <a:p>
-            <a:pPr lvl="0"/>
-            <a:r>
-              <a:rPr/>
               <a:t>Adding hybrids to the directed pot fishery </a:t>
             </a:r>
             <a:r>
@@ -6385,13 +6235,6 @@
             <a:r>
               <a:rPr/>
               <a:t>, not selectivity.</a:t>
-            </a:r>
-          </a:p>
-          <a:p>
-            <a:pPr lvl="0"/>
-            <a:r>
-              <a:rPr/>
-              <a:t>Retained hybrids cannot be separated from retained snow crab.</a:t>
             </a:r>
           </a:p>
         </p:txBody>
@@ -6431,6 +6274,83 @@
 </p:sld>
 </file>
 
+<file path=ppt/slides/slide28.xml><?xml version="1.0" encoding="utf-8"?>
+<p:sld xmlns:a="http://schemas.openxmlformats.org/drawingml/2006/main" xmlns:r="http://schemas.openxmlformats.org/officeDocument/2006/relationships" xmlns:p="http://schemas.openxmlformats.org/presentationml/2006/main">
+  <p:cSld>
+    <p:spTree>
+      <p:nvGrpSpPr>
+        <p:cNvPr id="1" name=""/>
+        <p:cNvGrpSpPr/>
+        <p:nvPr/>
+      </p:nvGrpSpPr>
+      <p:grpSpPr>
+        <a:xfrm>
+          <a:off x="0" y="0"/>
+          <a:ext cx="0" cy="0"/>
+          <a:chOff x="0" y="0"/>
+          <a:chExt cx="0" cy="0"/>
+        </a:xfrm>
+      </p:grpSpPr>
+      <p:sp>
+        <p:nvSpPr>
+          <p:cNvPr id="2" name="Title 1"/>
+          <p:cNvSpPr>
+            <a:spLocks noGrp="1"/>
+          </p:cNvSpPr>
+          <p:nvPr>
+            <p:ph type="title"/>
+          </p:nvPr>
+        </p:nvSpPr>
+        <p:spPr/>
+        <p:txBody>
+          <a:bodyPr/>
+          <a:lstStyle/>
+          <a:p>
+            <a:pPr lvl="0" indent="0" marL="0">
+              <a:buNone/>
+            </a:pPr>
+            <a:r>
+              <a:rPr/>
+              <a:t>Catch data – retained, discards, bycatch</a:t>
+            </a:r>
+          </a:p>
+        </p:txBody>
+      </p:sp>
+      <p:pic>
+        <p:nvPicPr>
+          <p:cNvPr descr="Snow2026_may_CPT_files/figure-pptx/catch-compare-1.png" id="0" name="Picture 1"/>
+          <p:cNvPicPr>
+            <a:picLocks noGrp="1" noChangeAspect="1"/>
+          </p:cNvPicPr>
+          <p:nvPr/>
+        </p:nvPicPr>
+        <p:blipFill>
+          <a:blip r:embed="rId2"/>
+          <a:stretch>
+            <a:fillRect/>
+          </a:stretch>
+        </p:blipFill>
+        <p:spPr bwMode="auto">
+          <a:xfrm>
+            <a:off x="508000" y="1193800"/>
+            <a:ext cx="8115300" cy="3390900"/>
+          </a:xfrm>
+          <a:prstGeom prst="rect">
+            <a:avLst/>
+          </a:prstGeom>
+          <a:noFill/>
+          <a:ln w="9525">
+            <a:noFill/>
+            <a:headEnd/>
+            <a:tailEnd/>
+          </a:ln>
+        </p:spPr>
+      </p:pic>
+    </p:spTree>
+  </p:cSld>
+</p:sld>
+</file>
+
 <file path=ppt/slides/slide29.xml><?xml version="1.0" encoding="utf-8"?>
 <p:sld xmlns:a="http://schemas.openxmlformats.org/drawingml/2006/main" xmlns:r="http://schemas.openxmlformats.org/officeDocument/2006/relationships" xmlns:p="http://schemas.openxmlformats.org/presentationml/2006/main">
   <p:cSld>
@@ -6450,12 +6370,12 @@
       </p:grpSpPr>
       <p:sp>
         <p:nvSpPr>
-          <p:cNvPr id="4" name="Text Placeholder 3"/>
-          <p:cNvSpPr>
-            <a:spLocks noGrp="1"/>
-          </p:cNvSpPr>
-          <p:nvPr>
-            <p:ph idx="2" sz="half" type="body"/>
+          <p:cNvPr id="2" name="Title 1"/>
+          <p:cNvSpPr>
+            <a:spLocks noGrp="1"/>
+          </p:cNvSpPr>
+          <p:nvPr>
+            <p:ph type="title"/>
           </p:nvPr>
         </p:nvSpPr>
         <p:spPr/>
@@ -6464,16 +6384,389 @@
           <a:lstStyle/>
           <a:p>
             <a:pPr lvl="0" indent="0" marL="0">
-              <a:spcBef>
-                <a:spcPts val="3000"/>
-              </a:spcBef>
               <a:buNone/>
             </a:pPr>
             <a:r>
+              <a:rPr/>
+              <a:t>Pot fishery composition – hybrid effect</a:t>
+            </a:r>
+          </a:p>
+        </p:txBody>
+      </p:sp>
+      <p:pic>
+        <p:nvPicPr>
+          <p:cNvPr descr="Snow2026_may_CPT_files/figure-pptx/comp-pot-hyb-1.png" id="0" name="Picture 1"/>
+          <p:cNvPicPr>
+            <a:picLocks noGrp="1" noChangeAspect="1"/>
+          </p:cNvPicPr>
+          <p:nvPr/>
+        </p:nvPicPr>
+        <p:blipFill>
+          <a:blip r:embed="rId2"/>
+          <a:stretch>
+            <a:fillRect/>
+          </a:stretch>
+        </p:blipFill>
+        <p:spPr bwMode="auto">
+          <a:xfrm>
+            <a:off x="596900" y="1193800"/>
+            <a:ext cx="7937500" cy="3390900"/>
+          </a:xfrm>
+          <a:prstGeom prst="rect">
+            <a:avLst/>
+          </a:prstGeom>
+          <a:noFill/>
+          <a:ln w="9525">
+            <a:noFill/>
+            <a:headEnd/>
+            <a:tailEnd/>
+          </a:ln>
+        </p:spPr>
+      </p:pic>
+    </p:spTree>
+  </p:cSld>
+</p:sld>
+</file>
+
+<file path=ppt/slides/slide3.xml><?xml version="1.0" encoding="utf-8"?>
+<p:sld xmlns:a="http://schemas.openxmlformats.org/drawingml/2006/main" xmlns:r="http://schemas.openxmlformats.org/officeDocument/2006/relationships" xmlns:p="http://schemas.openxmlformats.org/presentationml/2006/main">
+  <p:cSld>
+    <p:spTree>
+      <p:nvGrpSpPr>
+        <p:cNvPr id="1" name=""/>
+        <p:cNvGrpSpPr/>
+        <p:nvPr/>
+      </p:nvGrpSpPr>
+      <p:grpSpPr>
+        <a:xfrm>
+          <a:off x="0" y="0"/>
+          <a:ext cx="0" cy="0"/>
+          <a:chOff x="0" y="0"/>
+          <a:chExt cx="0" cy="0"/>
+        </a:xfrm>
+      </p:grpSpPr>
+      <p:sp>
+        <p:nvSpPr>
+          <p:cNvPr id="2" name="Title 1"/>
+          <p:cNvSpPr>
+            <a:spLocks noGrp="1"/>
+          </p:cNvSpPr>
+          <p:nvPr>
+            <p:ph type="title"/>
+          </p:nvPr>
+        </p:nvSpPr>
+        <p:spPr/>
+        <p:txBody>
+          <a:bodyPr/>
+          <a:lstStyle/>
+          <a:p>
+            <a:pPr lvl="0" indent="0" marL="0">
+              <a:buNone/>
+            </a:pPr>
+            <a:r>
+              <a:rPr/>
+              <a:t>EBS snow crab context</a:t>
+            </a:r>
+          </a:p>
+        </p:txBody>
+      </p:sp>
+      <p:sp>
+        <p:nvSpPr>
+          <p:cNvPr id="3" name="Content Placeholder 2"/>
+          <p:cNvSpPr>
+            <a:spLocks noGrp="1"/>
+          </p:cNvSpPr>
+          <p:nvPr>
+            <p:ph idx="1" sz="half"/>
+          </p:nvPr>
+        </p:nvSpPr>
+        <p:spPr/>
+        <p:txBody>
+          <a:bodyPr/>
+          <a:lstStyle/>
+          <a:p>
+            <a:pPr lvl="0"/>
+            <a:r>
+              <a:rPr/>
+              <a:t>No federal OFL/ABC has ever constrained removals.</a:t>
+            </a:r>
+          </a:p>
+          <a:p>
+            <a:pPr lvl="0"/>
+            <a:r>
+              <a:rPr/>
+              <a:t>Despite conservative management relative to OFL, the stock remains at historical lows.</a:t>
+            </a:r>
+          </a:p>
+          <a:p>
+            <a:pPr lvl="0"/>
+            <a:r>
+              <a:rPr/>
+              <a:t>Commercially preferred males (&gt;=101 mm CW) at all-time lows.</a:t>
+            </a:r>
+          </a:p>
+          <a:p>
+            <a:pPr lvl="0"/>
+            <a:r>
+              <a:rPr/>
+              <a:t>2025 survey commercially preferred male biomass: </a:t>
+            </a:r>
+            <a:r>
               <a:rPr b="1"/>
+              <a:t>23.28 kt</a:t>
+            </a:r>
+            <a:r>
+              <a:rPr/>
+              <a:t> (for reference, candidate Tier 3 OFLs span 36–60 kt).</a:t>
+            </a:r>
+          </a:p>
+          <a:p>
+            <a:pPr lvl="0"/>
+            <a:r>
+              <a:rPr/>
+              <a:t>Stock declared overfished in 2021; rebuilding update will be added to the September SAFE.</a:t>
+            </a:r>
+          </a:p>
+        </p:txBody>
+      </p:sp>
+      <p:sp>
+        <p:nvSpPr>
+          <p:cNvPr id="4" name="Content Placeholder 3"/>
+          <p:cNvSpPr>
+            <a:spLocks noGrp="1"/>
+          </p:cNvSpPr>
+          <p:nvPr>
+            <p:ph idx="2" sz="half"/>
+          </p:nvPr>
+        </p:nvSpPr>
+        <p:spPr/>
+        <p:txBody>
+          <a:bodyPr/>
+          <a:lstStyle/>
+          <a:p>
+            <a:pPr lvl="0" indent="0" marL="0">
+              <a:buNone/>
+            </a:pPr>
+            <a:r>
+              <a:rPr b="1"/>
+              <a:t>Currency of management</a:t>
+            </a:r>
+          </a:p>
+          <a:p>
+            <a:pPr lvl="0" indent="0" marL="0">
+              <a:buNone/>
+            </a:pPr>
+            <a:r>
+              <a:rPr/>
+              <a:t>“MMB”:</a:t>
+            </a:r>
+          </a:p>
+          <a:p>
+            <a:pPr lvl="0"/>
+            <a:r>
+              <a:rPr/>
+              <a:t>OFL will not be constraining</a:t>
+            </a:r>
+          </a:p>
+          <a:p>
+            <a:pPr lvl="0"/>
+            <a:r>
+              <a:rPr/>
+              <a:t>Allows removal of all large males</a:t>
+            </a:r>
+          </a:p>
+        </p:txBody>
+      </p:sp>
+    </p:spTree>
+  </p:cSld>
+</p:sld>
+</file>
+
+<file path=ppt/slides/slide30.xml><?xml version="1.0" encoding="utf-8"?>
+<p:sld xmlns:a="http://schemas.openxmlformats.org/drawingml/2006/main" xmlns:r="http://schemas.openxmlformats.org/officeDocument/2006/relationships" xmlns:p="http://schemas.openxmlformats.org/presentationml/2006/main">
+  <p:cSld>
+    <p:spTree>
+      <p:nvGrpSpPr>
+        <p:cNvPr id="1" name=""/>
+        <p:cNvGrpSpPr/>
+        <p:nvPr/>
+      </p:nvGrpSpPr>
+      <p:grpSpPr>
+        <a:xfrm>
+          <a:off x="0" y="0"/>
+          <a:ext cx="0" cy="0"/>
+          <a:chOff x="0" y="0"/>
+          <a:chExt cx="0" cy="0"/>
+        </a:xfrm>
+      </p:grpSpPr>
+      <p:sp>
+        <p:nvSpPr>
+          <p:cNvPr id="2" name="Title 1"/>
+          <p:cNvSpPr>
+            <a:spLocks noGrp="1"/>
+          </p:cNvSpPr>
+          <p:nvPr>
+            <p:ph type="title"/>
+          </p:nvPr>
+        </p:nvSpPr>
+        <p:spPr/>
+        <p:txBody>
+          <a:bodyPr/>
+          <a:lstStyle/>
+          <a:p>
+            <a:pPr lvl="0" indent="0" marL="0">
+              <a:buNone/>
+            </a:pPr>
+            <a:r>
+              <a:rPr/>
+              <a:t>Pot fishery female discard composition</a:t>
+            </a:r>
+          </a:p>
+        </p:txBody>
+      </p:sp>
+      <p:pic>
+        <p:nvPicPr>
+          <p:cNvPr descr="Snow2026_may_CPT_files/figure-pptx/comp-pot-fem-1.png" id="0" name="Picture 1"/>
+          <p:cNvPicPr>
+            <a:picLocks noGrp="1" noChangeAspect="1"/>
+          </p:cNvPicPr>
+          <p:nvPr/>
+        </p:nvPicPr>
+        <p:blipFill>
+          <a:blip r:embed="rId2"/>
+          <a:stretch>
+            <a:fillRect/>
+          </a:stretch>
+        </p:blipFill>
+        <p:spPr bwMode="auto">
+          <a:xfrm>
+            <a:off x="596900" y="1193800"/>
+            <a:ext cx="7937500" cy="3390900"/>
+          </a:xfrm>
+          <a:prstGeom prst="rect">
+            <a:avLst/>
+          </a:prstGeom>
+          <a:noFill/>
+          <a:ln w="9525">
+            <a:noFill/>
+            <a:headEnd/>
+            <a:tailEnd/>
+          </a:ln>
+        </p:spPr>
+      </p:pic>
+    </p:spTree>
+  </p:cSld>
+</p:sld>
+</file>
+
+<file path=ppt/slides/slide31.xml><?xml version="1.0" encoding="utf-8"?>
+<p:sld xmlns:a="http://schemas.openxmlformats.org/drawingml/2006/main" xmlns:r="http://schemas.openxmlformats.org/officeDocument/2006/relationships" xmlns:p="http://schemas.openxmlformats.org/presentationml/2006/main">
+  <p:cSld>
+    <p:spTree>
+      <p:nvGrpSpPr>
+        <p:cNvPr id="1" name=""/>
+        <p:cNvGrpSpPr/>
+        <p:nvPr/>
+      </p:nvGrpSpPr>
+      <p:grpSpPr>
+        <a:xfrm>
+          <a:off x="0" y="0"/>
+          <a:ext cx="0" cy="0"/>
+          <a:chOff x="0" y="0"/>
+          <a:chExt cx="0" cy="0"/>
+        </a:xfrm>
+      </p:grpSpPr>
+      <p:sp>
+        <p:nvSpPr>
+          <p:cNvPr id="3" name="Content Placeholder 2"/>
+          <p:cNvSpPr>
+            <a:spLocks noGrp="1"/>
+          </p:cNvSpPr>
+          <p:nvPr>
+            <p:ph idx="1"/>
+          </p:nvPr>
+        </p:nvSpPr>
+        <p:spPr/>
+        <p:txBody>
+          <a:bodyPr/>
+          <a:lstStyle/>
+          <a:p>
+            <a:pPr lvl="0" indent="0" marL="0">
+              <a:buNone/>
+            </a:pPr>
+            <a:r>
+              <a:rPr/>
+              <a:t>::: :::</a:t>
+            </a:r>
+          </a:p>
+        </p:txBody>
+      </p:sp>
+    </p:spTree>
+  </p:cSld>
+</p:sld>
+</file>
+
+<file path=ppt/slides/slide32.xml><?xml version="1.0" encoding="utf-8"?>
+<p:sld xmlns:a="http://schemas.openxmlformats.org/drawingml/2006/main" xmlns:r="http://schemas.openxmlformats.org/officeDocument/2006/relationships" xmlns:p="http://schemas.openxmlformats.org/presentationml/2006/main">
+  <p:cSld>
+    <p:spTree>
+      <p:nvGrpSpPr>
+        <p:cNvPr id="1" name=""/>
+        <p:cNvGrpSpPr/>
+        <p:nvPr/>
+      </p:nvGrpSpPr>
+      <p:grpSpPr>
+        <a:xfrm>
+          <a:off x="0" y="0"/>
+          <a:ext cx="0" cy="0"/>
+          <a:chOff x="0" y="0"/>
+          <a:chExt cx="0" cy="0"/>
+        </a:xfrm>
+      </p:grpSpPr>
+      <p:sp>
+        <p:nvSpPr>
+          <p:cNvPr id="2" name="Title 1"/>
+          <p:cNvSpPr>
+            <a:spLocks noGrp="1"/>
+          </p:cNvSpPr>
+          <p:nvPr>
+            <p:ph type="title"/>
+          </p:nvPr>
+        </p:nvSpPr>
+        <p:spPr>
+          <a:xfrm>
+            <a:off x="457201" y="204787"/>
+            <a:ext cx="3008313" cy="871538"/>
+          </a:xfrm>
+        </p:spPr>
+        <p:txBody>
+          <a:bodyPr/>
+          <a:lstStyle/>
+          <a:p>
+            <a:pPr lvl="0" indent="0" marL="0">
+              <a:buNone/>
+            </a:pPr>
+            <a:r>
+              <a:rPr/>
               <a:t>Hybrid data: NMFS summer trawl survey</a:t>
             </a:r>
           </a:p>
+        </p:txBody>
+      </p:sp>
+      <p:sp>
+        <p:nvSpPr>
+          <p:cNvPr id="4" name="Text Placeholder 3"/>
+          <p:cNvSpPr>
+            <a:spLocks noGrp="1"/>
+          </p:cNvSpPr>
+          <p:nvPr>
+            <p:ph idx="2" sz="half" type="body"/>
+          </p:nvPr>
+        </p:nvSpPr>
+        <p:spPr/>
+        <p:txBody>
+          <a:bodyPr/>
+          <a:lstStyle/>
           <a:p>
             <a:pPr lvl="0"/>
             <a:r>
@@ -6523,7 +6816,7 @@
             </a:r>
             <a:r>
               <a:rPr/>
-              <a:t> in some years (additional hybrid biomass added on top of snow crab); trend through time is unchanged.</a:t>
+              <a:t> in some years; trend through time is unchanged.</a:t>
             </a:r>
           </a:p>
           <a:p>
@@ -6538,7 +6831,7 @@
             </a:r>
             <a:r>
               <a:rPr/>
-              <a:t> in the time series (consistency between ADF&amp;G and NMFS criteria is currently a research priority).</a:t>
+              <a:t> in the time series (consistency between ADF&amp;G and NMFS criteria is currently an issue).</a:t>
             </a:r>
           </a:p>
         </p:txBody>
@@ -6578,400 +6871,6 @@
 </p:sld>
 </file>
 
-<file path=ppt/slides/slide3.xml><?xml version="1.0" encoding="utf-8"?>
-<p:sld xmlns:a="http://schemas.openxmlformats.org/drawingml/2006/main" xmlns:r="http://schemas.openxmlformats.org/officeDocument/2006/relationships" xmlns:p="http://schemas.openxmlformats.org/presentationml/2006/main">
-  <p:cSld>
-    <p:spTree>
-      <p:nvGrpSpPr>
-        <p:cNvPr id="1" name=""/>
-        <p:cNvGrpSpPr/>
-        <p:nvPr/>
-      </p:nvGrpSpPr>
-      <p:grpSpPr>
-        <a:xfrm>
-          <a:off x="0" y="0"/>
-          <a:ext cx="0" cy="0"/>
-          <a:chOff x="0" y="0"/>
-          <a:chExt cx="0" cy="0"/>
-        </a:xfrm>
-      </p:grpSpPr>
-      <p:sp>
-        <p:nvSpPr>
-          <p:cNvPr id="2" name="Title 1"/>
-          <p:cNvSpPr>
-            <a:spLocks noGrp="1"/>
-          </p:cNvSpPr>
-          <p:nvPr>
-            <p:ph type="title"/>
-          </p:nvPr>
-        </p:nvSpPr>
-        <p:spPr/>
-        <p:txBody>
-          <a:bodyPr/>
-          <a:lstStyle/>
-          <a:p>
-            <a:pPr lvl="0" indent="0" marL="0">
-              <a:buNone/>
-            </a:pPr>
-            <a:r>
-              <a:rPr/>
-              <a:t>EBS snow crab context</a:t>
-            </a:r>
-          </a:p>
-        </p:txBody>
-      </p:sp>
-      <p:sp>
-        <p:nvSpPr>
-          <p:cNvPr id="3" name="Content Placeholder 2"/>
-          <p:cNvSpPr>
-            <a:spLocks noGrp="1"/>
-          </p:cNvSpPr>
-          <p:nvPr>
-            <p:ph idx="1" sz="half"/>
-          </p:nvPr>
-        </p:nvSpPr>
-        <p:spPr/>
-        <p:txBody>
-          <a:bodyPr/>
-          <a:lstStyle/>
-          <a:p>
-            <a:pPr lvl="0"/>
-            <a:r>
-              <a:rPr/>
-              <a:t>No federal OFL/ABC has ever constrained removals.</a:t>
-            </a:r>
-          </a:p>
-          <a:p>
-            <a:pPr lvl="0"/>
-            <a:r>
-              <a:rPr/>
-              <a:t>Despite conservative management relative to OFL, the stock remains at historical lows.</a:t>
-            </a:r>
-          </a:p>
-          <a:p>
-            <a:pPr lvl="0"/>
-            <a:r>
-              <a:rPr/>
-              <a:t>Commercially preferred males (&gt;=101 mm CW) at all-time lows.</a:t>
-            </a:r>
-          </a:p>
-          <a:p>
-            <a:pPr lvl="0"/>
-            <a:r>
-              <a:rPr/>
-              <a:t>2025 survey commercially preferred male biomass: </a:t>
-            </a:r>
-            <a:r>
-              <a:rPr b="1"/>
-              <a:t>23.28 kt</a:t>
-            </a:r>
-            <a:r>
-              <a:rPr/>
-              <a:t> (for reference, candidate Tier 3 OFLs span 36–60 kt).</a:t>
-            </a:r>
-          </a:p>
-          <a:p>
-            <a:pPr lvl="0"/>
-            <a:r>
-              <a:rPr/>
-              <a:t>Stock declared overfished in 2021; rebuilding update will be added to the September SAFE.</a:t>
-            </a:r>
-          </a:p>
-        </p:txBody>
-      </p:sp>
-      <p:sp>
-        <p:nvSpPr>
-          <p:cNvPr id="4" name="Content Placeholder 3"/>
-          <p:cNvSpPr>
-            <a:spLocks noGrp="1"/>
-          </p:cNvSpPr>
-          <p:nvPr>
-            <p:ph idx="2" sz="half"/>
-          </p:nvPr>
-        </p:nvSpPr>
-        <p:spPr/>
-        <p:txBody>
-          <a:bodyPr/>
-          <a:lstStyle/>
-          <a:p>
-            <a:pPr lvl="0" indent="0" marL="0">
-              <a:buNone/>
-            </a:pPr>
-            <a:r>
-              <a:rPr b="1"/>
-              <a:t>Currency of management</a:t>
-            </a:r>
-          </a:p>
-          <a:p>
-            <a:pPr lvl="0" indent="0" marL="0">
-              <a:buNone/>
-            </a:pPr>
-            <a:r>
-              <a:rPr/>
-              <a:t>“MMB”:</a:t>
-            </a:r>
-          </a:p>
-          <a:p>
-            <a:pPr lvl="0"/>
-            <a:r>
-              <a:rPr/>
-              <a:t>OFL will not be constraining</a:t>
-            </a:r>
-          </a:p>
-          <a:p>
-            <a:pPr lvl="0"/>
-            <a:r>
-              <a:rPr/>
-              <a:t>Allows removal of all large males</a:t>
-            </a:r>
-          </a:p>
-        </p:txBody>
-      </p:sp>
-    </p:spTree>
-  </p:cSld>
-</p:sld>
-</file>
-
-<file path=ppt/slides/slide30.xml><?xml version="1.0" encoding="utf-8"?>
-<p:sld xmlns:a="http://schemas.openxmlformats.org/drawingml/2006/main" xmlns:r="http://schemas.openxmlformats.org/officeDocument/2006/relationships" xmlns:p="http://schemas.openxmlformats.org/presentationml/2006/main">
-  <p:cSld>
-    <p:spTree>
-      <p:nvGrpSpPr>
-        <p:cNvPr id="1" name=""/>
-        <p:cNvGrpSpPr/>
-        <p:nvPr/>
-      </p:nvGrpSpPr>
-      <p:grpSpPr>
-        <a:xfrm>
-          <a:off x="0" y="0"/>
-          <a:ext cx="0" cy="0"/>
-          <a:chOff x="0" y="0"/>
-          <a:chExt cx="0" cy="0"/>
-        </a:xfrm>
-      </p:grpSpPr>
-      <p:sp>
-        <p:nvSpPr>
-          <p:cNvPr id="4" name="Text Placeholder 3"/>
-          <p:cNvSpPr>
-            <a:spLocks noGrp="1"/>
-          </p:cNvSpPr>
-          <p:nvPr>
-            <p:ph idx="2" sz="half" type="body"/>
-          </p:nvPr>
-        </p:nvSpPr>
-        <p:spPr/>
-        <p:txBody>
-          <a:bodyPr/>
-          <a:lstStyle/>
-          <a:p>
-            <a:pPr lvl="0" indent="0" marL="0">
-              <a:spcBef>
-                <a:spcPts val="3000"/>
-              </a:spcBef>
-              <a:buNone/>
-            </a:pPr>
-            <a:r>
-              <a:rPr b="1"/>
-              <a:t>Catch data – retained, discards, bycatch</a:t>
-            </a:r>
-          </a:p>
-        </p:txBody>
-      </p:sp>
-      <p:pic>
-        <p:nvPicPr>
-          <p:cNvPr descr="Snow2026_may_CPT_files/figure-pptx/catch-compare-1.png" id="0" name="Picture 1"/>
-          <p:cNvPicPr>
-            <a:picLocks noGrp="1" noChangeAspect="1"/>
-          </p:cNvPicPr>
-          <p:nvPr/>
-        </p:nvPicPr>
-        <p:blipFill>
-          <a:blip r:embed="rId2"/>
-          <a:stretch>
-            <a:fillRect/>
-          </a:stretch>
-        </p:blipFill>
-        <p:spPr bwMode="auto">
-          <a:xfrm>
-            <a:off x="3568700" y="1333500"/>
-            <a:ext cx="5105400" cy="2133600"/>
-          </a:xfrm>
-          <a:prstGeom prst="rect">
-            <a:avLst/>
-          </a:prstGeom>
-          <a:noFill/>
-          <a:ln w="9525">
-            <a:noFill/>
-            <a:headEnd/>
-            <a:tailEnd/>
-          </a:ln>
-        </p:spPr>
-      </p:pic>
-    </p:spTree>
-  </p:cSld>
-</p:sld>
-</file>
-
-<file path=ppt/slides/slide31.xml><?xml version="1.0" encoding="utf-8"?>
-<p:sld xmlns:a="http://schemas.openxmlformats.org/drawingml/2006/main" xmlns:r="http://schemas.openxmlformats.org/officeDocument/2006/relationships" xmlns:p="http://schemas.openxmlformats.org/presentationml/2006/main">
-  <p:cSld>
-    <p:spTree>
-      <p:nvGrpSpPr>
-        <p:cNvPr id="1" name=""/>
-        <p:cNvGrpSpPr/>
-        <p:nvPr/>
-      </p:nvGrpSpPr>
-      <p:grpSpPr>
-        <a:xfrm>
-          <a:off x="0" y="0"/>
-          <a:ext cx="0" cy="0"/>
-          <a:chOff x="0" y="0"/>
-          <a:chExt cx="0" cy="0"/>
-        </a:xfrm>
-      </p:grpSpPr>
-      <p:sp>
-        <p:nvSpPr>
-          <p:cNvPr id="4" name="Text Placeholder 3"/>
-          <p:cNvSpPr>
-            <a:spLocks noGrp="1"/>
-          </p:cNvSpPr>
-          <p:nvPr>
-            <p:ph idx="2" sz="half" type="body"/>
-          </p:nvPr>
-        </p:nvSpPr>
-        <p:spPr/>
-        <p:txBody>
-          <a:bodyPr/>
-          <a:lstStyle/>
-          <a:p>
-            <a:pPr lvl="0" indent="0" marL="0">
-              <a:spcBef>
-                <a:spcPts val="3000"/>
-              </a:spcBef>
-              <a:buNone/>
-            </a:pPr>
-            <a:r>
-              <a:rPr b="1"/>
-              <a:t>NMFS survey biomass index – mature crab (hybrid effect)</a:t>
-            </a:r>
-          </a:p>
-        </p:txBody>
-      </p:sp>
-      <p:pic>
-        <p:nvPicPr>
-          <p:cNvPr descr="Snow2026_may_CPT_files/figure-pptx/idx-mature-hyb-1.png" id="0" name="Picture 1"/>
-          <p:cNvPicPr>
-            <a:picLocks noGrp="1" noChangeAspect="1"/>
-          </p:cNvPicPr>
-          <p:nvPr/>
-        </p:nvPicPr>
-        <p:blipFill>
-          <a:blip r:embed="rId2"/>
-          <a:stretch>
-            <a:fillRect/>
-          </a:stretch>
-        </p:blipFill>
-        <p:spPr bwMode="auto">
-          <a:xfrm>
-            <a:off x="3568700" y="1117600"/>
-            <a:ext cx="5105400" cy="2552700"/>
-          </a:xfrm>
-          <a:prstGeom prst="rect">
-            <a:avLst/>
-          </a:prstGeom>
-          <a:noFill/>
-          <a:ln w="9525">
-            <a:noFill/>
-            <a:headEnd/>
-            <a:tailEnd/>
-          </a:ln>
-        </p:spPr>
-      </p:pic>
-    </p:spTree>
-  </p:cSld>
-</p:sld>
-</file>
-
-<file path=ppt/slides/slide32.xml><?xml version="1.0" encoding="utf-8"?>
-<p:sld xmlns:a="http://schemas.openxmlformats.org/drawingml/2006/main" xmlns:r="http://schemas.openxmlformats.org/officeDocument/2006/relationships" xmlns:p="http://schemas.openxmlformats.org/presentationml/2006/main">
-  <p:cSld>
-    <p:spTree>
-      <p:nvGrpSpPr>
-        <p:cNvPr id="1" name=""/>
-        <p:cNvGrpSpPr/>
-        <p:nvPr/>
-      </p:nvGrpSpPr>
-      <p:grpSpPr>
-        <a:xfrm>
-          <a:off x="0" y="0"/>
-          <a:ext cx="0" cy="0"/>
-          <a:chOff x="0" y="0"/>
-          <a:chExt cx="0" cy="0"/>
-        </a:xfrm>
-      </p:grpSpPr>
-      <p:sp>
-        <p:nvSpPr>
-          <p:cNvPr id="4" name="Text Placeholder 3"/>
-          <p:cNvSpPr>
-            <a:spLocks noGrp="1"/>
-          </p:cNvSpPr>
-          <p:nvPr>
-            <p:ph idx="2" sz="half" type="body"/>
-          </p:nvPr>
-        </p:nvSpPr>
-        <p:spPr/>
-        <p:txBody>
-          <a:bodyPr/>
-          <a:lstStyle/>
-          <a:p>
-            <a:pPr lvl="0" indent="0" marL="0">
-              <a:spcBef>
-                <a:spcPts val="3000"/>
-              </a:spcBef>
-              <a:buNone/>
-            </a:pPr>
-            <a:r>
-              <a:rPr b="1"/>
-              <a:t>NMFS survey composition – mature males (hybrid effect)</a:t>
-            </a:r>
-          </a:p>
-        </p:txBody>
-      </p:sp>
-      <p:pic>
-        <p:nvPicPr>
-          <p:cNvPr descr="Snow2026_may_CPT_files/figure-pptx/comp-survey-hyb-1.png" id="0" name="Picture 1"/>
-          <p:cNvPicPr>
-            <a:picLocks noGrp="1" noChangeAspect="1"/>
-          </p:cNvPicPr>
-          <p:nvPr/>
-        </p:nvPicPr>
-        <p:blipFill>
-          <a:blip r:embed="rId2"/>
-          <a:stretch>
-            <a:fillRect/>
-          </a:stretch>
-        </p:blipFill>
-        <p:spPr bwMode="auto">
-          <a:xfrm>
-            <a:off x="3568700" y="1308100"/>
-            <a:ext cx="5105400" cy="2184400"/>
-          </a:xfrm>
-          <a:prstGeom prst="rect">
-            <a:avLst/>
-          </a:prstGeom>
-          <a:noFill/>
-          <a:ln w="9525">
-            <a:noFill/>
-            <a:headEnd/>
-            <a:tailEnd/>
-          </a:ln>
-        </p:spPr>
-      </p:pic>
-    </p:spTree>
-  </p:cSld>
-</p:sld>
-</file>
-
 <file path=ppt/slides/slide33.xml><?xml version="1.0" encoding="utf-8"?>
 <p:sld xmlns:a="http://schemas.openxmlformats.org/drawingml/2006/main" xmlns:r="http://schemas.openxmlformats.org/officeDocument/2006/relationships" xmlns:p="http://schemas.openxmlformats.org/presentationml/2006/main">
   <p:cSld>
@@ -6991,12 +6890,12 @@
       </p:grpSpPr>
       <p:sp>
         <p:nvSpPr>
-          <p:cNvPr id="4" name="Text Placeholder 3"/>
-          <p:cNvSpPr>
-            <a:spLocks noGrp="1"/>
-          </p:cNvSpPr>
-          <p:nvPr>
-            <p:ph idx="2" sz="half" type="body"/>
+          <p:cNvPr id="2" name="Title 1"/>
+          <p:cNvSpPr>
+            <a:spLocks noGrp="1"/>
+          </p:cNvSpPr>
+          <p:nvPr>
+            <p:ph type="title"/>
           </p:nvPr>
         </p:nvSpPr>
         <p:spPr/>
@@ -7005,21 +6904,18 @@
           <a:lstStyle/>
           <a:p>
             <a:pPr lvl="0" indent="0" marL="0">
-              <a:spcBef>
-                <a:spcPts val="3000"/>
-              </a:spcBef>
               <a:buNone/>
             </a:pPr>
             <a:r>
-              <a:rPr b="1"/>
-              <a:t>Pot fishery composition – hybrid effect</a:t>
+              <a:rPr/>
+              <a:t>NMFS survey biomass index – mature crab (hybrid effect)</a:t>
             </a:r>
           </a:p>
         </p:txBody>
       </p:sp>
       <p:pic>
         <p:nvPicPr>
-          <p:cNvPr descr="Snow2026_may_CPT_files/figure-pptx/comp-pot-hyb-1.png" id="0" name="Picture 1"/>
+          <p:cNvPr descr="Snow2026_may_CPT_files/figure-pptx/idx-mature-hyb-1.png" id="0" name="Picture 1"/>
           <p:cNvPicPr>
             <a:picLocks noGrp="1" noChangeAspect="1"/>
           </p:cNvPicPr>
@@ -7033,8 +6929,8 @@
         </p:blipFill>
         <p:spPr bwMode="auto">
           <a:xfrm>
-            <a:off x="3568700" y="1308100"/>
-            <a:ext cx="5105400" cy="2184400"/>
+            <a:off x="1181100" y="1193800"/>
+            <a:ext cx="6781800" cy="3390900"/>
           </a:xfrm>
           <a:prstGeom prst="rect">
             <a:avLst/>
@@ -7071,12 +6967,12 @@
       </p:grpSpPr>
       <p:sp>
         <p:nvSpPr>
-          <p:cNvPr id="4" name="Text Placeholder 3"/>
-          <p:cNvSpPr>
-            <a:spLocks noGrp="1"/>
-          </p:cNvSpPr>
-          <p:nvPr>
-            <p:ph idx="2" sz="half" type="body"/>
+          <p:cNvPr id="2" name="Title 1"/>
+          <p:cNvSpPr>
+            <a:spLocks noGrp="1"/>
+          </p:cNvSpPr>
+          <p:nvPr>
+            <p:ph type="title"/>
           </p:nvPr>
         </p:nvSpPr>
         <p:spPr/>
@@ -7085,21 +6981,18 @@
           <a:lstStyle/>
           <a:p>
             <a:pPr lvl="0" indent="0" marL="0">
-              <a:spcBef>
-                <a:spcPts val="3000"/>
-              </a:spcBef>
               <a:buNone/>
             </a:pPr>
             <a:r>
-              <a:rPr b="1"/>
-              <a:t>Pot fishery female discard composition</a:t>
+              <a:rPr/>
+              <a:t>NMFS survey composition – mature males (hybrid effect)</a:t>
             </a:r>
           </a:p>
         </p:txBody>
       </p:sp>
       <p:pic>
         <p:nvPicPr>
-          <p:cNvPr descr="Snow2026_may_CPT_files/figure-pptx/comp-pot-fem-1.png" id="0" name="Picture 1"/>
+          <p:cNvPr descr="Snow2026_may_CPT_files/figure-pptx/comp-survey-hyb-1.png" id="0" name="Picture 1"/>
           <p:cNvPicPr>
             <a:picLocks noGrp="1" noChangeAspect="1"/>
           </p:cNvPicPr>
@@ -7113,8 +7006,8 @@
         </p:blipFill>
         <p:spPr bwMode="auto">
           <a:xfrm>
-            <a:off x="3568700" y="1308100"/>
-            <a:ext cx="5105400" cy="2184400"/>
+            <a:off x="596900" y="1193800"/>
+            <a:ext cx="7937500" cy="3390900"/>
           </a:xfrm>
           <a:prstGeom prst="rect">
             <a:avLst/>
@@ -7271,7 +7164,7 @@
                 </a:r>
                 <a:r>
                   <a:rPr/>
-                  <a:t> met the conventional threshold of max |gradient| &lt; 0.001.</a:t>
+                  <a:t> had a max |gradient| &lt; 0.001.</a:t>
                 </a:r>
               </a:p>
               <a:p>
@@ -7581,12 +7474,12 @@
       </p:grpSpPr>
       <p:sp>
         <p:nvSpPr>
-          <p:cNvPr id="3" name="Content Placeholder 2"/>
-          <p:cNvSpPr>
-            <a:spLocks noGrp="1"/>
-          </p:cNvSpPr>
-          <p:nvPr>
-            <p:ph idx="1"/>
+          <p:cNvPr id="2" name="Title 1"/>
+          <p:cNvSpPr>
+            <a:spLocks noGrp="1"/>
+          </p:cNvSpPr>
+          <p:nvPr>
+            <p:ph type="title"/>
           </p:nvPr>
         </p:nvSpPr>
         <p:spPr/>
@@ -7599,11 +7492,41 @@
             </a:pPr>
             <a:r>
               <a:rPr/>
-              <a:t> Directed Tier 3 OFL across 100 jitters per model (each point = one converged jitter run).</a:t>
-            </a:r>
-          </a:p>
-        </p:txBody>
-      </p:sp>
+              <a:t>Jitter analysis – 2024 male recruitment</a:t>
+            </a:r>
+          </a:p>
+        </p:txBody>
+      </p:sp>
+      <p:pic>
+        <p:nvPicPr>
+          <p:cNvPr descr="plots/jittered_results_rec.png" id="0" name="Picture 1"/>
+          <p:cNvPicPr>
+            <a:picLocks noGrp="1" noChangeAspect="1"/>
+          </p:cNvPicPr>
+          <p:nvPr/>
+        </p:nvPicPr>
+        <p:blipFill>
+          <a:blip r:embed="rId2"/>
+          <a:stretch>
+            <a:fillRect/>
+          </a:stretch>
+        </p:blipFill>
+        <p:spPr bwMode="auto">
+          <a:xfrm>
+            <a:off x="1752600" y="1193800"/>
+            <a:ext cx="5651500" cy="3390900"/>
+          </a:xfrm>
+          <a:prstGeom prst="rect">
+            <a:avLst/>
+          </a:prstGeom>
+          <a:noFill/>
+          <a:ln w="9525">
+            <a:noFill/>
+            <a:headEnd/>
+            <a:tailEnd/>
+          </a:ln>
+        </p:spPr>
+      </p:pic>
     </p:spTree>
   </p:cSld>
 </p:sld>
@@ -7646,14 +7569,14 @@
             </a:pPr>
             <a:r>
               <a:rPr/>
-              <a:t>Jitter analysis – 2024 male recruitment</a:t>
+              <a:t>Jitter analysis – 2024 MMB</a:t>
             </a:r>
           </a:p>
         </p:txBody>
       </p:sp>
       <p:pic>
         <p:nvPicPr>
-          <p:cNvPr descr="plots/jittered_results_rec.png" id="0" name="Picture 1"/>
+          <p:cNvPr descr="plots/jittered_results_ssb.png" id="0" name="Picture 1"/>
           <p:cNvPicPr>
             <a:picLocks noGrp="1" noChangeAspect="1"/>
           </p:cNvPicPr>
@@ -7880,12 +7803,12 @@
       </p:grpSpPr>
       <p:sp>
         <p:nvSpPr>
-          <p:cNvPr id="3" name="Content Placeholder 2"/>
-          <p:cNvSpPr>
-            <a:spLocks noGrp="1"/>
-          </p:cNvSpPr>
-          <p:nvPr>
-            <p:ph idx="1"/>
+          <p:cNvPr id="2" name="Title 1"/>
+          <p:cNvSpPr>
+            <a:spLocks noGrp="1"/>
+          </p:cNvSpPr>
+          <p:nvPr>
+            <p:ph type="title"/>
           </p:nvPr>
         </p:nvSpPr>
         <p:spPr/>
@@ -7898,7 +7821,119 @@
             </a:pPr>
             <a:r>
               <a:rPr/>
-              <a:t> Estimates of male recruitment in 2024 across 100 jitters; vertically separated clouds indicate alternative local optima.</a:t>
+              <a:t>Interpreting the jitter results</a:t>
+            </a:r>
+          </a:p>
+        </p:txBody>
+      </p:sp>
+      <p:sp>
+        <p:nvSpPr>
+          <p:cNvPr id="3" name="Content Placeholder 2"/>
+          <p:cNvSpPr>
+            <a:spLocks noGrp="1"/>
+          </p:cNvSpPr>
+          <p:nvPr>
+            <p:ph idx="1"/>
+          </p:nvPr>
+        </p:nvSpPr>
+        <p:spPr/>
+        <p:txBody>
+          <a:bodyPr/>
+          <a:lstStyle/>
+          <a:p>
+            <a:pPr lvl="0"/>
+            <a:r>
+              <a:rPr b="1"/>
+              <a:t>Adding the immature index alongside the updated plus group eliminates the bimodality</a:t>
+            </a:r>
+            <a:r>
+              <a:rPr/>
+              <a:t> in OFL (</a:t>
+            </a:r>
+            <a:r>
+              <a:rPr>
+                <a:latin typeface="Courier"/>
+              </a:rPr>
+              <a:t>Model 25.1e</a:t>
+            </a:r>
+            <a:r>
+              <a:rPr/>
+              <a:t>, </a:t>
+            </a:r>
+            <a:r>
+              <a:rPr>
+                <a:latin typeface="Courier"/>
+              </a:rPr>
+              <a:t>Model 25.2d</a:t>
+            </a:r>
+            <a:r>
+              <a:rPr/>
+              <a:t>).</a:t>
+            </a:r>
+          </a:p>
+          <a:p>
+            <a:pPr lvl="0"/>
+            <a:r>
+              <a:rPr/>
+              <a:t>A clear spread in derived quantities still exists within 10 NLL units, so </a:t>
+            </a:r>
+            <a:r>
+              <a:rPr b="1"/>
+              <a:t>don’t read this as an unqualified improvement</a:t>
+            </a:r>
+            <a:r>
+              <a:rPr/>
+              <a:t>.</a:t>
+            </a:r>
+          </a:p>
+          <a:p>
+            <a:pPr lvl="0"/>
+            <a:r>
+              <a:rPr/>
+              <a:t>Mature male M is &gt; 0.6 for these models</a:t>
+            </a:r>
+          </a:p>
+          <a:p>
+            <a:pPr lvl="0"/>
+            <a:r>
+              <a:rPr/>
+              <a:t>Bimodality has been a recurring issue in this assessment for several cycles.</a:t>
+            </a:r>
+          </a:p>
+          <a:p>
+            <a:pPr lvl="0"/>
+            <a:r>
+              <a:rPr/>
+              <a:t>Resolving the underlying source of multiple optima will require </a:t>
+            </a:r>
+            <a:r>
+              <a:rPr b="1"/>
+              <a:t>further investigation</a:t>
+            </a:r>
+            <a:r>
+              <a:rPr/>
+              <a:t> before September:</a:t>
+            </a:r>
+          </a:p>
+          <a:p>
+            <a:pPr lvl="1"/>
+            <a:r>
+              <a:rPr/>
+              <a:t>Which parameter combinations produce the two clouds?</a:t>
+            </a:r>
+          </a:p>
+          <a:p>
+            <a:pPr lvl="1"/>
+            <a:r>
+              <a:rPr/>
+              <a:t>Recent recruitment? Mortality events? Selectivity?</a:t>
+            </a:r>
+          </a:p>
+          <a:p>
+            <a:pPr lvl="1"/>
+            <a:r>
+              <a:rPr/>
+              <a:t>Should we include the immature index?</a:t>
             </a:r>
           </a:p>
         </p:txBody>
@@ -7935,7 +7970,12 @@
             <p:ph type="title"/>
           </p:nvPr>
         </p:nvSpPr>
-        <p:spPr/>
+        <p:spPr>
+          <a:xfrm>
+            <a:off x="722313" y="3305176"/>
+            <a:ext cx="7772400" cy="1021556"/>
+          </a:xfrm>
+        </p:spPr>
         <p:txBody>
           <a:bodyPr/>
           <a:lstStyle/>
@@ -7945,41 +7985,11 @@
             </a:pPr>
             <a:r>
               <a:rPr/>
-              <a:t>Jitter analysis – 2024 MMB</a:t>
-            </a:r>
-          </a:p>
-        </p:txBody>
-      </p:sp>
-      <p:pic>
-        <p:nvPicPr>
-          <p:cNvPr descr="plots/jittered_results_ssb.png" id="0" name="Picture 1"/>
-          <p:cNvPicPr>
-            <a:picLocks noGrp="1" noChangeAspect="1"/>
-          </p:cNvPicPr>
-          <p:nvPr/>
-        </p:nvPicPr>
-        <p:blipFill>
-          <a:blip r:embed="rId2"/>
-          <a:stretch>
-            <a:fillRect/>
-          </a:stretch>
-        </p:blipFill>
-        <p:spPr bwMode="auto">
-          <a:xfrm>
-            <a:off x="1752600" y="1193800"/>
-            <a:ext cx="5651500" cy="3390900"/>
-          </a:xfrm>
-          <a:prstGeom prst="rect">
-            <a:avLst/>
-          </a:prstGeom>
-          <a:noFill/>
-          <a:ln w="9525">
-            <a:noFill/>
-            <a:headEnd/>
-            <a:tailEnd/>
-          </a:ln>
-        </p:spPr>
-      </p:pic>
+              <a:t>Model fits</a:t>
+            </a:r>
+          </a:p>
+        </p:txBody>
+      </p:sp>
     </p:spTree>
   </p:cSld>
 </p:sld>
@@ -8004,12 +8014,12 @@
       </p:grpSpPr>
       <p:sp>
         <p:nvSpPr>
-          <p:cNvPr id="3" name="Content Placeholder 2"/>
-          <p:cNvSpPr>
-            <a:spLocks noGrp="1"/>
-          </p:cNvSpPr>
-          <p:nvPr>
-            <p:ph idx="1"/>
+          <p:cNvPr id="2" name="Title 1"/>
+          <p:cNvSpPr>
+            <a:spLocks noGrp="1"/>
+          </p:cNvSpPr>
+          <p:nvPr>
+            <p:ph type="title"/>
           </p:nvPr>
         </p:nvSpPr>
         <p:spPr/>
@@ -8022,7 +8032,56 @@
             </a:pPr>
             <a:r>
               <a:rPr/>
-              <a:t> Estimates of MMB in 2024 across 100 jitters; bimodality dissolves in models that include the immature survey index.</a:t>
+              <a:t>Fits to mature survey biomass</a:t>
+            </a:r>
+          </a:p>
+        </p:txBody>
+      </p:sp>
+      <p:sp>
+        <p:nvSpPr>
+          <p:cNvPr id="3" name="Content Placeholder 2"/>
+          <p:cNvSpPr>
+            <a:spLocks noGrp="1"/>
+          </p:cNvSpPr>
+          <p:nvPr>
+            <p:ph idx="1"/>
+          </p:nvPr>
+        </p:nvSpPr>
+        <p:spPr/>
+        <p:txBody>
+          <a:bodyPr/>
+          <a:lstStyle/>
+          <a:p>
+            <a:pPr lvl="0"/>
+            <a:r>
+              <a:rPr/>
+              <a:t>Fits to mature biomass survey indices broadly similar across models.</a:t>
+            </a:r>
+          </a:p>
+          <a:p>
+            <a:pPr lvl="0"/>
+            <a:r>
+              <a:rPr b="1"/>
+              <a:t>All data-update candidates have difficulty fitting the terminal-year female biomass.</a:t>
+            </a:r>
+            <a:r>
+              <a:rPr/>
+              <a:t> New maturity workflow shifts dynamics modestly but does not resolve this.</a:t>
+            </a:r>
+          </a:p>
+          <a:p>
+            <a:pPr lvl="0"/>
+            <a:r>
+              <a:rPr/>
+              <a:t>Models with the immature survey index fit the new immature index well in recent years – </a:t>
+            </a:r>
+            <a:r>
+              <a:rPr i="1"/>
+              <a:t>except</a:t>
+            </a:r>
+            <a:r>
+              <a:rPr/>
+              <a:t> when paired with the new maturity ogive.</a:t>
             </a:r>
           </a:p>
         </p:txBody>
@@ -8069,132 +8128,41 @@
             </a:pPr>
             <a:r>
               <a:rPr/>
-              <a:t>Interpreting the jitter results</a:t>
-            </a:r>
-          </a:p>
-        </p:txBody>
-      </p:sp>
-      <p:sp>
-        <p:nvSpPr>
-          <p:cNvPr id="3" name="Content Placeholder 2"/>
-          <p:cNvSpPr>
-            <a:spLocks noGrp="1"/>
-          </p:cNvSpPr>
-          <p:nvPr>
-            <p:ph idx="1"/>
-          </p:nvPr>
-        </p:nvSpPr>
-        <p:spPr/>
-        <p:txBody>
-          <a:bodyPr/>
-          <a:lstStyle/>
-          <a:p>
-            <a:pPr lvl="0"/>
-            <a:r>
-              <a:rPr b="1"/>
-              <a:t>Adding the immature index alongside the updated plus group eliminates the bimodality</a:t>
-            </a:r>
-            <a:r>
-              <a:rPr/>
-              <a:t> in OFL (</a:t>
-            </a:r>
-            <a:r>
-              <a:rPr>
-                <a:latin typeface="Courier"/>
-              </a:rPr>
-              <a:t>Model 25.1e</a:t>
-            </a:r>
-            <a:r>
-              <a:rPr/>
-              <a:t>, </a:t>
-            </a:r>
-            <a:r>
-              <a:rPr>
-                <a:latin typeface="Courier"/>
-              </a:rPr>
-              <a:t>Model 25.2d</a:t>
-            </a:r>
-            <a:r>
-              <a:rPr/>
-              <a:t>).</a:t>
-            </a:r>
-          </a:p>
-          <a:p>
-            <a:pPr lvl="0"/>
-            <a:r>
-              <a:rPr/>
-              <a:t>A clear spread in derived quantities still exists within 10 NLL units, so </a:t>
-            </a:r>
-            <a:r>
-              <a:rPr b="1"/>
-              <a:t>don’t read this as an unqualified improvement</a:t>
-            </a:r>
-            <a:r>
-              <a:rPr/>
-              <a:t>.</a:t>
-            </a:r>
-          </a:p>
-          <a:p>
-            <a:pPr lvl="0"/>
-            <a:r>
-              <a:rPr/>
-              <a:t>Bimodality has been a recurring issue in this assessment for several cycles.</a:t>
-            </a:r>
-          </a:p>
-          <a:p>
-            <a:pPr lvl="0"/>
-            <a:r>
-              <a:rPr/>
-              <a:t>Resolving the underlying source of multiple optima will require </a:t>
-            </a:r>
-            <a:r>
-              <a:rPr b="1"/>
-              <a:t>further investigation</a:t>
-            </a:r>
-            <a:r>
-              <a:rPr/>
-              <a:t> before September:</a:t>
-            </a:r>
-          </a:p>
-          <a:p>
-            <a:pPr lvl="1"/>
-            <a:r>
-              <a:rPr/>
-              <a:t>Which parameter combinations produce the two clouds?</a:t>
-            </a:r>
-          </a:p>
-          <a:p>
-            <a:pPr lvl="1"/>
-            <a:r>
-              <a:rPr/>
-              <a:t>Recent recruitment? Mortality events? Selectivity?</a:t>
-            </a:r>
-          </a:p>
-          <a:p>
-            <a:pPr lvl="1"/>
-            <a:r>
-              <a:rPr/>
-              <a:t>Does the immature index </a:t>
-            </a:r>
-            <a:r>
-              <a:rPr i="1"/>
-              <a:t>resolve</a:t>
-            </a:r>
-            <a:r>
-              <a:rPr/>
-              <a:t> a real problem or </a:t>
-            </a:r>
-            <a:r>
-              <a:rPr i="1"/>
-              <a:t>mask</a:t>
-            </a:r>
-            <a:r>
-              <a:rPr/>
-              <a:t> it?</a:t>
-            </a:r>
-          </a:p>
-        </p:txBody>
-      </p:sp>
+              <a:t>Model fits – mature biomass survey index</a:t>
+            </a:r>
+          </a:p>
+        </p:txBody>
+      </p:sp>
+      <p:pic>
+        <p:nvPicPr>
+          <p:cNvPr descr="Snow2026_may_CPT_files/figure-pptx/mmbfits-1.png" id="0" name="Picture 1"/>
+          <p:cNvPicPr>
+            <a:picLocks noGrp="1" noChangeAspect="1"/>
+          </p:cNvPicPr>
+          <p:nvPr/>
+        </p:nvPicPr>
+        <p:blipFill>
+          <a:blip r:embed="rId2"/>
+          <a:stretch>
+            <a:fillRect/>
+          </a:stretch>
+        </p:blipFill>
+        <p:spPr bwMode="auto">
+          <a:xfrm>
+            <a:off x="596900" y="1193800"/>
+            <a:ext cx="7937500" cy="3390900"/>
+          </a:xfrm>
+          <a:prstGeom prst="rect">
+            <a:avLst/>
+          </a:prstGeom>
+          <a:noFill/>
+          <a:ln w="9525">
+            <a:noFill/>
+            <a:headEnd/>
+            <a:tailEnd/>
+          </a:ln>
+        </p:spPr>
+      </p:pic>
     </p:spTree>
   </p:cSld>
 </p:sld>
@@ -8227,12 +8195,7 @@
             <p:ph type="title"/>
           </p:nvPr>
         </p:nvSpPr>
-        <p:spPr>
-          <a:xfrm>
-            <a:off x="722313" y="3305176"/>
-            <a:ext cx="7772400" cy="1021556"/>
-          </a:xfrm>
-        </p:spPr>
+        <p:spPr/>
         <p:txBody>
           <a:bodyPr/>
           <a:lstStyle/>
@@ -8242,11 +8205,41 @@
             </a:pPr>
             <a:r>
               <a:rPr/>
-              <a:t>Model fits</a:t>
-            </a:r>
-          </a:p>
-        </p:txBody>
-      </p:sp>
+              <a:t>Model fits – immature biomass survey index</a:t>
+            </a:r>
+          </a:p>
+        </p:txBody>
+      </p:sp>
+      <p:pic>
+        <p:nvPicPr>
+          <p:cNvPr descr="Snow2026_may_CPT_files/figure-pptx/immfits-1.png" id="0" name="Picture 1"/>
+          <p:cNvPicPr>
+            <a:picLocks noGrp="1" noChangeAspect="1"/>
+          </p:cNvPicPr>
+          <p:nvPr/>
+        </p:nvPicPr>
+        <p:blipFill>
+          <a:blip r:embed="rId2"/>
+          <a:stretch>
+            <a:fillRect/>
+          </a:stretch>
+        </p:blipFill>
+        <p:spPr bwMode="auto">
+          <a:xfrm>
+            <a:off x="596900" y="1193800"/>
+            <a:ext cx="7937500" cy="3390900"/>
+          </a:xfrm>
+          <a:prstGeom prst="rect">
+            <a:avLst/>
+          </a:prstGeom>
+          <a:noFill/>
+          <a:ln w="9525">
+            <a:noFill/>
+            <a:headEnd/>
+            <a:tailEnd/>
+          </a:ln>
+        </p:spPr>
+      </p:pic>
     </p:spTree>
   </p:cSld>
 </p:sld>
@@ -8279,7 +8272,12 @@
             <p:ph type="title"/>
           </p:nvPr>
         </p:nvSpPr>
-        <p:spPr/>
+        <p:spPr>
+          <a:xfrm>
+            <a:off x="457201" y="204787"/>
+            <a:ext cx="3008313" cy="871538"/>
+          </a:xfrm>
+        </p:spPr>
         <p:txBody>
           <a:bodyPr/>
           <a:lstStyle/>
@@ -8289,19 +8287,19 @@
             </a:pPr>
             <a:r>
               <a:rPr/>
-              <a:t>Fits to mature survey biomass</a:t>
-            </a:r>
-          </a:p>
-        </p:txBody>
-      </p:sp>
-      <p:sp>
-        <p:nvSpPr>
-          <p:cNvPr id="3" name="Content Placeholder 2"/>
-          <p:cNvSpPr>
-            <a:spLocks noGrp="1"/>
-          </p:cNvSpPr>
-          <p:nvPr>
-            <p:ph idx="1"/>
+              <a:t>Fits to size composition data – key impressions</a:t>
+            </a:r>
+          </a:p>
+        </p:txBody>
+      </p:sp>
+      <p:sp>
+        <p:nvSpPr>
+          <p:cNvPr id="4" name="Text Placeholder 3"/>
+          <p:cNvSpPr>
+            <a:spLocks noGrp="1"/>
+          </p:cNvSpPr>
+          <p:nvPr>
+            <p:ph idx="2" sz="half" type="body"/>
           </p:nvPr>
         </p:nvSpPr>
         <p:spPr/>
@@ -8311,45 +8309,120 @@
           <a:p>
             <a:pPr lvl="0"/>
             <a:r>
-              <a:rPr/>
-              <a:t>Fits to mature biomass survey indices broadly similar across models.</a:t>
+              <a:rPr b="1"/>
+              <a:t>Retained males:</a:t>
+            </a:r>
+            <a:r>
+              <a:rPr/>
+              <a:t> small differences across models. Plus-group change makes a small visual difference at the largest sizes.</a:t>
             </a:r>
           </a:p>
           <a:p>
             <a:pPr lvl="0"/>
             <a:r>
               <a:rPr b="1"/>
-              <a:t>All data-update candidates have difficulty fitting the terminal-year female biomass.</a:t>
-            </a:r>
-            <a:r>
-              <a:rPr/>
-              <a:t> New maturity workflow shifts dynamics modestly but does not resolve this.</a:t>
+              <a:t>Total males:</a:t>
+            </a:r>
+            <a:r>
+              <a:rPr/>
+              <a:t> noticeable differences between standard and hybrid-fishery models, particularly in the larger size bins where hybrids are most prevalent.</a:t>
             </a:r>
           </a:p>
           <a:p>
             <a:pPr lvl="0"/>
             <a:r>
-              <a:rPr/>
-              <a:t>Hybrid-survey models have visibly higher predicted survey biomass in some years (additive hybrid biomass) but trends through time are unchanged.</a:t>
+              <a:rPr b="1"/>
+              <a:t>Female discards (directed fishery):</a:t>
+            </a:r>
+            <a:r>
+              <a:rPr/>
+              <a:t> no visually discernible differences across models.</a:t>
             </a:r>
           </a:p>
           <a:p>
             <a:pPr lvl="0"/>
             <a:r>
-              <a:rPr/>
-              <a:t>Models with the immature survey index fit the new immature index well in recent years – </a:t>
-            </a:r>
-            <a:r>
-              <a:rPr i="1"/>
-              <a:t>except</a:t>
-            </a:r>
-            <a:r>
-              <a:rPr/>
-              <a:t> when paired with the new maturity ogive.</a:t>
-            </a:r>
-          </a:p>
-        </p:txBody>
-      </p:sp>
+              <a:rPr b="1"/>
+              <a:t>Non-directed fishery:</a:t>
+            </a:r>
+            <a:r>
+              <a:rPr/>
+              <a:t> some of the largest misfits (single estimated selectivity, time-varying fishery behavior). Sample sizes assumed = 100 except 2021 and 2024 (=10).</a:t>
+            </a:r>
+          </a:p>
+          <a:p>
+            <a:pPr lvl="0"/>
+            <a:r>
+              <a:rPr b="1"/>
+              <a:t>Survey size composition:</a:t>
+            </a:r>
+            <a:r>
+              <a:rPr/>
+              <a:t> broadly similar fits across models. Persistent misfits for </a:t>
+            </a:r>
+            <a:r>
+              <a:rPr b="1"/>
+              <a:t>immature females in 2009 and 2019</a:t>
+            </a:r>
+            <a:r>
+              <a:rPr/>
+              <a:t> – could reflect unmodeled size-based mortality or time-varying probability of terminal molt.</a:t>
+            </a:r>
+          </a:p>
+          <a:p>
+            <a:pPr lvl="0" indent="0" marL="0">
+              <a:spcBef>
+                <a:spcPts val="3000"/>
+              </a:spcBef>
+              <a:buNone/>
+            </a:pPr>
+            <a:r>
+              <a:rPr b="1"/>
+              <a:t>Retained-male comp fits, across </a:t>
+            </a:r>
+            <a:r>
+              <a:rPr b="1">
+                <a:latin typeface="Courier"/>
+              </a:rPr>
+              <a:t>compfix</a:t>
+            </a:r>
+            <a:r>
+              <a:rPr b="1"/>
+              <a:t> models</a:t>
+            </a:r>
+          </a:p>
+        </p:txBody>
+      </p:sp>
+      <p:pic>
+        <p:nvPicPr>
+          <p:cNvPr descr="plots/size_comp_plot_43_Pot_fishery_compfix_male_retained_undetermined_Old%20maturity.png" id="0" name="Picture 1"/>
+          <p:cNvPicPr>
+            <a:picLocks noGrp="1" noChangeAspect="1"/>
+          </p:cNvPicPr>
+          <p:nvPr/>
+        </p:nvPicPr>
+        <p:blipFill>
+          <a:blip r:embed="rId2"/>
+          <a:stretch>
+            <a:fillRect/>
+          </a:stretch>
+        </p:blipFill>
+        <p:spPr bwMode="auto">
+          <a:xfrm>
+            <a:off x="3937000" y="203200"/>
+            <a:ext cx="4381500" cy="4381500"/>
+          </a:xfrm>
+          <a:prstGeom prst="rect">
+            <a:avLst/>
+          </a:prstGeom>
+          <a:noFill/>
+          <a:ln w="9525">
+            <a:noFill/>
+            <a:headEnd/>
+            <a:tailEnd/>
+          </a:ln>
+        </p:spPr>
+      </p:pic>
     </p:spTree>
   </p:cSld>
 </p:sld>
@@ -8374,12 +8447,12 @@
       </p:grpSpPr>
       <p:sp>
         <p:nvSpPr>
-          <p:cNvPr id="2" name="Title 1"/>
-          <p:cNvSpPr>
-            <a:spLocks noGrp="1"/>
-          </p:cNvSpPr>
-          <p:nvPr>
-            <p:ph type="title"/>
+          <p:cNvPr id="4" name="Text Placeholder 3"/>
+          <p:cNvSpPr>
+            <a:spLocks noGrp="1"/>
+          </p:cNvSpPr>
+          <p:nvPr>
+            <p:ph idx="2" sz="half" type="body"/>
           </p:nvPr>
         </p:nvSpPr>
         <p:spPr/>
@@ -8388,94 +8461,48 @@
           <a:lstStyle/>
           <a:p>
             <a:pPr lvl="0" indent="0" marL="0">
+              <a:spcBef>
+                <a:spcPts val="3000"/>
+              </a:spcBef>
               <a:buNone/>
             </a:pPr>
             <a:r>
-              <a:rPr/>
-              <a:t>Fits to size composition data – key impressions</a:t>
-            </a:r>
-          </a:p>
-        </p:txBody>
-      </p:sp>
-      <p:sp>
-        <p:nvSpPr>
-          <p:cNvPr id="3" name="Content Placeholder 2"/>
-          <p:cNvSpPr>
-            <a:spLocks noGrp="1"/>
-          </p:cNvSpPr>
-          <p:nvPr>
-            <p:ph idx="1"/>
-          </p:nvPr>
-        </p:nvSpPr>
-        <p:spPr/>
-        <p:txBody>
-          <a:bodyPr/>
-          <a:lstStyle/>
-          <a:p>
-            <a:pPr lvl="0"/>
-            <a:r>
               <a:rPr b="1"/>
-              <a:t>Retained males:</a:t>
-            </a:r>
-            <a:r>
-              <a:rPr/>
-              <a:t> small differences across models. Plus-group change makes a small visual difference at the largest sizes.</a:t>
-            </a:r>
-          </a:p>
-          <a:p>
-            <a:pPr lvl="0"/>
-            <a:r>
-              <a:rPr b="1"/>
-              <a:t>Total males:</a:t>
-            </a:r>
-            <a:r>
-              <a:rPr/>
-              <a:t> noticeable differences between standard and hybrid-fishery models, particularly in the larger size bins where hybrids are most prevalent.</a:t>
-            </a:r>
-          </a:p>
-          <a:p>
-            <a:pPr lvl="0"/>
-            <a:r>
-              <a:rPr b="1"/>
-              <a:t>Female discards (directed fishery):</a:t>
-            </a:r>
-            <a:r>
-              <a:rPr/>
-              <a:t> no visually discernible differences across models.</a:t>
-            </a:r>
-          </a:p>
-          <a:p>
-            <a:pPr lvl="0"/>
-            <a:r>
-              <a:rPr b="1"/>
-              <a:t>Non-directed fishery:</a:t>
-            </a:r>
-            <a:r>
-              <a:rPr/>
-              <a:t> some of the largest misfits (single estimated selectivity, time-varying fishery behavior). Sample sizes assumed = 100 except 2021 and 2024 (=10).</a:t>
-            </a:r>
-          </a:p>
-          <a:p>
-            <a:pPr lvl="0"/>
-            <a:r>
-              <a:rPr b="1"/>
-              <a:t>Survey size composition:</a:t>
-            </a:r>
-            <a:r>
-              <a:rPr/>
-              <a:t> broadly similar fits across models. Persistent misfits for </a:t>
-            </a:r>
-            <a:r>
-              <a:rPr b="1"/>
-              <a:t>immature females in 2009 and 2019</a:t>
-            </a:r>
-            <a:r>
-              <a:rPr/>
-              <a:t> – could reflect unmodeled size-based mortality or time-varying probability of terminal molt.</a:t>
-            </a:r>
-          </a:p>
-        </p:txBody>
-      </p:sp>
+              <a:t>Total-male comp fits, hybrid vs. non-hybrid</a:t>
+            </a:r>
+          </a:p>
+        </p:txBody>
+      </p:sp>
+      <p:pic>
+        <p:nvPicPr>
+          <p:cNvPr descr="plots/size_comp_plot_56_Pot_fishery_plus_group_male_total_undetermined_Old%20maturity.png" id="0" name="Picture 1"/>
+          <p:cNvPicPr>
+            <a:picLocks noGrp="1" noChangeAspect="1"/>
+          </p:cNvPicPr>
+          <p:nvPr/>
+        </p:nvPicPr>
+        <p:blipFill>
+          <a:blip r:embed="rId2"/>
+          <a:stretch>
+            <a:fillRect/>
+          </a:stretch>
+        </p:blipFill>
+        <p:spPr bwMode="auto">
+          <a:xfrm>
+            <a:off x="3937000" y="203200"/>
+            <a:ext cx="4381500" cy="4381500"/>
+          </a:xfrm>
+          <a:prstGeom prst="rect">
+            <a:avLst/>
+          </a:prstGeom>
+          <a:noFill/>
+          <a:ln w="9525">
+            <a:noFill/>
+            <a:headEnd/>
+            <a:tailEnd/>
+          </a:ln>
+        </p:spPr>
+      </p:pic>
     </p:spTree>
   </p:cSld>
 </p:sld>
@@ -8498,34 +8525,9 @@
           <a:chExt cx="0" cy="0"/>
         </a:xfrm>
       </p:grpSpPr>
-      <p:sp>
-        <p:nvSpPr>
-          <p:cNvPr id="2" name="Title 1"/>
-          <p:cNvSpPr>
-            <a:spLocks noGrp="1"/>
-          </p:cNvSpPr>
-          <p:nvPr>
-            <p:ph type="title"/>
-          </p:nvPr>
-        </p:nvSpPr>
-        <p:spPr/>
-        <p:txBody>
-          <a:bodyPr/>
-          <a:lstStyle/>
-          <a:p>
-            <a:pPr lvl="0" indent="0" marL="0">
-              <a:buNone/>
-            </a:pPr>
-            <a:r>
-              <a:rPr/>
-              <a:t>Total-male comp fits, hybrid vs. non-hybrid</a:t>
-            </a:r>
-          </a:p>
-        </p:txBody>
-      </p:sp>
       <p:pic>
         <p:nvPicPr>
-          <p:cNvPr descr="plots/size_comp_plot_41_Pot_fishery_compfix_male_total_undetermined_New_maturity.png" id="0" name="Picture 1"/>
+          <p:cNvPr descr="plots/size_comp_plot_50_Pot_fishery_hybrid_male_total_undetermined_Old%20maturity.png" id="0" name="Picture 1"/>
           <p:cNvPicPr>
             <a:picLocks noGrp="1" noChangeAspect="1"/>
           </p:cNvPicPr>
@@ -8577,12 +8579,12 @@
       </p:grpSpPr>
       <p:sp>
         <p:nvSpPr>
-          <p:cNvPr id="3" name="Content Placeholder 2"/>
-          <p:cNvSpPr>
-            <a:spLocks noGrp="1"/>
-          </p:cNvSpPr>
-          <p:nvPr>
-            <p:ph idx="1"/>
+          <p:cNvPr id="4" name="Text Placeholder 3"/>
+          <p:cNvSpPr>
+            <a:spLocks noGrp="1"/>
+          </p:cNvSpPr>
+          <p:nvPr>
+            <p:ph idx="2" sz="half" type="body"/>
           </p:nvPr>
         </p:nvSpPr>
         <p:spPr/>
@@ -8591,15 +8593,48 @@
           <a:lstStyle/>
           <a:p>
             <a:pPr lvl="0" indent="0" marL="0">
+              <a:spcBef>
+                <a:spcPts val="3000"/>
+              </a:spcBef>
               <a:buNone/>
             </a:pPr>
             <a:r>
-              <a:rPr/>
-              <a:t>Pot fishery total-male composition fits (compfix base, new maturity); hybrid models fit the larger size bins more closely.</a:t>
-            </a:r>
-          </a:p>
-        </p:txBody>
-      </p:sp>
+              <a:rPr b="1"/>
+              <a:t>NMFS-immature female comp fits, old vs. new-maturity</a:t>
+            </a:r>
+          </a:p>
+        </p:txBody>
+      </p:sp>
+      <p:pic>
+        <p:nvPicPr>
+          <p:cNvPr descr="plots/size_comp_plot_21_NMFS_Trawl_1989_female_discarded_immature_Old%20maturity.png" id="0" name="Picture 1"/>
+          <p:cNvPicPr>
+            <a:picLocks noGrp="1" noChangeAspect="1"/>
+          </p:cNvPicPr>
+          <p:nvPr/>
+        </p:nvPicPr>
+        <p:blipFill>
+          <a:blip r:embed="rId2"/>
+          <a:stretch>
+            <a:fillRect/>
+          </a:stretch>
+        </p:blipFill>
+        <p:spPr bwMode="auto">
+          <a:xfrm>
+            <a:off x="3937000" y="203200"/>
+            <a:ext cx="4381500" cy="4381500"/>
+          </a:xfrm>
+          <a:prstGeom prst="rect">
+            <a:avLst/>
+          </a:prstGeom>
+          <a:noFill/>
+          <a:ln w="9525">
+            <a:noFill/>
+            <a:headEnd/>
+            <a:tailEnd/>
+          </a:ln>
+        </p:spPr>
+      </p:pic>
     </p:spTree>
   </p:cSld>
 </p:sld>
@@ -8622,34 +8657,9 @@
           <a:chExt cx="0" cy="0"/>
         </a:xfrm>
       </p:grpSpPr>
-      <p:sp>
-        <p:nvSpPr>
-          <p:cNvPr id="2" name="Title 1"/>
-          <p:cNvSpPr>
-            <a:spLocks noGrp="1"/>
-          </p:cNvSpPr>
-          <p:nvPr>
-            <p:ph type="title"/>
-          </p:nvPr>
-        </p:nvSpPr>
-        <p:spPr/>
-        <p:txBody>
-          <a:bodyPr/>
-          <a:lstStyle/>
-          <a:p>
-            <a:pPr lvl="0" indent="0" marL="0">
-              <a:buNone/>
-            </a:pPr>
-            <a:r>
-              <a:rPr/>
-              <a:t>Example: NMFS survey selectivity</a:t>
-            </a:r>
-          </a:p>
-        </p:txBody>
-      </p:sp>
       <p:pic>
         <p:nvPicPr>
-          <p:cNvPr descr="plots/survey_selex.png" id="0" name="Picture 1"/>
+          <p:cNvPr descr="plots/size_comp_plot_17_NMFS_Trawl_1989_female_discarded_immature_New%20maturity.png" id="0" name="Picture 1"/>
           <p:cNvPicPr>
             <a:picLocks noGrp="1" noChangeAspect="1"/>
           </p:cNvPicPr>
@@ -8663,8 +8673,8 @@
         </p:blipFill>
         <p:spPr bwMode="auto">
           <a:xfrm>
-            <a:off x="2374900" y="1193800"/>
-            <a:ext cx="4406900" cy="3390900"/>
+            <a:off x="2870200" y="1193800"/>
+            <a:ext cx="3390900" cy="3390900"/>
           </a:xfrm>
           <a:prstGeom prst="rect">
             <a:avLst/>
@@ -8833,15 +8843,20 @@
       </p:grpSpPr>
       <p:sp>
         <p:nvSpPr>
-          <p:cNvPr id="3" name="Content Placeholder 2"/>
-          <p:cNvSpPr>
-            <a:spLocks noGrp="1"/>
-          </p:cNvSpPr>
-          <p:nvPr>
-            <p:ph idx="1"/>
-          </p:nvPr>
-        </p:nvSpPr>
-        <p:spPr/>
+          <p:cNvPr id="2" name="Title 1"/>
+          <p:cNvSpPr>
+            <a:spLocks noGrp="1"/>
+          </p:cNvSpPr>
+          <p:nvPr>
+            <p:ph type="title"/>
+          </p:nvPr>
+        </p:nvSpPr>
+        <p:spPr>
+          <a:xfrm>
+            <a:off x="722313" y="3305176"/>
+            <a:ext cx="7772400" cy="1021556"/>
+          </a:xfrm>
+        </p:spPr>
         <p:txBody>
           <a:bodyPr/>
           <a:lstStyle/>
@@ -8851,7 +8866,7 @@
             </a:pPr>
             <a:r>
               <a:rPr/>
-              <a:t> Estimated NMFS summer-trawl survey selectivity by era and sex with BSFRF-derived priors. Recent-era estimates are similar across models.</a:t>
+              <a:t>Estimated population processes and management</a:t>
             </a:r>
           </a:p>
         </p:txBody>
@@ -8888,12 +8903,7 @@
             <p:ph type="title"/>
           </p:nvPr>
         </p:nvSpPr>
-        <p:spPr>
-          <a:xfrm>
-            <a:off x="722313" y="3305176"/>
-            <a:ext cx="7772400" cy="1021556"/>
-          </a:xfrm>
-        </p:spPr>
+        <p:spPr/>
         <p:txBody>
           <a:bodyPr/>
           <a:lstStyle/>
@@ -8903,7 +8913,71 @@
             </a:pPr>
             <a:r>
               <a:rPr/>
-              <a:t>Estimated population processes and management</a:t>
+              <a:t>Commercially preferred males (&gt;=101 mm CW)</a:t>
+            </a:r>
+          </a:p>
+        </p:txBody>
+      </p:sp>
+      <p:sp>
+        <p:nvSpPr>
+          <p:cNvPr id="3" name="Content Placeholder 2"/>
+          <p:cNvSpPr>
+            <a:spLocks noGrp="1"/>
+          </p:cNvSpPr>
+          <p:nvPr>
+            <p:ph idx="1"/>
+          </p:nvPr>
+        </p:nvSpPr>
+        <p:spPr/>
+        <p:txBody>
+          <a:bodyPr/>
+          <a:lstStyle/>
+          <a:p>
+            <a:pPr lvl="0"/>
+            <a:r>
+              <a:rPr/>
+              <a:t>Estimated abundance of commercially preferred male crab varies among models – particularly in the early years where survey selectivity by era differs.</a:t>
+            </a:r>
+          </a:p>
+          <a:p>
+            <a:pPr lvl="0"/>
+            <a:r>
+              <a:rPr b="1"/>
+              <a:t>All models agree</a:t>
+            </a:r>
+            <a:r>
+              <a:rPr/>
+              <a:t>: abundance in recent years is at the </a:t>
+            </a:r>
+            <a:r>
+              <a:rPr b="1"/>
+              <a:t>lowest in the time series</a:t>
+            </a:r>
+            <a:r>
+              <a:rPr/>
+              <a:t>.</a:t>
+            </a:r>
+          </a:p>
+          <a:p>
+            <a:pPr lvl="0"/>
+            <a:r>
+              <a:rPr/>
+              <a:t>2025 survey biomass of preferred males = </a:t>
+            </a:r>
+            <a:r>
+              <a:rPr b="1"/>
+              <a:t>23.28 kt</a:t>
+            </a:r>
+            <a:r>
+              <a:rPr/>
+              <a:t>.</a:t>
+            </a:r>
+          </a:p>
+          <a:p>
+            <a:pPr lvl="0"/>
+            <a:r>
+              <a:rPr/>
+              <a:t>Most recent survey selectivity estimates are similar across models for both sexes.</a:t>
             </a:r>
           </a:p>
         </p:txBody>
@@ -8950,75 +9024,128 @@
             </a:pPr>
             <a:r>
               <a:rPr/>
-              <a:t>Commercially preferred males (&gt;=101 mm CW)</a:t>
-            </a:r>
-          </a:p>
-        </p:txBody>
-      </p:sp>
-      <p:sp>
-        <p:nvSpPr>
-          <p:cNvPr id="3" name="Content Placeholder 2"/>
-          <p:cNvSpPr>
-            <a:spLocks noGrp="1"/>
-          </p:cNvSpPr>
-          <p:nvPr>
-            <p:ph idx="1"/>
-          </p:nvPr>
-        </p:nvSpPr>
-        <p:spPr/>
-        <p:txBody>
-          <a:bodyPr/>
-          <a:lstStyle/>
-          <a:p>
-            <a:pPr lvl="0"/>
-            <a:r>
-              <a:rPr/>
-              <a:t>Estimated abundance of commercially preferred male crab varies among models – particularly in the early years where survey selectivity by era differs.</a:t>
-            </a:r>
-          </a:p>
-          <a:p>
-            <a:pPr lvl="0"/>
-            <a:r>
-              <a:rPr b="1"/>
-              <a:t>All models agree</a:t>
-            </a:r>
-            <a:r>
-              <a:rPr/>
-              <a:t>: abundance in recent years is at the </a:t>
-            </a:r>
-            <a:r>
-              <a:rPr b="1"/>
-              <a:t>lowest in the time series</a:t>
-            </a:r>
-            <a:r>
-              <a:rPr/>
-              <a:t>.</a:t>
-            </a:r>
-          </a:p>
-          <a:p>
-            <a:pPr lvl="0"/>
-            <a:r>
-              <a:rPr/>
-              <a:t>2025 survey biomass of preferred males = </a:t>
-            </a:r>
-            <a:r>
-              <a:rPr b="1"/>
-              <a:t>23.28 kt</a:t>
-            </a:r>
-            <a:r>
-              <a:rPr/>
-              <a:t>.</a:t>
-            </a:r>
-          </a:p>
-          <a:p>
-            <a:pPr lvl="0"/>
-            <a:r>
-              <a:rPr/>
-              <a:t>Most recent survey selectivity estimates are similar across models for both sexes.</a:t>
-            </a:r>
-          </a:p>
-        </p:txBody>
-      </p:sp>
+              <a:t>Probability of terminal molt at size</a:t>
+            </a:r>
+          </a:p>
+        </p:txBody>
+      </p:sp>
+      <mc:AlternateContent xmlns:mc="http://schemas.openxmlformats.org/markup-compatibility/2006">
+        <mc:Choice xmlns:a14="http://schemas.microsoft.com/office/drawing/2010/main" Requires="a14">
+          <p:sp>
+            <p:nvSpPr>
+              <p:cNvPr id="3" name="Content Placeholder 2"/>
+              <p:cNvSpPr>
+                <a:spLocks noGrp="1"/>
+              </p:cNvSpPr>
+              <p:nvPr>
+                <p:ph idx="1"/>
+              </p:nvPr>
+            </p:nvSpPr>
+            <p:spPr/>
+            <p:txBody>
+              <a:bodyPr/>
+              <a:lstStyle/>
+              <a:p>
+                <a:pPr lvl="0"/>
+                <a:r>
+                  <a:rPr/>
+                  <a:t>Probability of undergoing terminal molt is </a:t>
+                </a:r>
+                <a:r>
+                  <a:rPr b="1"/>
+                  <a:t>input as data</a:t>
+                </a:r>
+                <a:r>
+                  <a:rPr/>
+                  <a:t>.</a:t>
+                </a:r>
+              </a:p>
+              <a:p>
+                <a:pPr lvl="0"/>
+                <a:r>
+                  <a:rPr b="1"/>
+                  <a:t>Legacy workflow:</a:t>
+                </a:r>
+                <a:r>
+                  <a:rPr/>
+                  <a:t> strong increasing trend through time at intermediate sizes (at 77 mm: ~0.2 in early 1990s </a:t>
+                </a:r>
+                <a14:m>
+                  <m:oMath xmlns:m="http://schemas.openxmlformats.org/officeDocument/2006/math">
+                    <m:r>
+                      <m:rPr>
+                        <m:sty m:val="p"/>
+                      </m:rPr>
+                      <m:t>→</m:t>
+                    </m:r>
+                  </m:oMath>
+                </a14:m>
+                <a:r>
+                  <a:rPr/>
+                  <a:t> ~0.5 after 2010).</a:t>
+                </a:r>
+              </a:p>
+              <a:p>
+                <a:pPr lvl="0"/>
+                <a:r>
+                  <a:rPr b="1"/>
+                  <a:t>New workflow (</a:t>
+                </a:r>
+                <a:r>
+                  <a:rPr b="1">
+                    <a:latin typeface="Courier"/>
+                  </a:rPr>
+                  <a:t>sdmTMB</a:t>
+                </a:r>
+                <a:r>
+                  <a:rPr b="1"/>
+                  <a:t>):</a:t>
+                </a:r>
+                <a:r>
+                  <a:rPr/>
+                  <a:t> much weaker temporal trend (~0.35–0.45 throughout).</a:t>
+                </a:r>
+              </a:p>
+              <a:p>
+                <a:pPr lvl="0"/>
+                <a:r>
+                  <a:rPr/>
+                  <a:t>Difference in workflows propagates into the size composition data and the magnitude of recruitment to the fishery.</a:t>
+                </a:r>
+              </a:p>
+              <a:p>
+                <a:pPr lvl="0" indent="0" marL="0">
+                  <a:buNone/>
+                </a:pPr>
+                <a:r>
+                  <a:rPr/>
+                  <a:t>Implication: very different reference points and OFLs across </a:t>
+                </a:r>
+                <a:r>
+                  <a:rPr>
+                    <a:latin typeface="Courier"/>
+                  </a:rPr>
+                  <a:t>Models 25.1*</a:t>
+                </a:r>
+                <a:r>
+                  <a:rPr/>
+                  <a:t> vs. </a:t>
+                </a:r>
+                <a:r>
+                  <a:rPr>
+                    <a:latin typeface="Courier"/>
+                  </a:rPr>
+                  <a:t>25.2*</a:t>
+                </a:r>
+                <a:r>
+                  <a:rPr/>
+                  <a:t>.</a:t>
+                </a:r>
+              </a:p>
+            </p:txBody>
+          </p:sp>
+        </mc:Choice>
+      </mc:AlternateContent>
     </p:spTree>
   </p:cSld>
 </p:sld>
@@ -9061,128 +9188,64 @@
             </a:pPr>
             <a:r>
               <a:rPr/>
-              <a:t>Probability of terminal molt at size</a:t>
-            </a:r>
-          </a:p>
-        </p:txBody>
-      </p:sp>
-      <mc:AlternateContent xmlns:mc="http://schemas.openxmlformats.org/markup-compatibility/2006">
-        <mc:Choice xmlns:a14="http://schemas.microsoft.com/office/drawing/2010/main" Requires="a14">
-          <p:sp>
-            <p:nvSpPr>
-              <p:cNvPr id="3" name="Content Placeholder 2"/>
-              <p:cNvSpPr>
-                <a:spLocks noGrp="1"/>
-              </p:cNvSpPr>
-              <p:nvPr>
-                <p:ph idx="1"/>
-              </p:nvPr>
-            </p:nvSpPr>
-            <p:spPr/>
-            <p:txBody>
-              <a:bodyPr/>
-              <a:lstStyle/>
-              <a:p>
-                <a:pPr lvl="0"/>
-                <a:r>
-                  <a:rPr/>
-                  <a:t>Probability of undergoing terminal molt is </a:t>
-                </a:r>
-                <a:r>
-                  <a:rPr b="1"/>
-                  <a:t>input as data</a:t>
-                </a:r>
-                <a:r>
-                  <a:rPr/>
-                  <a:t>.</a:t>
-                </a:r>
-              </a:p>
-              <a:p>
-                <a:pPr lvl="0"/>
-                <a:r>
-                  <a:rPr b="1"/>
-                  <a:t>Legacy workflow:</a:t>
-                </a:r>
-                <a:r>
-                  <a:rPr/>
-                  <a:t> strong increasing trend through time at intermediate sizes (at 77 mm: ~0.2 in early 1990s </a:t>
-                </a:r>
-                <a14:m>
-                  <m:oMath xmlns:m="http://schemas.openxmlformats.org/officeDocument/2006/math">
-                    <m:r>
-                      <m:rPr>
-                        <m:sty m:val="p"/>
-                      </m:rPr>
-                      <m:t>→</m:t>
-                    </m:r>
-                  </m:oMath>
-                </a14:m>
-                <a:r>
-                  <a:rPr/>
-                  <a:t> ~0.5 after 2010).</a:t>
-                </a:r>
-              </a:p>
-              <a:p>
-                <a:pPr lvl="0"/>
-                <a:r>
-                  <a:rPr b="1"/>
-                  <a:t>New workflow (</a:t>
-                </a:r>
-                <a:r>
-                  <a:rPr b="1">
-                    <a:latin typeface="Courier"/>
-                  </a:rPr>
-                  <a:t>sdmTMB</a:t>
-                </a:r>
-                <a:r>
-                  <a:rPr b="1"/>
-                  <a:t>):</a:t>
-                </a:r>
-                <a:r>
-                  <a:rPr/>
-                  <a:t> much weaker temporal trend (~0.35–0.45 throughout).</a:t>
-                </a:r>
-              </a:p>
-              <a:p>
-                <a:pPr lvl="0"/>
-                <a:r>
-                  <a:rPr/>
-                  <a:t>Difference in workflows propagates into the size composition data and the magnitude of recruitment to the fishery.</a:t>
-                </a:r>
-              </a:p>
-              <a:p>
-                <a:pPr lvl="0" indent="0" marL="0">
-                  <a:buNone/>
-                </a:pPr>
-                <a:r>
-                  <a:rPr/>
-                  <a:t>Implication: very different reference points and OFLs across </a:t>
-                </a:r>
-                <a:r>
-                  <a:rPr>
-                    <a:latin typeface="Courier"/>
-                  </a:rPr>
-                  <a:t>Models 25.1*</a:t>
-                </a:r>
-                <a:r>
-                  <a:rPr/>
-                  <a:t> vs. </a:t>
-                </a:r>
-                <a:r>
-                  <a:rPr>
-                    <a:latin typeface="Courier"/>
-                  </a:rPr>
-                  <a:t>25.2*</a:t>
-                </a:r>
-                <a:r>
-                  <a:rPr/>
-                  <a:t>.</a:t>
-                </a:r>
-              </a:p>
-            </p:txBody>
-          </p:sp>
-        </mc:Choice>
-      </mc:AlternateContent>
+              <a:t>Recruitment</a:t>
+            </a:r>
+          </a:p>
+        </p:txBody>
+      </p:sp>
+      <p:sp>
+        <p:nvSpPr>
+          <p:cNvPr id="3" name="Content Placeholder 2"/>
+          <p:cNvSpPr>
+            <a:spLocks noGrp="1"/>
+          </p:cNvSpPr>
+          <p:nvPr>
+            <p:ph idx="1"/>
+          </p:nvPr>
+        </p:nvSpPr>
+        <p:spPr/>
+        <p:txBody>
+          <a:bodyPr/>
+          <a:lstStyle/>
+          <a:p>
+            <a:pPr lvl="0"/>
+            <a:r>
+              <a:rPr/>
+              <a:t>Recruitment trends very similar across models for the </a:t>
+            </a:r>
+            <a:r>
+              <a:rPr b="1"/>
+              <a:t>early time series</a:t>
+            </a:r>
+            <a:r>
+              <a:rPr/>
+              <a:t>, with some differences in scale and sex-specific timing.</a:t>
+            </a:r>
+          </a:p>
+          <a:p>
+            <a:pPr lvl="0"/>
+            <a:r>
+              <a:rPr/>
+              <a:t>Differences in </a:t>
+            </a:r>
+            <a:r>
+              <a:rPr b="1"/>
+              <a:t>recent-year recruitment</a:t>
+            </a:r>
+            <a:r>
+              <a:rPr/>
+              <a:t> are observed among models for males and contribute to differences in OFLs.</a:t>
+            </a:r>
+          </a:p>
+          <a:p>
+            <a:pPr lvl="0"/>
+            <a:r>
+              <a:rPr/>
+              <a:t>Sex-specific recruitment timing remains an open issue raised by the SSC – see Author Responses.</a:t>
+            </a:r>
+          </a:p>
+        </p:txBody>
+      </p:sp>
     </p:spTree>
   </p:cSld>
 </p:sld>
@@ -9225,106 +9288,6 @@
             </a:pPr>
             <a:r>
               <a:rPr/>
-              <a:t>Recruitment</a:t>
-            </a:r>
-          </a:p>
-        </p:txBody>
-      </p:sp>
-      <p:sp>
-        <p:nvSpPr>
-          <p:cNvPr id="3" name="Content Placeholder 2"/>
-          <p:cNvSpPr>
-            <a:spLocks noGrp="1"/>
-          </p:cNvSpPr>
-          <p:nvPr>
-            <p:ph idx="1"/>
-          </p:nvPr>
-        </p:nvSpPr>
-        <p:spPr/>
-        <p:txBody>
-          <a:bodyPr/>
-          <a:lstStyle/>
-          <a:p>
-            <a:pPr lvl="0"/>
-            <a:r>
-              <a:rPr/>
-              <a:t>Recruitment trends very similar across models for the </a:t>
-            </a:r>
-            <a:r>
-              <a:rPr b="1"/>
-              <a:t>early time series</a:t>
-            </a:r>
-            <a:r>
-              <a:rPr/>
-              <a:t>, with some differences in scale and sex-specific timing.</a:t>
-            </a:r>
-          </a:p>
-          <a:p>
-            <a:pPr lvl="0"/>
-            <a:r>
-              <a:rPr/>
-              <a:t>Differences in </a:t>
-            </a:r>
-            <a:r>
-              <a:rPr b="1"/>
-              <a:t>recent-year recruitment</a:t>
-            </a:r>
-            <a:r>
-              <a:rPr/>
-              <a:t> are observed among models for males and contribute to differences in OFLs.</a:t>
-            </a:r>
-          </a:p>
-          <a:p>
-            <a:pPr lvl="0"/>
-            <a:r>
-              <a:rPr/>
-              <a:t>Sex-specific recruitment timing remains an open issue raised by the SSC – see Author Responses.</a:t>
-            </a:r>
-          </a:p>
-        </p:txBody>
-      </p:sp>
-    </p:spTree>
-  </p:cSld>
-</p:sld>
-</file>
-
-<file path=ppt/slides/slide55.xml><?xml version="1.0" encoding="utf-8"?>
-<p:sld xmlns:a="http://schemas.openxmlformats.org/drawingml/2006/main" xmlns:r="http://schemas.openxmlformats.org/officeDocument/2006/relationships" xmlns:p="http://schemas.openxmlformats.org/presentationml/2006/main">
-  <p:cSld>
-    <p:spTree>
-      <p:nvGrpSpPr>
-        <p:cNvPr id="1" name=""/>
-        <p:cNvGrpSpPr/>
-        <p:nvPr/>
-      </p:nvGrpSpPr>
-      <p:grpSpPr>
-        <a:xfrm>
-          <a:off x="0" y="0"/>
-          <a:ext cx="0" cy="0"/>
-          <a:chOff x="0" y="0"/>
-          <a:chExt cx="0" cy="0"/>
-        </a:xfrm>
-      </p:grpSpPr>
-      <p:sp>
-        <p:nvSpPr>
-          <p:cNvPr id="2" name="Title 1"/>
-          <p:cNvSpPr>
-            <a:spLocks noGrp="1"/>
-          </p:cNvSpPr>
-          <p:nvPr>
-            <p:ph type="title"/>
-          </p:nvPr>
-        </p:nvSpPr>
-        <p:spPr/>
-        <p:txBody>
-          <a:bodyPr/>
-          <a:lstStyle/>
-          <a:p>
-            <a:pPr lvl="0" indent="0" marL="0">
-              <a:buNone/>
-            </a:pPr>
-            <a:r>
-              <a:rPr/>
               <a:t>Natural mortality</a:t>
             </a:r>
           </a:p>
@@ -9486,7 +9449,7 @@
 </p:sld>
 </file>
 
-<file path=ppt/slides/slide56.xml><?xml version="1.0" encoding="utf-8"?>
+<file path=ppt/slides/slide55.xml><?xml version="1.0" encoding="utf-8"?>
 <p:sld xmlns:a="http://schemas.openxmlformats.org/drawingml/2006/main" xmlns:r="http://schemas.openxmlformats.org/officeDocument/2006/relationships" xmlns:p="http://schemas.openxmlformats.org/presentationml/2006/main">
   <p:cSld>
     <p:spTree>
@@ -9555,7 +9518,7 @@
         </p:nvGraphicFramePr>
         <p:xfrm>
           <a:off x="457200" y="1193800"/>
-          <a:ext cx="8229600" cy="2882900"/>
+          <a:ext cx="8229600" cy="3390900"/>
         </p:xfrm>
         <a:graphic>
           <a:graphicData uri="http://schemas.openxmlformats.org/drawingml/2006/table">
@@ -10280,42 +10243,12 @@
           </a:graphicData>
         </a:graphic>
       </p:graphicFrame>
-      <p:sp>
-        <p:nvSpPr>
-          <p:cNvPr id="1" name="TextBox 3"/>
-          <p:cNvSpPr txBox="1"/>
-          <p:nvPr/>
-        </p:nvSpPr>
-        <p:spPr>
-          <a:xfrm>
-            <a:off x="457200" y="4076700"/>
-            <a:ext cx="8229600" cy="508000"/>
-          </a:xfrm>
-          <a:prstGeom prst="rect">
-            <a:avLst/>
-          </a:prstGeom>
-          <a:noFill/>
-        </p:spPr>
-        <p:txBody>
-          <a:bodyPr/>
-          <a:lstStyle/>
-          <a:p>
-            <a:pPr lvl="0" indent="0" marL="0" algn="ctr">
-              <a:buNone/>
-            </a:pPr>
-            <a:r>
-              <a:rPr/>
-              <a:t>Estimated natural mortality (M) for immature and mature males in 2024 across the candidate models. Note: y-axis caps differ; immature-survey models produce substantially higher mature-male M.</a:t>
-            </a:r>
-          </a:p>
-        </p:txBody>
-      </p:sp>
     </p:spTree>
   </p:cSld>
 </p:sld>
 </file>
 
-<file path=ppt/slides/slide57.xml><?xml version="1.0" encoding="utf-8"?>
+<file path=ppt/slides/slide56.xml><?xml version="1.0" encoding="utf-8"?>
 <p:sld xmlns:a="http://schemas.openxmlformats.org/drawingml/2006/main" xmlns:r="http://schemas.openxmlformats.org/officeDocument/2006/relationships" xmlns:p="http://schemas.openxmlformats.org/presentationml/2006/main">
   <p:cSld>
     <p:spTree>
@@ -10662,7 +10595,7 @@
 </p:sld>
 </file>
 
-<file path=ppt/slides/slide58.xml><?xml version="1.0" encoding="utf-8"?>
+<file path=ppt/slides/slide57.xml><?xml version="1.0" encoding="utf-8"?>
 <p:sld xmlns:a="http://schemas.openxmlformats.org/drawingml/2006/main" xmlns:r="http://schemas.openxmlformats.org/officeDocument/2006/relationships" xmlns:p="http://schemas.openxmlformats.org/presentationml/2006/main">
   <p:cSld>
     <p:spTree>
@@ -10739,7 +10672,72 @@
 </p:sld>
 </file>
 
-<file path=ppt/slides/slide59.xml><?xml version="1.0" encoding="UTF-8"?><p:sld xmlns:a="http://schemas.openxmlformats.org/drawingml/2006/main" xmlns:r="http://schemas.openxmlformats.org/officeDocument/2006/relationships" xmlns:p="http://schemas.openxmlformats.org/presentationml/2006/main"><p:cSld><p:spTree><p:nvGrpSpPr><p:cNvPr id="1" name="" /><p:cNvGrpSpPr /><p:nvPr /></p:nvGrpSpPr><p:grpSpPr><a:xfrm><a:off x="0" y="0" /><a:ext cx="0" cy="0" /><a:chOff x="0" y="0" /><a:chExt cx="0" cy="0" /></a:xfrm></p:grpSpPr><p:sp><p:nvSpPr><p:cNvPr id="2" name="Title 1" /><p:cNvSpPr><a:spLocks noGrp="1" /></p:cNvSpPr><p:nvPr><p:ph type="title" /></p:nvPr></p:nvSpPr><p:spPr /><p:txBody><a:bodyPr /><a:lstStyle /><a:p><a:pPr lvl="0" indent="0" marL="0"><a:buNone /></a:pPr><a:r><a:rPr /><a:t>Management quantities</a:t></a:r></a:p></p:txBody></p:sp><p:graphicFrame><p:nvGraphicFramePr><p:cNvPr id="6" name="Content Placeholder 5" /><p:cNvGraphicFramePr><a:graphicFrameLocks noGrp="1" /></p:cNvGraphicFramePr><p:nvPr><p:ph idx="1" /></p:nvPr></p:nvGraphicFramePr><p:xfrm><a:off x="457200" y="1193800" /><a:ext cx="8229600" cy="3390900" /></p:xfrm><a:graphic><a:graphicData uri="http://schemas.openxmlformats.org/drawingml/2006/table"><a:tbl><a:tblPr firstRow="1" bandRow="1"><a:tableStyleId>{5C22544A-7EE6-4342-B048-85BDC9FD1C3A}</a:tableStyleId></a:tblPr><a:tblGrid><a:gridCol w="977900" /><a:gridCol w="1739900" /><a:gridCol w="1206500" /><a:gridCol w="1282700" /><a:gridCol w="1130300" /><a:gridCol w="1130300" /><a:gridCol w="749300" /></a:tblGrid><a:tr h="0"><a:tc><a:txBody><a:bodyPr /><a:lstStyle /><a:p><a:pPr lvl="0" indent="0" marL="0"><a:buNone /></a:pPr><a:r><a:rPr /><a:t>Model</a:t></a:r></a:p></a:txBody><a:tcPr /></a:tc><a:tc><a:txBody><a:bodyPr /><a:lstStyle /><a:p><a:pPr lvl="0" indent="0" marL="0"><a:buNone /></a:pPr><a:r><a:rPr /><a:t>Description</a:t></a:r></a:p></a:txBody><a:tcPr /></a:tc><a:tc><a:txBody><a:bodyPr /><a:lstStyle /><a:p><a:pPr lvl="0" indent="0" marL="0" algn="r"><a:buNone /></a:pPr><a14:m><m:oMath xmlns:m="http://schemas.openxmlformats.org/officeDocument/2006/math"><m:sSub><m:e><m:r><m:t>B</m:t></m:r></m:e><m:sub><m:r><m:t>M</m:t></m:r><m:r><m:t>S</m:t></m:r><m:r><m:t>Y</m:t></m:r></m:sub></m:sSub></m:oMath></a14:m><a:r><a:rPr /><a:t> (kt)</a:t></a:r></a:p></a:txBody><a:tcPr /></a:tc><a:tc><a:txBody><a:bodyPr /><a:lstStyle /><a:p><a:pPr lvl="0" indent="0" marL="0" algn="r"><a:buNone /></a:pPr><a:r><a:rPr /><a:t>Bcurr/</a:t></a:r><a14:m><m:oMath xmlns:m="http://schemas.openxmlformats.org/officeDocument/2006/math"><m:sSub><m:e><m:r><m:t>B</m:t></m:r></m:e><m:sub><m:r><m:t>M</m:t></m:r><m:r><m:t>S</m:t></m:r><m:r><m:t>Y</m:t></m:r></m:sub></m:sSub></m:oMath></a14:m></a:p></a:txBody><a:tcPr /></a:tc><a:tc><a:txBody><a:bodyPr /><a:lstStyle /><a:p><a:pPr lvl="0" indent="0" marL="0" algn="r"><a:buNone /></a:pPr><a14:m><m:oMath xmlns:m="http://schemas.openxmlformats.org/officeDocument/2006/math"><m:sSub><m:e><m:r><m:t>F</m:t></m:r></m:e><m:sub><m:r><m:t>M</m:t></m:r><m:r><m:t>S</m:t></m:r><m:r><m:t>Y</m:t></m:r></m:sub></m:sSub></m:oMath></a14:m><a:r><a:rPr /><a:t> (%)</a:t></a:r></a:p></a:txBody><a:tcPr /></a:tc><a:tc><a:txBody><a:bodyPr /><a:lstStyle /><a:p><a:pPr lvl="0" indent="0" marL="0" algn="r"><a:buNone /></a:pPr><a14:m><m:oMath xmlns:m="http://schemas.openxmlformats.org/officeDocument/2006/math"><m:sSub><m:e><m:r><m:t>F</m:t></m:r></m:e><m:sub><m:r><m:t>O</m:t></m:r><m:r><m:t>F</m:t></m:r><m:r><m:t>L</m:t></m:r></m:sub></m:sSub></m:oMath></a14:m><a:r><a:rPr /><a:t> (%)</a:t></a:r></a:p></a:txBody><a:tcPr /></a:tc><a:tc><a:txBody><a:bodyPr /><a:lstStyle /><a:p><a:pPr lvl="0" indent="0" marL="0" algn="r"><a:buNone /></a:pPr><a:r><a:rPr /><a:t>OFL (kt)</a:t></a:r></a:p></a:txBody><a:tcPr /></a:tc></a:tr><a:tr h="0"><a:tc><a:txBody><a:bodyPr /><a:lstStyle /><a:p><a:pPr lvl="0" indent="0" marL="0"><a:buNone /></a:pPr><a:r><a:rPr /><a:t>Model 25</a:t></a:r></a:p></a:txBody></a:tc><a:tc><a:txBody><a:bodyPr /><a:lstStyle /><a:p><a:pPr lvl="0" indent="0" marL="0"><a:buNone /></a:pPr><a:r><a:rPr /><a:t>rolled fwd</a:t></a:r></a:p></a:txBody></a:tc><a:tc><a:txBody><a:bodyPr /><a:lstStyle /><a:p><a:pPr lvl="0" indent="0" marL="0" algn="r"><a:buNone /></a:pPr><a:r><a:rPr /><a:t>180.1</a:t></a:r></a:p></a:txBody></a:tc><a:tc><a:txBody><a:bodyPr /><a:lstStyle /><a:p><a:pPr lvl="0" indent="0" marL="0" algn="r"><a:buNone /></a:pPr><a:r><a:rPr /><a:t>0.88</a:t></a:r></a:p></a:txBody></a:tc><a:tc><a:txBody><a:bodyPr /><a:lstStyle /><a:p><a:pPr lvl="0" indent="0" marL="0" algn="r"><a:buNone /></a:pPr><a:r><a:rPr /><a:t>39.5</a:t></a:r></a:p></a:txBody></a:tc><a:tc><a:txBody><a:bodyPr /><a:lstStyle /><a:p><a:pPr lvl="0" indent="0" marL="0" algn="r"><a:buNone /></a:pPr><a:r><a:rPr /><a:t>34.4</a:t></a:r></a:p></a:txBody></a:tc><a:tc><a:txBody><a:bodyPr /><a:lstStyle /><a:p><a:pPr lvl="0" indent="0" marL="0" algn="r"><a:buNone /></a:pPr><a:r><a:rPr /><a:t>44.3</a:t></a:r></a:p></a:txBody></a:tc></a:tr><a:tr h="0"><a:tc><a:txBody><a:bodyPr /><a:lstStyle /><a:p><a:pPr lvl="0" indent="0" marL="0"><a:buNone /></a:pPr><a:r><a:rPr /><a:t>Model 25.1a</a:t></a:r></a:p></a:txBody></a:tc><a:tc><a:txBody><a:bodyPr /><a:lstStyle /><a:p><a:pPr lvl="0" indent="0" marL="0"><a:buNone /></a:pPr><a:r><a:rPr /><a:t>update</a:t></a:r></a:p></a:txBody></a:tc><a:tc><a:txBody><a:bodyPr /><a:lstStyle /><a:p><a:pPr lvl="0" indent="0" marL="0" algn="r"><a:buNone /></a:pPr><a:r><a:rPr /><a:t>184.8</a:t></a:r></a:p></a:txBody></a:tc><a:tc><a:txBody><a:bodyPr /><a:lstStyle /><a:p><a:pPr lvl="0" indent="0" marL="0" algn="r"><a:buNone /></a:pPr><a:r><a:rPr /><a:t>0.86</a:t></a:r></a:p></a:txBody></a:tc><a:tc><a:txBody><a:bodyPr /><a:lstStyle /><a:p><a:pPr lvl="0" indent="0" marL="0" algn="r"><a:buNone /></a:pPr><a:r><a:rPr /><a:t>35.9</a:t></a:r></a:p></a:txBody></a:tc><a:tc><a:txBody><a:bodyPr /><a:lstStyle /><a:p><a:pPr lvl="0" indent="0" marL="0" algn="r"><a:buNone /></a:pPr><a:r><a:rPr /><a:t>30.5</a:t></a:r></a:p></a:txBody></a:tc><a:tc><a:txBody><a:bodyPr /><a:lstStyle /><a:p><a:pPr lvl="0" indent="0" marL="0" algn="r"><a:buNone /></a:pPr><a:r><a:rPr /><a:t>44.0</a:t></a:r></a:p></a:txBody></a:tc></a:tr><a:tr h="0"><a:tc><a:txBody><a:bodyPr /><a:lstStyle /><a:p><a:pPr lvl="0" indent="0" marL="0"><a:buNone /></a:pPr><a:r><a:rPr /><a:t>Model 25.1b</a:t></a:r></a:p></a:txBody></a:tc><a:tc><a:txBody><a:bodyPr /><a:lstStyle /><a:p><a:pPr lvl="0" indent="0" marL="0"><a:buNone /></a:pPr><a:r><a:rPr /><a:t>compfix</a:t></a:r></a:p></a:txBody></a:tc><a:tc><a:txBody><a:bodyPr /><a:lstStyle /><a:p><a:pPr lvl="0" indent="0" marL="0" algn="r"><a:buNone /></a:pPr><a:r><a:rPr /><a:t>177.5</a:t></a:r></a:p></a:txBody></a:tc><a:tc><a:txBody><a:bodyPr /><a:lstStyle /><a:p><a:pPr lvl="0" indent="0" marL="0" algn="r"><a:buNone /></a:pPr><a:r><a:rPr /><a:t>0.90</a:t></a:r></a:p></a:txBody></a:tc><a:tc><a:txBody><a:bodyPr /><a:lstStyle /><a:p><a:pPr lvl="0" indent="0" marL="0" algn="r"><a:buNone /></a:pPr><a:r><a:rPr /><a:t>41.7</a:t></a:r></a:p></a:txBody></a:tc><a:tc><a:txBody><a:bodyPr /><a:lstStyle /><a:p><a:pPr lvl="0" indent="0" marL="0" algn="r"><a:buNone /></a:pPr><a:r><a:rPr /><a:t>37.2</a:t></a:r></a:p></a:txBody></a:tc><a:tc><a:txBody><a:bodyPr /><a:lstStyle /><a:p><a:pPr lvl="0" indent="0" marL="0" algn="r"><a:buNone /></a:pPr><a:r><a:rPr /><a:t>45.9</a:t></a:r></a:p></a:txBody></a:tc></a:tr><a:tr h="0"><a:tc><a:txBody><a:bodyPr /><a:lstStyle /><a:p><a:pPr lvl="0" indent="0" marL="0"><a:buNone /></a:pPr><a:r><a:rPr /><a:t>Model 25.1c</a:t></a:r></a:p></a:txBody></a:tc><a:tc><a:txBody><a:bodyPr /><a:lstStyle /><a:p><a:pPr lvl="0" indent="0" marL="0"><a:buNone /></a:pPr><a:r><a:rPr /><a:t>+ plus group</a:t></a:r></a:p></a:txBody></a:tc><a:tc><a:txBody><a:bodyPr /><a:lstStyle /><a:p><a:pPr lvl="0" indent="0" marL="0" algn="r"><a:buNone /></a:pPr><a:r><a:rPr /><a:t>179.5</a:t></a:r></a:p></a:txBody></a:tc><a:tc><a:txBody><a:bodyPr /><a:lstStyle /><a:p><a:pPr lvl="0" indent="0" marL="0" algn="r"><a:buNone /></a:pPr><a:r><a:rPr /><a:t>0.89</a:t></a:r></a:p></a:txBody></a:tc><a:tc><a:txBody><a:bodyPr /><a:lstStyle /><a:p><a:pPr lvl="0" indent="0" marL="0" algn="r"><a:buNone /></a:pPr><a:r><a:rPr /><a:t>40.1</a:t></a:r></a:p></a:txBody></a:tc><a:tc><a:txBody><a:bodyPr /><a:lstStyle /><a:p><a:pPr lvl="0" indent="0" marL="0" algn="r"><a:buNone /></a:pPr><a:r><a:rPr /><a:t>35.2</a:t></a:r></a:p></a:txBody></a:tc><a:tc><a:txBody><a:bodyPr /><a:lstStyle /><a:p><a:pPr lvl="0" indent="0" marL="0" algn="r"><a:buNone /></a:pPr><a:r><a:rPr /><a:t>45.0</a:t></a:r></a:p></a:txBody></a:tc></a:tr><a:tr h="0"><a:tc><a:txBody><a:bodyPr /><a:lstStyle /><a:p><a:pPr lvl="0" indent="0" marL="0"><a:buNone /></a:pPr><a:r><a:rPr /><a:t>Model 25.1d</a:t></a:r></a:p></a:txBody></a:tc><a:tc><a:txBody><a:bodyPr /><a:lstStyle /><a:p><a:pPr lvl="0" indent="0" marL="0"><a:buNone /></a:pPr><a:r><a:rPr /><a:t>compfix + imm_surv</a:t></a:r></a:p></a:txBody></a:tc><a:tc><a:txBody><a:bodyPr /><a:lstStyle /><a:p><a:pPr lvl="0" indent="0" marL="0" algn="r"><a:buNone /></a:pPr><a:r><a:rPr /><a:t>94.3</a:t></a:r></a:p></a:txBody></a:tc><a:tc><a:txBody><a:bodyPr /><a:lstStyle /><a:p><a:pPr lvl="0" indent="0" marL="0" algn="r"><a:buNone /></a:pPr><a:r><a:rPr /><a:t>0.95</a:t></a:r></a:p></a:txBody></a:tc><a:tc><a:txBody><a:bodyPr /><a:lstStyle /><a:p><a:pPr lvl="0" indent="0" marL="0" algn="r"><a:buNone /></a:pPr><a:r><a:rPr /><a:t>157.5</a:t></a:r></a:p></a:txBody></a:tc><a:tc><a:txBody><a:bodyPr /><a:lstStyle /><a:p><a:pPr lvl="0" indent="0" marL="0" algn="r"><a:buNone /></a:pPr><a:r><a:rPr /><a:t>149.3</a:t></a:r></a:p></a:txBody></a:tc><a:tc><a:txBody><a:bodyPr /><a:lstStyle /><a:p><a:pPr lvl="0" indent="0" marL="0" algn="r"><a:buNone /></a:pPr><a:r><a:rPr /><a:t>36.4</a:t></a:r></a:p></a:txBody></a:tc></a:tr><a:tr h="0"><a:tc><a:txBody><a:bodyPr /><a:lstStyle /><a:p><a:pPr lvl="0" indent="0" marL="0"><a:buNone /></a:pPr><a:r><a:rPr /><a:t>Model 25.1e</a:t></a:r></a:p></a:txBody></a:tc><a:tc><a:txBody><a:bodyPr /><a:lstStyle /><a:p><a:pPr lvl="0" indent="0" marL="0"><a:buNone /></a:pPr><a:r><a:rPr /><a:t>plus + imm_surv</a:t></a:r></a:p></a:txBody></a:tc><a:tc><a:txBody><a:bodyPr /><a:lstStyle /><a:p><a:pPr lvl="0" indent="0" marL="0" algn="r"><a:buNone /></a:pPr><a:r><a:rPr /><a:t>96.0</a:t></a:r></a:p></a:txBody></a:tc><a:tc><a:txBody><a:bodyPr /><a:lstStyle /><a:p><a:pPr lvl="0" indent="0" marL="0" algn="r"><a:buNone /></a:pPr><a:r><a:rPr /><a:t>0.98</a:t></a:r></a:p></a:txBody></a:tc><a:tc><a:txBody><a:bodyPr /><a:lstStyle /><a:p><a:pPr lvl="0" indent="0" marL="0" algn="r"><a:buNone /></a:pPr><a:r><a:rPr /><a:t>152.3</a:t></a:r></a:p></a:txBody></a:tc><a:tc><a:txBody><a:bodyPr /><a:lstStyle /><a:p><a:pPr lvl="0" indent="0" marL="0" algn="r"><a:buNone /></a:pPr><a:r><a:rPr /><a:t>148.7</a:t></a:r></a:p></a:txBody></a:tc><a:tc><a:txBody><a:bodyPr /><a:lstStyle /><a:p><a:pPr lvl="0" indent="0" marL="0" algn="r"><a:buNone /></a:pPr><a:r><a:rPr /><a:t>34.8</a:t></a:r></a:p></a:txBody></a:tc></a:tr><a:tr h="0"><a:tc><a:txBody><a:bodyPr /><a:lstStyle /><a:p><a:pPr lvl="0" indent="0" marL="0"><a:buNone /></a:pPr><a:r><a:rPr /><a:t>Model 25.2a</a:t></a:r></a:p></a:txBody></a:tc><a:tc><a:txBody><a:bodyPr /><a:lstStyle /><a:p><a:pPr lvl="0" indent="0" marL="0"><a:buNone /></a:pPr><a:r><a:rPr /><a:t>new_mat</a:t></a:r></a:p></a:txBody></a:tc><a:tc><a:txBody><a:bodyPr /><a:lstStyle /><a:p><a:pPr lvl="0" indent="0" marL="0" algn="r"><a:buNone /></a:pPr><a:r><a:rPr /><a:t>171.9</a:t></a:r></a:p></a:txBody></a:tc><a:tc><a:txBody><a:bodyPr /><a:lstStyle /><a:p><a:pPr lvl="0" indent="0" marL="0" algn="r"><a:buNone /></a:pPr><a:r><a:rPr /><a:t>0.97</a:t></a:r></a:p></a:txBody></a:tc><a:tc><a:txBody><a:bodyPr /><a:lstStyle /><a:p><a:pPr lvl="0" indent="0" marL="0" algn="r"><a:buNone /></a:pPr><a:r><a:rPr /><a:t>38.2</a:t></a:r></a:p></a:txBody></a:tc><a:tc><a:txBody><a:bodyPr /><a:lstStyle /><a:p><a:pPr lvl="0" indent="0" marL="0" algn="r"><a:buNone /></a:pPr><a:r><a:rPr /><a:t>36.8</a:t></a:r></a:p></a:txBody></a:tc><a:tc><a:txBody><a:bodyPr /><a:lstStyle /><a:p><a:pPr lvl="0" indent="0" marL="0" algn="r"><a:buNone /></a:pPr><a:r><a:rPr /><a:t>51.4</a:t></a:r></a:p></a:txBody></a:tc></a:tr><a:tr h="0"><a:tc><a:txBody><a:bodyPr /><a:lstStyle /><a:p><a:pPr lvl="0" indent="0" marL="0"><a:buNone /></a:pPr><a:r><a:rPr /><a:t>Model 25.2b</a:t></a:r></a:p></a:txBody></a:tc><a:tc><a:txBody><a:bodyPr /><a:lstStyle /><a:p><a:pPr lvl="0" indent="0" marL="0"><a:buNone /></a:pPr><a:r><a:rPr /><a:t>compfix + new_mat</a:t></a:r></a:p></a:txBody></a:tc><a:tc><a:txBody><a:bodyPr /><a:lstStyle /><a:p><a:pPr lvl="0" indent="0" marL="0" algn="r"><a:buNone /></a:pPr><a:r><a:rPr /><a:t>173.5</a:t></a:r></a:p></a:txBody></a:tc><a:tc><a:txBody><a:bodyPr /><a:lstStyle /><a:p><a:pPr lvl="0" indent="0" marL="0" algn="r"><a:buNone /></a:pPr><a:r><a:rPr /><a:t>0.96</a:t></a:r></a:p></a:txBody></a:tc><a:tc><a:txBody><a:bodyPr /><a:lstStyle /><a:p><a:pPr lvl="0" indent="0" marL="0" algn="r"><a:buNone /></a:pPr><a:r><a:rPr /><a:t>39.5</a:t></a:r></a:p></a:txBody></a:tc><a:tc><a:txBody><a:bodyPr /><a:lstStyle /><a:p><a:pPr lvl="0" indent="0" marL="0" algn="r"><a:buNone /></a:pPr><a:r><a:rPr /><a:t>37.9</a:t></a:r></a:p></a:txBody></a:tc><a:tc><a:txBody><a:bodyPr /><a:lstStyle /><a:p><a:pPr lvl="0" indent="0" marL="0" algn="r"><a:buNone /></a:pPr><a:r><a:rPr /><a:t>51.5</a:t></a:r></a:p></a:txBody></a:tc></a:tr><a:tr h="0"><a:tc><a:txBody><a:bodyPr /><a:lstStyle /><a:p><a:pPr lvl="0" indent="0" marL="0"><a:buNone /></a:pPr><a:r><a:rPr /><a:t>Model 25.2c</a:t></a:r></a:p></a:txBody></a:tc><a:tc><a:txBody><a:bodyPr /><a:lstStyle /><a:p><a:pPr lvl="0" indent="0" marL="0"><a:buNone /></a:pPr><a:r><a:rPr /><a:t>plus + new_mat</a:t></a:r></a:p></a:txBody></a:tc><a:tc><a:txBody><a:bodyPr /><a:lstStyle /><a:p><a:pPr lvl="0" indent="0" marL="0" algn="r"><a:buNone /></a:pPr><a:r><a:rPr /><a:t>177.6</a:t></a:r></a:p></a:txBody></a:tc><a:tc><a:txBody><a:bodyPr /><a:lstStyle /><a:p><a:pPr lvl="0" indent="0" marL="0" algn="r"><a:buNone /></a:pPr><a:r><a:rPr /><a:t>0.94</a:t></a:r></a:p></a:txBody></a:tc><a:tc><a:txBody><a:bodyPr /><a:lstStyle /><a:p><a:pPr lvl="0" indent="0" marL="0" algn="r"><a:buNone /></a:pPr><a:r><a:rPr /><a:t>38.4</a:t></a:r></a:p></a:txBody></a:tc><a:tc><a:txBody><a:bodyPr /><a:lstStyle /><a:p><a:pPr lvl="0" indent="0" marL="0" algn="r"><a:buNone /></a:pPr><a:r><a:rPr /><a:t>35.9</a:t></a:r></a:p></a:txBody></a:tc><a:tc><a:txBody><a:bodyPr /><a:lstStyle /><a:p><a:pPr lvl="0" indent="0" marL="0" algn="r"><a:buNone /></a:pPr><a:r><a:rPr /><a:t>50.3</a:t></a:r></a:p></a:txBody></a:tc></a:tr><a:tr h="0"><a:tc><a:txBody><a:bodyPr /><a:lstStyle /><a:p><a:pPr lvl="0" indent="0" marL="0"><a:buNone /></a:pPr><a:r><a:rPr /><a:t>Model 25.2d</a:t></a:r></a:p></a:txBody></a:tc><a:tc><a:txBody><a:bodyPr /><a:lstStyle /><a:p><a:pPr lvl="0" indent="0" marL="0"><a:buNone /></a:pPr><a:r><a:rPr /><a:t>plus + new_mat + imm</a:t></a:r></a:p></a:txBody></a:tc><a:tc><a:txBody><a:bodyPr /><a:lstStyle /><a:p><a:pPr lvl="0" indent="0" marL="0" algn="r"><a:buNone /></a:pPr><a:r><a:rPr /><a:t>163.4</a:t></a:r></a:p></a:txBody></a:tc><a:tc><a:txBody><a:bodyPr /><a:lstStyle /><a:p><a:pPr lvl="0" indent="0" marL="0" algn="r"><a:buNone /></a:pPr><a:r><a:rPr /><a:t>0.90</a:t></a:r></a:p></a:txBody></a:tc><a:tc><a:txBody><a:bodyPr /><a:lstStyle /><a:p><a:pPr lvl="0" indent="0" marL="0" algn="r"><a:buNone /></a:pPr><a:r><a:rPr /><a:t>70.9</a:t></a:r></a:p></a:txBody></a:tc><a:tc><a:txBody><a:bodyPr /><a:lstStyle /><a:p><a:pPr lvl="0" indent="0" marL="0" algn="r"><a:buNone /></a:pPr><a:r><a:rPr /><a:t>63.1</a:t></a:r></a:p></a:txBody></a:tc><a:tc><a:txBody><a:bodyPr /><a:lstStyle /><a:p><a:pPr lvl="0" indent="0" marL="0" algn="r"><a:buNone /></a:pPr><a:r><a:rPr /><a:t>59.5</a:t></a:r></a:p></a:txBody></a:tc></a:tr><a:tr h="0"><a:tc><a:txBody><a:bodyPr /><a:lstStyle /><a:p><a:pPr lvl="0" indent="0" marL="0"><a:buNone /></a:pPr><a:r><a:rPr /><a:t>Model 25.3a</a:t></a:r></a:p></a:txBody></a:tc><a:tc><a:txBody><a:bodyPr /><a:lstStyle /><a:p><a:pPr lvl="0" indent="0" marL="0"><a:buNone /></a:pPr><a:r><a:rPr /><a:t>plus + hyb_fishery</a:t></a:r></a:p></a:txBody></a:tc><a:tc><a:txBody><a:bodyPr /><a:lstStyle /><a:p><a:pPr lvl="0" indent="0" marL="0" algn="r"><a:buNone /></a:pPr><a:r><a:rPr /><a:t>169.3</a:t></a:r></a:p></a:txBody></a:tc><a:tc><a:txBody><a:bodyPr /><a:lstStyle /><a:p><a:pPr lvl="0" indent="0" marL="0" algn="r"><a:buNone /></a:pPr><a:r><a:rPr /><a:t>0.91</a:t></a:r></a:p></a:txBody></a:tc><a:tc><a:txBody><a:bodyPr /><a:lstStyle /><a:p><a:pPr lvl="0" indent="0" marL="0" algn="r"><a:buNone /></a:pPr><a:r><a:rPr /><a:t>37.0</a:t></a:r></a:p></a:txBody></a:tc><a:tc><a:txBody><a:bodyPr /><a:lstStyle /><a:p><a:pPr lvl="0" indent="0" marL="0" algn="r"><a:buNone /></a:pPr><a:r><a:rPr /><a:t>33.4</a:t></a:r></a:p></a:txBody></a:tc><a:tc><a:txBody><a:bodyPr /><a:lstStyle /><a:p><a:pPr lvl="0" indent="0" marL="0" algn="r"><a:buNone /></a:pPr><a:r><a:rPr /><a:t>44.2</a:t></a:r></a:p></a:txBody></a:tc></a:tr><a:tr h="0"><a:tc><a:txBody><a:bodyPr /><a:lstStyle /><a:p><a:pPr lvl="0" indent="0" marL="0"><a:buNone /></a:pPr><a:r><a:rPr /><a:t>Model 25.3b</a:t></a:r></a:p></a:txBody></a:tc><a:tc><a:txBody><a:bodyPr /><a:lstStyle /><a:p><a:pPr lvl="0" indent="0" marL="0"><a:buNone /></a:pPr><a:r><a:rPr /><a:t>plus + hyb_surv</a:t></a:r></a:p></a:txBody></a:tc><a:tc><a:txBody><a:bodyPr /><a:lstStyle /><a:p><a:pPr lvl="0" indent="0" marL="0" algn="r"><a:buNone /></a:pPr><a:r><a:rPr /><a:t>176.3</a:t></a:r></a:p></a:txBody></a:tc><a:tc><a:txBody><a:bodyPr /><a:lstStyle /><a:p><a:pPr lvl="0" indent="0" marL="0" algn="r"><a:buNone /></a:pPr><a:r><a:rPr /><a:t>0.93</a:t></a:r></a:p></a:txBody></a:tc><a:tc><a:txBody><a:bodyPr /><a:lstStyle /><a:p><a:pPr lvl="0" indent="0" marL="0" algn="r"><a:buNone /></a:pPr><a:r><a:rPr /><a:t>34.5</a:t></a:r></a:p></a:txBody></a:tc><a:tc><a:txBody><a:bodyPr /><a:lstStyle /><a:p><a:pPr lvl="0" indent="0" marL="0" algn="r"><a:buNone /></a:pPr><a:r><a:rPr /><a:t>31.6</a:t></a:r></a:p></a:txBody></a:tc><a:tc><a:txBody><a:bodyPr /><a:lstStyle /><a:p><a:pPr lvl="0" indent="0" marL="0" algn="r"><a:buNone /></a:pPr><a:r><a:rPr /><a:t>47.8</a:t></a:r></a:p></a:txBody></a:tc></a:tr><a:tr h="0"><a:tc><a:txBody><a:bodyPr /><a:lstStyle /><a:p><a:pPr lvl="0" indent="0" marL="0"><a:buNone /></a:pPr><a:r><a:rPr /><a:t>Model 25.3c</a:t></a:r></a:p></a:txBody></a:tc><a:tc><a:txBody><a:bodyPr /><a:lstStyle /><a:p><a:pPr lvl="0" indent="0" marL="0"><a:buNone /></a:pPr><a:r><a:rPr /><a:t>plus + hyb_both</a:t></a:r></a:p></a:txBody></a:tc><a:tc><a:txBody><a:bodyPr /><a:lstStyle /><a:p><a:pPr lvl="0" indent="0" marL="0" algn="r"><a:buNone /></a:pPr><a:r><a:rPr /><a:t>168.2</a:t></a:r></a:p></a:txBody></a:tc><a:tc><a:txBody><a:bodyPr /><a:lstStyle /><a:p><a:pPr lvl="0" indent="0" marL="0" algn="r"><a:buNone /></a:pPr><a:r><a:rPr /><a:t>0.95</a:t></a:r></a:p></a:txBody></a:tc><a:tc><a:txBody><a:bodyPr /><a:lstStyle /><a:p><a:pPr lvl="0" indent="0" marL="0" algn="r"><a:buNone /></a:pPr><a:r><a:rPr /><a:t>35.3</a:t></a:r></a:p></a:txBody></a:tc><a:tc><a:txBody><a:bodyPr /><a:lstStyle /><a:p><a:pPr lvl="0" indent="0" marL="0" algn="r"><a:buNone /></a:pPr><a:r><a:rPr /><a:t>33.5</a:t></a:r></a:p></a:txBody></a:tc><a:tc><a:txBody><a:bodyPr /><a:lstStyle /><a:p><a:pPr lvl="0" indent="0" marL="0" algn="r"><a:buNone /></a:pPr><a:r><a:rPr /><a:t>42.2</a:t></a:r></a:p></a:txBody></a:tc></a:tr><a:tr h="0"><a:tc><a:txBody><a:bodyPr /><a:lstStyle /><a:p><a:pPr lvl="0" indent="0" marL="0"><a:buNone /></a:pPr><a:r><a:rPr /><a:t>Model 25.3d</a:t></a:r></a:p></a:txBody></a:tc><a:tc><a:txBody><a:bodyPr /><a:lstStyle /><a:p><a:pPr lvl="0" indent="0" marL="0"><a:buNone /></a:pPr><a:r><a:rPr /><a:t>hyb_both + new_mat</a:t></a:r></a:p></a:txBody></a:tc><a:tc><a:txBody><a:bodyPr /><a:lstStyle /><a:p><a:pPr lvl="0" indent="0" marL="0" algn="r"><a:buNone /></a:pPr><a:r><a:rPr /><a:t>169.8</a:t></a:r></a:p></a:txBody></a:tc><a:tc><a:txBody><a:bodyPr /><a:lstStyle /><a:p><a:pPr lvl="0" indent="0" marL="0" algn="r"><a:buNone /></a:pPr><a:r><a:rPr /><a:t>1.01</a:t></a:r></a:p></a:txBody></a:tc><a:tc><a:txBody><a:bodyPr /><a:lstStyle /><a:p><a:pPr lvl="0" indent="0" marL="0" algn="r"><a:buNone /></a:pPr><a:r><a:rPr /><a:t>44.1</a:t></a:r></a:p></a:txBody></a:tc><a:tc><a:txBody><a:bodyPr /><a:lstStyle /><a:p><a:pPr lvl="0" indent="0" marL="0" algn="r"><a:buNone /></a:pPr><a:r><a:rPr /><a:t>44.1</a:t></a:r></a:p></a:txBody></a:tc><a:tc><a:txBody><a:bodyPr /><a:lstStyle /><a:p><a:pPr lvl="0" indent="0" marL="0" algn="r"><a:buNone /></a:pPr><a:r><a:rPr /><a:t>49.6</a:t></a:r></a:p></a:txBody></a:tc></a:tr></a:tbl></a:graphicData></a:graphic></p:graphicFrame></p:spTree></p:cSld></p:sld>
+<file path=ppt/slides/slide58.xml><?xml version="1.0" encoding="UTF-8"?><p:sld xmlns:a="http://schemas.openxmlformats.org/drawingml/2006/main" xmlns:r="http://schemas.openxmlformats.org/officeDocument/2006/relationships" xmlns:p="http://schemas.openxmlformats.org/presentationml/2006/main"><p:cSld><p:spTree><p:nvGrpSpPr><p:cNvPr id="1" name="" /><p:cNvGrpSpPr /><p:nvPr /></p:nvGrpSpPr><p:grpSpPr><a:xfrm><a:off x="0" y="0" /><a:ext cx="0" cy="0" /><a:chOff x="0" y="0" /><a:chExt cx="0" cy="0" /></a:xfrm></p:grpSpPr><p:sp><p:nvSpPr><p:cNvPr id="2" name="Title 1" /><p:cNvSpPr><a:spLocks noGrp="1" /></p:cNvSpPr><p:nvPr><p:ph type="title" /></p:nvPr></p:nvSpPr><p:spPr /><p:txBody><a:bodyPr /><a:lstStyle /><a:p><a:pPr lvl="0" indent="0" marL="0"><a:buNone /></a:pPr><a:r><a:rPr /><a:t>Management quantities</a:t></a:r></a:p></p:txBody></p:sp><p:graphicFrame><p:nvGraphicFramePr><p:cNvPr id="6" name="Content Placeholder 5" /><p:cNvGraphicFramePr><a:graphicFrameLocks noGrp="1" /></p:cNvGraphicFramePr><p:nvPr><p:ph idx="1" /></p:nvPr></p:nvGraphicFramePr><p:xfrm><a:off x="457200" y="1193800" /><a:ext cx="8229600" cy="3390900" /></p:xfrm><a:graphic><a:graphicData uri="http://schemas.openxmlformats.org/drawingml/2006/table"><a:tbl><a:tblPr firstRow="1" bandRow="1"><a:tableStyleId>{5C22544A-7EE6-4342-B048-85BDC9FD1C3A}</a:tableStyleId></a:tblPr><a:tblGrid><a:gridCol w="977900" /><a:gridCol w="1739900" /><a:gridCol w="1206500" /><a:gridCol w="1282700" /><a:gridCol w="1130300" /><a:gridCol w="1130300" /><a:gridCol w="749300" /></a:tblGrid><a:tr h="0"><a:tc><a:txBody><a:bodyPr /><a:lstStyle /><a:p><a:pPr lvl="0" indent="0" marL="0"><a:buNone /></a:pPr><a:r><a:rPr /><a:t>Model</a:t></a:r></a:p></a:txBody><a:tcPr /></a:tc><a:tc><a:txBody><a:bodyPr /><a:lstStyle /><a:p><a:pPr lvl="0" indent="0" marL="0"><a:buNone /></a:pPr><a:r><a:rPr /><a:t>Description</a:t></a:r></a:p></a:txBody><a:tcPr /></a:tc><a:tc><a:txBody><a:bodyPr /><a:lstStyle /><a:p><a:pPr lvl="0" indent="0" marL="0" algn="r"><a:buNone /></a:pPr><a14:m><m:oMath xmlns:m="http://schemas.openxmlformats.org/officeDocument/2006/math"><m:sSub><m:e><m:r><m:t>B</m:t></m:r></m:e><m:sub><m:r><m:t>M</m:t></m:r><m:r><m:t>S</m:t></m:r><m:r><m:t>Y</m:t></m:r></m:sub></m:sSub></m:oMath></a14:m><a:r><a:rPr /><a:t> (kt)</a:t></a:r></a:p></a:txBody><a:tcPr /></a:tc><a:tc><a:txBody><a:bodyPr /><a:lstStyle /><a:p><a:pPr lvl="0" indent="0" marL="0" algn="r"><a:buNone /></a:pPr><a:r><a:rPr /><a:t>Bcurr/</a:t></a:r><a14:m><m:oMath xmlns:m="http://schemas.openxmlformats.org/officeDocument/2006/math"><m:sSub><m:e><m:r><m:t>B</m:t></m:r></m:e><m:sub><m:r><m:t>M</m:t></m:r><m:r><m:t>S</m:t></m:r><m:r><m:t>Y</m:t></m:r></m:sub></m:sSub></m:oMath></a14:m></a:p></a:txBody><a:tcPr /></a:tc><a:tc><a:txBody><a:bodyPr /><a:lstStyle /><a:p><a:pPr lvl="0" indent="0" marL="0" algn="r"><a:buNone /></a:pPr><a14:m><m:oMath xmlns:m="http://schemas.openxmlformats.org/officeDocument/2006/math"><m:sSub><m:e><m:r><m:t>F</m:t></m:r></m:e><m:sub><m:r><m:t>M</m:t></m:r><m:r><m:t>S</m:t></m:r><m:r><m:t>Y</m:t></m:r></m:sub></m:sSub></m:oMath></a14:m><a:r><a:rPr /><a:t> (%)</a:t></a:r></a:p></a:txBody><a:tcPr /></a:tc><a:tc><a:txBody><a:bodyPr /><a:lstStyle /><a:p><a:pPr lvl="0" indent="0" marL="0" algn="r"><a:buNone /></a:pPr><a14:m><m:oMath xmlns:m="http://schemas.openxmlformats.org/officeDocument/2006/math"><m:sSub><m:e><m:r><m:t>F</m:t></m:r></m:e><m:sub><m:r><m:t>O</m:t></m:r><m:r><m:t>F</m:t></m:r><m:r><m:t>L</m:t></m:r></m:sub></m:sSub></m:oMath></a14:m><a:r><a:rPr /><a:t> (%)</a:t></a:r></a:p></a:txBody><a:tcPr /></a:tc><a:tc><a:txBody><a:bodyPr /><a:lstStyle /><a:p><a:pPr lvl="0" indent="0" marL="0" algn="r"><a:buNone /></a:pPr><a:r><a:rPr /><a:t>OFL (kt)</a:t></a:r></a:p></a:txBody><a:tcPr /></a:tc></a:tr><a:tr h="0"><a:tc><a:txBody><a:bodyPr /><a:lstStyle /><a:p><a:pPr lvl="0" indent="0" marL="0"><a:buNone /></a:pPr><a:r><a:rPr /><a:t>Model 25</a:t></a:r></a:p></a:txBody></a:tc><a:tc><a:txBody><a:bodyPr /><a:lstStyle /><a:p><a:pPr lvl="0" indent="0" marL="0"><a:buNone /></a:pPr><a:r><a:rPr /><a:t>rolled fwd</a:t></a:r></a:p></a:txBody></a:tc><a:tc><a:txBody><a:bodyPr /><a:lstStyle /><a:p><a:pPr lvl="0" indent="0" marL="0" algn="r"><a:buNone /></a:pPr><a:r><a:rPr /><a:t>180.1</a:t></a:r></a:p></a:txBody></a:tc><a:tc><a:txBody><a:bodyPr /><a:lstStyle /><a:p><a:pPr lvl="0" indent="0" marL="0" algn="r"><a:buNone /></a:pPr><a:r><a:rPr /><a:t>0.88</a:t></a:r></a:p></a:txBody></a:tc><a:tc><a:txBody><a:bodyPr /><a:lstStyle /><a:p><a:pPr lvl="0" indent="0" marL="0" algn="r"><a:buNone /></a:pPr><a:r><a:rPr /><a:t>39.5</a:t></a:r></a:p></a:txBody></a:tc><a:tc><a:txBody><a:bodyPr /><a:lstStyle /><a:p><a:pPr lvl="0" indent="0" marL="0" algn="r"><a:buNone /></a:pPr><a:r><a:rPr /><a:t>34.4</a:t></a:r></a:p></a:txBody></a:tc><a:tc><a:txBody><a:bodyPr /><a:lstStyle /><a:p><a:pPr lvl="0" indent="0" marL="0" algn="r"><a:buNone /></a:pPr><a:r><a:rPr /><a:t>44.3</a:t></a:r></a:p></a:txBody></a:tc></a:tr><a:tr h="0"><a:tc><a:txBody><a:bodyPr /><a:lstStyle /><a:p><a:pPr lvl="0" indent="0" marL="0"><a:buNone /></a:pPr><a:r><a:rPr /><a:t>Model 25.1a</a:t></a:r></a:p></a:txBody></a:tc><a:tc><a:txBody><a:bodyPr /><a:lstStyle /><a:p><a:pPr lvl="0" indent="0" marL="0"><a:buNone /></a:pPr><a:r><a:rPr /><a:t>update</a:t></a:r></a:p></a:txBody></a:tc><a:tc><a:txBody><a:bodyPr /><a:lstStyle /><a:p><a:pPr lvl="0" indent="0" marL="0" algn="r"><a:buNone /></a:pPr><a:r><a:rPr /><a:t>184.8</a:t></a:r></a:p></a:txBody></a:tc><a:tc><a:txBody><a:bodyPr /><a:lstStyle /><a:p><a:pPr lvl="0" indent="0" marL="0" algn="r"><a:buNone /></a:pPr><a:r><a:rPr /><a:t>0.86</a:t></a:r></a:p></a:txBody></a:tc><a:tc><a:txBody><a:bodyPr /><a:lstStyle /><a:p><a:pPr lvl="0" indent="0" marL="0" algn="r"><a:buNone /></a:pPr><a:r><a:rPr /><a:t>35.9</a:t></a:r></a:p></a:txBody></a:tc><a:tc><a:txBody><a:bodyPr /><a:lstStyle /><a:p><a:pPr lvl="0" indent="0" marL="0" algn="r"><a:buNone /></a:pPr><a:r><a:rPr /><a:t>30.5</a:t></a:r></a:p></a:txBody></a:tc><a:tc><a:txBody><a:bodyPr /><a:lstStyle /><a:p><a:pPr lvl="0" indent="0" marL="0" algn="r"><a:buNone /></a:pPr><a:r><a:rPr /><a:t>44.0</a:t></a:r></a:p></a:txBody></a:tc></a:tr><a:tr h="0"><a:tc><a:txBody><a:bodyPr /><a:lstStyle /><a:p><a:pPr lvl="0" indent="0" marL="0"><a:buNone /></a:pPr><a:r><a:rPr /><a:t>Model 25.1b</a:t></a:r></a:p></a:txBody></a:tc><a:tc><a:txBody><a:bodyPr /><a:lstStyle /><a:p><a:pPr lvl="0" indent="0" marL="0"><a:buNone /></a:pPr><a:r><a:rPr /><a:t>compfix</a:t></a:r></a:p></a:txBody></a:tc><a:tc><a:txBody><a:bodyPr /><a:lstStyle /><a:p><a:pPr lvl="0" indent="0" marL="0" algn="r"><a:buNone /></a:pPr><a:r><a:rPr /><a:t>177.5</a:t></a:r></a:p></a:txBody></a:tc><a:tc><a:txBody><a:bodyPr /><a:lstStyle /><a:p><a:pPr lvl="0" indent="0" marL="0" algn="r"><a:buNone /></a:pPr><a:r><a:rPr /><a:t>0.90</a:t></a:r></a:p></a:txBody></a:tc><a:tc><a:txBody><a:bodyPr /><a:lstStyle /><a:p><a:pPr lvl="0" indent="0" marL="0" algn="r"><a:buNone /></a:pPr><a:r><a:rPr /><a:t>41.7</a:t></a:r></a:p></a:txBody></a:tc><a:tc><a:txBody><a:bodyPr /><a:lstStyle /><a:p><a:pPr lvl="0" indent="0" marL="0" algn="r"><a:buNone /></a:pPr><a:r><a:rPr /><a:t>37.2</a:t></a:r></a:p></a:txBody></a:tc><a:tc><a:txBody><a:bodyPr /><a:lstStyle /><a:p><a:pPr lvl="0" indent="0" marL="0" algn="r"><a:buNone /></a:pPr><a:r><a:rPr /><a:t>45.9</a:t></a:r></a:p></a:txBody></a:tc></a:tr><a:tr h="0"><a:tc><a:txBody><a:bodyPr /><a:lstStyle /><a:p><a:pPr lvl="0" indent="0" marL="0"><a:buNone /></a:pPr><a:r><a:rPr /><a:t>Model 25.1c</a:t></a:r></a:p></a:txBody></a:tc><a:tc><a:txBody><a:bodyPr /><a:lstStyle /><a:p><a:pPr lvl="0" indent="0" marL="0"><a:buNone /></a:pPr><a:r><a:rPr /><a:t>+ plus group</a:t></a:r></a:p></a:txBody></a:tc><a:tc><a:txBody><a:bodyPr /><a:lstStyle /><a:p><a:pPr lvl="0" indent="0" marL="0" algn="r"><a:buNone /></a:pPr><a:r><a:rPr /><a:t>179.5</a:t></a:r></a:p></a:txBody></a:tc><a:tc><a:txBody><a:bodyPr /><a:lstStyle /><a:p><a:pPr lvl="0" indent="0" marL="0" algn="r"><a:buNone /></a:pPr><a:r><a:rPr /><a:t>0.89</a:t></a:r></a:p></a:txBody></a:tc><a:tc><a:txBody><a:bodyPr /><a:lstStyle /><a:p><a:pPr lvl="0" indent="0" marL="0" algn="r"><a:buNone /></a:pPr><a:r><a:rPr /><a:t>40.1</a:t></a:r></a:p></a:txBody></a:tc><a:tc><a:txBody><a:bodyPr /><a:lstStyle /><a:p><a:pPr lvl="0" indent="0" marL="0" algn="r"><a:buNone /></a:pPr><a:r><a:rPr /><a:t>35.2</a:t></a:r></a:p></a:txBody></a:tc><a:tc><a:txBody><a:bodyPr /><a:lstStyle /><a:p><a:pPr lvl="0" indent="0" marL="0" algn="r"><a:buNone /></a:pPr><a:r><a:rPr /><a:t>45.0</a:t></a:r></a:p></a:txBody></a:tc></a:tr><a:tr h="0"><a:tc><a:txBody><a:bodyPr /><a:lstStyle /><a:p><a:pPr lvl="0" indent="0" marL="0"><a:buNone /></a:pPr><a:r><a:rPr /><a:t>Model 25.1d</a:t></a:r></a:p></a:txBody></a:tc><a:tc><a:txBody><a:bodyPr /><a:lstStyle /><a:p><a:pPr lvl="0" indent="0" marL="0"><a:buNone /></a:pPr><a:r><a:rPr /><a:t>compfix + imm_surv</a:t></a:r></a:p></a:txBody></a:tc><a:tc><a:txBody><a:bodyPr /><a:lstStyle /><a:p><a:pPr lvl="0" indent="0" marL="0" algn="r"><a:buNone /></a:pPr><a:r><a:rPr /><a:t>94.3</a:t></a:r></a:p></a:txBody></a:tc><a:tc><a:txBody><a:bodyPr /><a:lstStyle /><a:p><a:pPr lvl="0" indent="0" marL="0" algn="r"><a:buNone /></a:pPr><a:r><a:rPr /><a:t>0.95</a:t></a:r></a:p></a:txBody></a:tc><a:tc><a:txBody><a:bodyPr /><a:lstStyle /><a:p><a:pPr lvl="0" indent="0" marL="0" algn="r"><a:buNone /></a:pPr><a:r><a:rPr /><a:t>157.5</a:t></a:r></a:p></a:txBody></a:tc><a:tc><a:txBody><a:bodyPr /><a:lstStyle /><a:p><a:pPr lvl="0" indent="0" marL="0" algn="r"><a:buNone /></a:pPr><a:r><a:rPr /><a:t>149.3</a:t></a:r></a:p></a:txBody></a:tc><a:tc><a:txBody><a:bodyPr /><a:lstStyle /><a:p><a:pPr lvl="0" indent="0" marL="0" algn="r"><a:buNone /></a:pPr><a:r><a:rPr /><a:t>36.4</a:t></a:r></a:p></a:txBody></a:tc></a:tr><a:tr h="0"><a:tc><a:txBody><a:bodyPr /><a:lstStyle /><a:p><a:pPr lvl="0" indent="0" marL="0"><a:buNone /></a:pPr><a:r><a:rPr /><a:t>Model 25.1e</a:t></a:r></a:p></a:txBody></a:tc><a:tc><a:txBody><a:bodyPr /><a:lstStyle /><a:p><a:pPr lvl="0" indent="0" marL="0"><a:buNone /></a:pPr><a:r><a:rPr /><a:t>plus + imm_surv</a:t></a:r></a:p></a:txBody></a:tc><a:tc><a:txBody><a:bodyPr /><a:lstStyle /><a:p><a:pPr lvl="0" indent="0" marL="0" algn="r"><a:buNone /></a:pPr><a:r><a:rPr /><a:t>96.0</a:t></a:r></a:p></a:txBody></a:tc><a:tc><a:txBody><a:bodyPr /><a:lstStyle /><a:p><a:pPr lvl="0" indent="0" marL="0" algn="r"><a:buNone /></a:pPr><a:r><a:rPr /><a:t>0.98</a:t></a:r></a:p></a:txBody></a:tc><a:tc><a:txBody><a:bodyPr /><a:lstStyle /><a:p><a:pPr lvl="0" indent="0" marL="0" algn="r"><a:buNone /></a:pPr><a:r><a:rPr /><a:t>152.3</a:t></a:r></a:p></a:txBody></a:tc><a:tc><a:txBody><a:bodyPr /><a:lstStyle /><a:p><a:pPr lvl="0" indent="0" marL="0" algn="r"><a:buNone /></a:pPr><a:r><a:rPr /><a:t>148.7</a:t></a:r></a:p></a:txBody></a:tc><a:tc><a:txBody><a:bodyPr /><a:lstStyle /><a:p><a:pPr lvl="0" indent="0" marL="0" algn="r"><a:buNone /></a:pPr><a:r><a:rPr /><a:t>34.8</a:t></a:r></a:p></a:txBody></a:tc></a:tr><a:tr h="0"><a:tc><a:txBody><a:bodyPr /><a:lstStyle /><a:p><a:pPr lvl="0" indent="0" marL="0"><a:buNone /></a:pPr><a:r><a:rPr /><a:t>Model 25.2a</a:t></a:r></a:p></a:txBody></a:tc><a:tc><a:txBody><a:bodyPr /><a:lstStyle /><a:p><a:pPr lvl="0" indent="0" marL="0"><a:buNone /></a:pPr><a:r><a:rPr /><a:t>new_mat</a:t></a:r></a:p></a:txBody></a:tc><a:tc><a:txBody><a:bodyPr /><a:lstStyle /><a:p><a:pPr lvl="0" indent="0" marL="0" algn="r"><a:buNone /></a:pPr><a:r><a:rPr /><a:t>171.9</a:t></a:r></a:p></a:txBody></a:tc><a:tc><a:txBody><a:bodyPr /><a:lstStyle /><a:p><a:pPr lvl="0" indent="0" marL="0" algn="r"><a:buNone /></a:pPr><a:r><a:rPr /><a:t>0.97</a:t></a:r></a:p></a:txBody></a:tc><a:tc><a:txBody><a:bodyPr /><a:lstStyle /><a:p><a:pPr lvl="0" indent="0" marL="0" algn="r"><a:buNone /></a:pPr><a:r><a:rPr /><a:t>38.2</a:t></a:r></a:p></a:txBody></a:tc><a:tc><a:txBody><a:bodyPr /><a:lstStyle /><a:p><a:pPr lvl="0" indent="0" marL="0" algn="r"><a:buNone /></a:pPr><a:r><a:rPr /><a:t>36.8</a:t></a:r></a:p></a:txBody></a:tc><a:tc><a:txBody><a:bodyPr /><a:lstStyle /><a:p><a:pPr lvl="0" indent="0" marL="0" algn="r"><a:buNone /></a:pPr><a:r><a:rPr /><a:t>51.4</a:t></a:r></a:p></a:txBody></a:tc></a:tr><a:tr h="0"><a:tc><a:txBody><a:bodyPr /><a:lstStyle /><a:p><a:pPr lvl="0" indent="0" marL="0"><a:buNone /></a:pPr><a:r><a:rPr /><a:t>Model 25.2b</a:t></a:r></a:p></a:txBody></a:tc><a:tc><a:txBody><a:bodyPr /><a:lstStyle /><a:p><a:pPr lvl="0" indent="0" marL="0"><a:buNone /></a:pPr><a:r><a:rPr /><a:t>compfix + new_mat</a:t></a:r></a:p></a:txBody></a:tc><a:tc><a:txBody><a:bodyPr /><a:lstStyle /><a:p><a:pPr lvl="0" indent="0" marL="0" algn="r"><a:buNone /></a:pPr><a:r><a:rPr /><a:t>173.5</a:t></a:r></a:p></a:txBody></a:tc><a:tc><a:txBody><a:bodyPr /><a:lstStyle /><a:p><a:pPr lvl="0" indent="0" marL="0" algn="r"><a:buNone /></a:pPr><a:r><a:rPr /><a:t>0.96</a:t></a:r></a:p></a:txBody></a:tc><a:tc><a:txBody><a:bodyPr /><a:lstStyle /><a:p><a:pPr lvl="0" indent="0" marL="0" algn="r"><a:buNone /></a:pPr><a:r><a:rPr /><a:t>39.5</a:t></a:r></a:p></a:txBody></a:tc><a:tc><a:txBody><a:bodyPr /><a:lstStyle /><a:p><a:pPr lvl="0" indent="0" marL="0" algn="r"><a:buNone /></a:pPr><a:r><a:rPr /><a:t>37.9</a:t></a:r></a:p></a:txBody></a:tc><a:tc><a:txBody><a:bodyPr /><a:lstStyle /><a:p><a:pPr lvl="0" indent="0" marL="0" algn="r"><a:buNone /></a:pPr><a:r><a:rPr /><a:t>51.5</a:t></a:r></a:p></a:txBody></a:tc></a:tr><a:tr h="0"><a:tc><a:txBody><a:bodyPr /><a:lstStyle /><a:p><a:pPr lvl="0" indent="0" marL="0"><a:buNone /></a:pPr><a:r><a:rPr /><a:t>Model 25.2c</a:t></a:r></a:p></a:txBody></a:tc><a:tc><a:txBody><a:bodyPr /><a:lstStyle /><a:p><a:pPr lvl="0" indent="0" marL="0"><a:buNone /></a:pPr><a:r><a:rPr /><a:t>plus + new_mat</a:t></a:r></a:p></a:txBody></a:tc><a:tc><a:txBody><a:bodyPr /><a:lstStyle /><a:p><a:pPr lvl="0" indent="0" marL="0" algn="r"><a:buNone /></a:pPr><a:r><a:rPr /><a:t>177.6</a:t></a:r></a:p></a:txBody></a:tc><a:tc><a:txBody><a:bodyPr /><a:lstStyle /><a:p><a:pPr lvl="0" indent="0" marL="0" algn="r"><a:buNone /></a:pPr><a:r><a:rPr /><a:t>0.94</a:t></a:r></a:p></a:txBody></a:tc><a:tc><a:txBody><a:bodyPr /><a:lstStyle /><a:p><a:pPr lvl="0" indent="0" marL="0" algn="r"><a:buNone /></a:pPr><a:r><a:rPr /><a:t>38.4</a:t></a:r></a:p></a:txBody></a:tc><a:tc><a:txBody><a:bodyPr /><a:lstStyle /><a:p><a:pPr lvl="0" indent="0" marL="0" algn="r"><a:buNone /></a:pPr><a:r><a:rPr /><a:t>35.9</a:t></a:r></a:p></a:txBody></a:tc><a:tc><a:txBody><a:bodyPr /><a:lstStyle /><a:p><a:pPr lvl="0" indent="0" marL="0" algn="r"><a:buNone /></a:pPr><a:r><a:rPr /><a:t>50.3</a:t></a:r></a:p></a:txBody></a:tc></a:tr><a:tr h="0"><a:tc><a:txBody><a:bodyPr /><a:lstStyle /><a:p><a:pPr lvl="0" indent="0" marL="0"><a:buNone /></a:pPr><a:r><a:rPr /><a:t>Model 25.2d</a:t></a:r></a:p></a:txBody></a:tc><a:tc><a:txBody><a:bodyPr /><a:lstStyle /><a:p><a:pPr lvl="0" indent="0" marL="0"><a:buNone /></a:pPr><a:r><a:rPr /><a:t>plus + new_mat + imm</a:t></a:r></a:p></a:txBody></a:tc><a:tc><a:txBody><a:bodyPr /><a:lstStyle /><a:p><a:pPr lvl="0" indent="0" marL="0" algn="r"><a:buNone /></a:pPr><a:r><a:rPr /><a:t>163.4</a:t></a:r></a:p></a:txBody></a:tc><a:tc><a:txBody><a:bodyPr /><a:lstStyle /><a:p><a:pPr lvl="0" indent="0" marL="0" algn="r"><a:buNone /></a:pPr><a:r><a:rPr /><a:t>0.90</a:t></a:r></a:p></a:txBody></a:tc><a:tc><a:txBody><a:bodyPr /><a:lstStyle /><a:p><a:pPr lvl="0" indent="0" marL="0" algn="r"><a:buNone /></a:pPr><a:r><a:rPr /><a:t>70.9</a:t></a:r></a:p></a:txBody></a:tc><a:tc><a:txBody><a:bodyPr /><a:lstStyle /><a:p><a:pPr lvl="0" indent="0" marL="0" algn="r"><a:buNone /></a:pPr><a:r><a:rPr /><a:t>63.1</a:t></a:r></a:p></a:txBody></a:tc><a:tc><a:txBody><a:bodyPr /><a:lstStyle /><a:p><a:pPr lvl="0" indent="0" marL="0" algn="r"><a:buNone /></a:pPr><a:r><a:rPr /><a:t>59.5</a:t></a:r></a:p></a:txBody></a:tc></a:tr><a:tr h="0"><a:tc><a:txBody><a:bodyPr /><a:lstStyle /><a:p><a:pPr lvl="0" indent="0" marL="0"><a:buNone /></a:pPr><a:r><a:rPr /><a:t>Model 25.3a</a:t></a:r></a:p></a:txBody></a:tc><a:tc><a:txBody><a:bodyPr /><a:lstStyle /><a:p><a:pPr lvl="0" indent="0" marL="0"><a:buNone /></a:pPr><a:r><a:rPr /><a:t>plus + hyb_fishery</a:t></a:r></a:p></a:txBody></a:tc><a:tc><a:txBody><a:bodyPr /><a:lstStyle /><a:p><a:pPr lvl="0" indent="0" marL="0" algn="r"><a:buNone /></a:pPr><a:r><a:rPr /><a:t>169.3</a:t></a:r></a:p></a:txBody></a:tc><a:tc><a:txBody><a:bodyPr /><a:lstStyle /><a:p><a:pPr lvl="0" indent="0" marL="0" algn="r"><a:buNone /></a:pPr><a:r><a:rPr /><a:t>0.91</a:t></a:r></a:p></a:txBody></a:tc><a:tc><a:txBody><a:bodyPr /><a:lstStyle /><a:p><a:pPr lvl="0" indent="0" marL="0" algn="r"><a:buNone /></a:pPr><a:r><a:rPr /><a:t>37.0</a:t></a:r></a:p></a:txBody></a:tc><a:tc><a:txBody><a:bodyPr /><a:lstStyle /><a:p><a:pPr lvl="0" indent="0" marL="0" algn="r"><a:buNone /></a:pPr><a:r><a:rPr /><a:t>33.4</a:t></a:r></a:p></a:txBody></a:tc><a:tc><a:txBody><a:bodyPr /><a:lstStyle /><a:p><a:pPr lvl="0" indent="0" marL="0" algn="r"><a:buNone /></a:pPr><a:r><a:rPr /><a:t>44.2</a:t></a:r></a:p></a:txBody></a:tc></a:tr><a:tr h="0"><a:tc><a:txBody><a:bodyPr /><a:lstStyle /><a:p><a:pPr lvl="0" indent="0" marL="0"><a:buNone /></a:pPr><a:r><a:rPr /><a:t>Model 25.3b</a:t></a:r></a:p></a:txBody></a:tc><a:tc><a:txBody><a:bodyPr /><a:lstStyle /><a:p><a:pPr lvl="0" indent="0" marL="0"><a:buNone /></a:pPr><a:r><a:rPr /><a:t>plus + hyb_surv</a:t></a:r></a:p></a:txBody></a:tc><a:tc><a:txBody><a:bodyPr /><a:lstStyle /><a:p><a:pPr lvl="0" indent="0" marL="0" algn="r"><a:buNone /></a:pPr><a:r><a:rPr /><a:t>176.3</a:t></a:r></a:p></a:txBody></a:tc><a:tc><a:txBody><a:bodyPr /><a:lstStyle /><a:p><a:pPr lvl="0" indent="0" marL="0" algn="r"><a:buNone /></a:pPr><a:r><a:rPr /><a:t>0.93</a:t></a:r></a:p></a:txBody></a:tc><a:tc><a:txBody><a:bodyPr /><a:lstStyle /><a:p><a:pPr lvl="0" indent="0" marL="0" algn="r"><a:buNone /></a:pPr><a:r><a:rPr /><a:t>34.5</a:t></a:r></a:p></a:txBody></a:tc><a:tc><a:txBody><a:bodyPr /><a:lstStyle /><a:p><a:pPr lvl="0" indent="0" marL="0" algn="r"><a:buNone /></a:pPr><a:r><a:rPr /><a:t>31.6</a:t></a:r></a:p></a:txBody></a:tc><a:tc><a:txBody><a:bodyPr /><a:lstStyle /><a:p><a:pPr lvl="0" indent="0" marL="0" algn="r"><a:buNone /></a:pPr><a:r><a:rPr /><a:t>47.8</a:t></a:r></a:p></a:txBody></a:tc></a:tr><a:tr h="0"><a:tc><a:txBody><a:bodyPr /><a:lstStyle /><a:p><a:pPr lvl="0" indent="0" marL="0"><a:buNone /></a:pPr><a:r><a:rPr /><a:t>Model 25.3c</a:t></a:r></a:p></a:txBody></a:tc><a:tc><a:txBody><a:bodyPr /><a:lstStyle /><a:p><a:pPr lvl="0" indent="0" marL="0"><a:buNone /></a:pPr><a:r><a:rPr /><a:t>plus + hyb_both</a:t></a:r></a:p></a:txBody></a:tc><a:tc><a:txBody><a:bodyPr /><a:lstStyle /><a:p><a:pPr lvl="0" indent="0" marL="0" algn="r"><a:buNone /></a:pPr><a:r><a:rPr /><a:t>168.2</a:t></a:r></a:p></a:txBody></a:tc><a:tc><a:txBody><a:bodyPr /><a:lstStyle /><a:p><a:pPr lvl="0" indent="0" marL="0" algn="r"><a:buNone /></a:pPr><a:r><a:rPr /><a:t>0.95</a:t></a:r></a:p></a:txBody></a:tc><a:tc><a:txBody><a:bodyPr /><a:lstStyle /><a:p><a:pPr lvl="0" indent="0" marL="0" algn="r"><a:buNone /></a:pPr><a:r><a:rPr /><a:t>35.3</a:t></a:r></a:p></a:txBody></a:tc><a:tc><a:txBody><a:bodyPr /><a:lstStyle /><a:p><a:pPr lvl="0" indent="0" marL="0" algn="r"><a:buNone /></a:pPr><a:r><a:rPr /><a:t>33.5</a:t></a:r></a:p></a:txBody></a:tc><a:tc><a:txBody><a:bodyPr /><a:lstStyle /><a:p><a:pPr lvl="0" indent="0" marL="0" algn="r"><a:buNone /></a:pPr><a:r><a:rPr /><a:t>42.2</a:t></a:r></a:p></a:txBody></a:tc></a:tr><a:tr h="0"><a:tc><a:txBody><a:bodyPr /><a:lstStyle /><a:p><a:pPr lvl="0" indent="0" marL="0"><a:buNone /></a:pPr><a:r><a:rPr /><a:t>Model 25.3d</a:t></a:r></a:p></a:txBody></a:tc><a:tc><a:txBody><a:bodyPr /><a:lstStyle /><a:p><a:pPr lvl="0" indent="0" marL="0"><a:buNone /></a:pPr><a:r><a:rPr /><a:t>hyb_both + new_mat</a:t></a:r></a:p></a:txBody></a:tc><a:tc><a:txBody><a:bodyPr /><a:lstStyle /><a:p><a:pPr lvl="0" indent="0" marL="0" algn="r"><a:buNone /></a:pPr><a:r><a:rPr /><a:t>169.8</a:t></a:r></a:p></a:txBody></a:tc><a:tc><a:txBody><a:bodyPr /><a:lstStyle /><a:p><a:pPr lvl="0" indent="0" marL="0" algn="r"><a:buNone /></a:pPr><a:r><a:rPr /><a:t>1.01</a:t></a:r></a:p></a:txBody></a:tc><a:tc><a:txBody><a:bodyPr /><a:lstStyle /><a:p><a:pPr lvl="0" indent="0" marL="0" algn="r"><a:buNone /></a:pPr><a:r><a:rPr /><a:t>44.1</a:t></a:r></a:p></a:txBody></a:tc><a:tc><a:txBody><a:bodyPr /><a:lstStyle /><a:p><a:pPr lvl="0" indent="0" marL="0" algn="r"><a:buNone /></a:pPr><a:r><a:rPr /><a:t>44.1</a:t></a:r></a:p></a:txBody></a:tc><a:tc><a:txBody><a:bodyPr /><a:lstStyle /><a:p><a:pPr lvl="0" indent="0" marL="0" algn="r"><a:buNone /></a:pPr><a:r><a:rPr /><a:t>49.6</a:t></a:r></a:p></a:txBody></a:tc></a:tr></a:tbl></a:graphicData></a:graphic></p:graphicFrame></p:spTree></p:cSld></p:sld>
+</file>
+
+<file path=ppt/slides/slide59.xml><?xml version="1.0" encoding="utf-8"?>
+<p:sld xmlns:a="http://schemas.openxmlformats.org/drawingml/2006/main" xmlns:r="http://schemas.openxmlformats.org/officeDocument/2006/relationships" xmlns:p="http://schemas.openxmlformats.org/presentationml/2006/main">
+  <p:cSld>
+    <p:spTree>
+      <p:nvGrpSpPr>
+        <p:cNvPr id="1" name=""/>
+        <p:cNvGrpSpPr/>
+        <p:nvPr/>
+      </p:nvGrpSpPr>
+      <p:grpSpPr>
+        <a:xfrm>
+          <a:off x="0" y="0"/>
+          <a:ext cx="0" cy="0"/>
+          <a:chOff x="0" y="0"/>
+          <a:chExt cx="0" cy="0"/>
+        </a:xfrm>
+      </p:grpSpPr>
+      <p:sp>
+        <p:nvSpPr>
+          <p:cNvPr id="3" name="Content Placeholder 2"/>
+          <p:cNvSpPr>
+            <a:spLocks noGrp="1"/>
+          </p:cNvSpPr>
+          <p:nvPr>
+            <p:ph idx="1"/>
+          </p:nvPr>
+        </p:nvSpPr>
+        <p:spPr/>
+        <p:txBody>
+          <a:bodyPr/>
+          <a:lstStyle/>
+          <a:p>
+            <a:pPr lvl="0" indent="0" marL="0">
+              <a:buNone/>
+            </a:pPr>
+            <a:r>
+              <a:rPr/>
+              <a:t>Values extracted from </a:t>
+            </a:r>
+            <a:r>
+              <a:rPr>
+                <a:latin typeface="Courier"/>
+              </a:rPr>
+              <a:t>Gmacsall.out</a:t>
+            </a:r>
+            <a:r>
+              <a:rPr/>
+              <a:t> of each candidate run (May 2026 fits). For reference: 2025 survey commercially-preferred male biomass = </a:t>
+            </a:r>
+            <a:r>
+              <a:rPr b="1"/>
+              <a:t>23.28 kt</a:t>
+            </a:r>
+            <a:r>
+              <a:rPr/>
+              <a:t>.</a:t>
+            </a:r>
+          </a:p>
+        </p:txBody>
+      </p:sp>
+    </p:spTree>
+  </p:cSld>
+</p:sld>
 </file>
 
 <file path=ppt/slides/slide6.xml><?xml version="1.0" encoding="utf-8"?>
@@ -10909,12 +10907,12 @@
       </p:grpSpPr>
       <p:sp>
         <p:nvSpPr>
-          <p:cNvPr id="3" name="Content Placeholder 2"/>
-          <p:cNvSpPr>
-            <a:spLocks noGrp="1"/>
-          </p:cNvSpPr>
-          <p:nvPr>
-            <p:ph idx="1"/>
+          <p:cNvPr id="2" name="Title 1"/>
+          <p:cNvSpPr>
+            <a:spLocks noGrp="1"/>
+          </p:cNvSpPr>
+          <p:nvPr>
+            <p:ph type="title"/>
           </p:nvPr>
         </p:nvSpPr>
         <p:spPr/>
@@ -10927,29 +10925,183 @@
             </a:pPr>
             <a:r>
               <a:rPr/>
-              <a:t>Values extracted from </a:t>
-            </a:r>
-            <a:r>
-              <a:rPr>
-                <a:latin typeface="Courier"/>
-              </a:rPr>
-              <a:t>Gmacsall.out</a:t>
-            </a:r>
-            <a:r>
-              <a:rPr/>
-              <a:t> of each candidate run (May 2026 fits). For reference: 2025 survey commercially-preferred male biomass = </a:t>
-            </a:r>
-            <a:r>
-              <a:rPr b="1"/>
-              <a:t>23.28 kt</a:t>
-            </a:r>
-            <a:r>
-              <a:rPr/>
-              <a:t>.</a:t>
-            </a:r>
-          </a:p>
-        </p:txBody>
-      </p:sp>
+              <a:t>OFL summary</a:t>
+            </a:r>
+          </a:p>
+        </p:txBody>
+      </p:sp>
+      <mc:AlternateContent xmlns:mc="http://schemas.openxmlformats.org/markup-compatibility/2006">
+        <mc:Choice xmlns:a14="http://schemas.microsoft.com/office/drawing/2010/main" Requires="a14">
+          <p:sp>
+            <p:nvSpPr>
+              <p:cNvPr id="3" name="Content Placeholder 2"/>
+              <p:cNvSpPr>
+                <a:spLocks noGrp="1"/>
+              </p:cNvSpPr>
+              <p:nvPr>
+                <p:ph idx="1"/>
+              </p:nvPr>
+            </p:nvSpPr>
+            <p:spPr/>
+            <p:txBody>
+              <a:bodyPr/>
+              <a:lstStyle/>
+              <a:p>
+                <a:pPr lvl="0"/>
+                <a:r>
+                  <a:rPr/>
+                  <a:t>Tier 3 OFLs across the 14 candidates: </a:t>
+                </a:r>
+                <a:r>
+                  <a:rPr b="1"/>
+                  <a:t>~36 to ~60 kt</a:t>
+                </a:r>
+                <a:r>
+                  <a:rPr/>
+                  <a:t>.</a:t>
+                </a:r>
+              </a:p>
+              <a:p>
+                <a:pPr lvl="0"/>
+                <a:r>
+                  <a:rPr/>
+                  <a:t>For reference, </a:t>
+                </a:r>
+                <a:r>
+                  <a:rPr b="1"/>
+                  <a:t>2025 survey commercially-preferred male biomass = 23.28 kt</a:t>
+                </a:r>
+                <a:r>
+                  <a:rPr/>
+                  <a:t>.</a:t>
+                </a:r>
+              </a:p>
+              <a:p>
+                <a:pPr lvl="0"/>
+                <a:r>
+                  <a:rPr/>
+                  <a:t>Differences driven by:</a:t>
+                </a:r>
+              </a:p>
+              <a:p>
+                <a:pPr lvl="1" indent="-342900" marL="685800">
+                  <a:buAutoNum type="arabicPeriod"/>
+                </a:pPr>
+                <a:r>
+                  <a:rPr/>
+                  <a:t>Estimated </a:t>
+                </a:r>
+                <a14:m>
+                  <m:oMath xmlns:m="http://schemas.openxmlformats.org/officeDocument/2006/math">
+                    <m:r>
+                      <m:t>M</m:t>
+                    </m:r>
+                  </m:oMath>
+                </a14:m>
+                <a:r>
+                  <a:rPr/>
+                  <a:t> on mature males (highest in immature-index models).</a:t>
+                </a:r>
+              </a:p>
+              <a:p>
+                <a:pPr lvl="1" indent="-342900" marL="685800">
+                  <a:buAutoNum type="arabicPeriod"/>
+                </a:pPr>
+                <a:r>
+                  <a:rPr/>
+                  <a:t>Time trend of </a:t>
+                </a:r>
+                <a14:m>
+                  <m:oMath xmlns:m="http://schemas.openxmlformats.org/officeDocument/2006/math">
+                    <m:r>
+                      <m:rPr>
+                        <m:sty m:val="p"/>
+                      </m:rPr>
+                      <m:t>Pr</m:t>
+                    </m:r>
+                  </m:oMath>
+                </a14:m>
+                <a:r>
+                  <a:rPr/>
+                  <a:t>(terminal molt) (legacy vs. new maturity).</a:t>
+                </a:r>
+              </a:p>
+              <a:p>
+                <a:pPr lvl="1" indent="-342900" marL="685800">
+                  <a:buAutoNum type="arabicPeriod"/>
+                </a:pPr>
+                <a:r>
+                  <a:rPr/>
+                  <a:t>Additional discard </a:t>
+                </a:r>
+                <a14:m>
+                  <m:oMath xmlns:m="http://schemas.openxmlformats.org/officeDocument/2006/math">
+                    <m:r>
+                      <m:t>F</m:t>
+                    </m:r>
+                  </m:oMath>
+                </a14:m>
+                <a:r>
+                  <a:rPr/>
+                  <a:t> implied by hybrid catches (lowers </a:t>
+                </a:r>
+                <a14:m>
+                  <m:oMath xmlns:m="http://schemas.openxmlformats.org/officeDocument/2006/math">
+                    <m:sSub>
+                      <m:e>
+                        <m:r>
+                          <m:t>B</m:t>
+                        </m:r>
+                      </m:e>
+                      <m:sub>
+                        <m:r>
+                          <m:t>M</m:t>
+                        </m:r>
+                        <m:r>
+                          <m:t>S</m:t>
+                        </m:r>
+                        <m:r>
+                          <m:t>Y</m:t>
+                        </m:r>
+                      </m:sub>
+                    </m:sSub>
+                  </m:oMath>
+                </a14:m>
+                <a:r>
+                  <a:rPr/>
+                  <a:t> slightly).</a:t>
+                </a:r>
+              </a:p>
+              <a:p>
+                <a:pPr lvl="0"/>
+                <a:r>
+                  <a:rPr/>
+                  <a:t>The immature-index sensitivities and the new-maturity sensitivities </a:t>
+                </a:r>
+                <a:r>
+                  <a:rPr b="1"/>
+                  <a:t>bracket the candidate set</a:t>
+                </a:r>
+                <a:r>
+                  <a:rPr/>
+                  <a:t>.</a:t>
+                </a:r>
+              </a:p>
+              <a:p>
+                <a:pPr lvl="0"/>
+                <a:r>
+                  <a:rPr b="1"/>
+                  <a:t>Tier 4 fallback</a:t>
+                </a:r>
+                <a:r>
+                  <a:rPr/>
+                  <a:t> will be presented in September following the standardized REMA-smoothed mature-male approach (October 2024 SSC).</a:t>
+                </a:r>
+              </a:p>
+            </p:txBody>
+          </p:sp>
+        </mc:Choice>
+      </mc:AlternateContent>
     </p:spTree>
   </p:cSld>
 </p:sld>
@@ -10992,7 +11144,7 @@
             </a:pPr>
             <a:r>
               <a:rPr/>
-              <a:t>OFL summary</a:t>
+              <a:t>ABC buffer considerations</a:t>
             </a:r>
           </a:p>
         </p:txBody>
@@ -11017,66 +11169,7 @@
                 <a:pPr lvl="0"/>
                 <a:r>
                   <a:rPr/>
-                  <a:t>Tier 3 OFLs across the 14 candidates: </a:t>
-                </a:r>
-                <a:r>
-                  <a:rPr b="1"/>
-                  <a:t>~36 to ~60 kt</a:t>
-                </a:r>
-                <a:r>
-                  <a:rPr/>
-                  <a:t>.</a:t>
-                </a:r>
-              </a:p>
-              <a:p>
-                <a:pPr lvl="0"/>
-                <a:r>
-                  <a:rPr/>
-                  <a:t>For reference, </a:t>
-                </a:r>
-                <a:r>
-                  <a:rPr b="1"/>
-                  <a:t>2025 survey commercially-preferred male biomass = 23.28 kt</a:t>
-                </a:r>
-                <a:r>
-                  <a:rPr/>
-                  <a:t>.</a:t>
-                </a:r>
-              </a:p>
-              <a:p>
-                <a:pPr lvl="0"/>
-                <a:r>
-                  <a:rPr/>
-                  <a:t>Differences driven by:</a:t>
-                </a:r>
-              </a:p>
-              <a:p>
-                <a:pPr lvl="1" indent="-342900" marL="685800">
-                  <a:buAutoNum type="arabicPeriod"/>
-                </a:pPr>
-                <a:r>
-                  <a:rPr/>
-                  <a:t>Estimated </a:t>
-                </a:r>
-                <a14:m>
-                  <m:oMath xmlns:m="http://schemas.openxmlformats.org/officeDocument/2006/math">
-                    <m:r>
-                      <m:t>M</m:t>
-                    </m:r>
-                  </m:oMath>
-                </a14:m>
-                <a:r>
-                  <a:rPr/>
-                  <a:t> on mature males (highest in immature-index models).</a:t>
-                </a:r>
-              </a:p>
-              <a:p>
-                <a:pPr lvl="1" indent="-342900" marL="685800">
-                  <a:buAutoNum type="arabicPeriod"/>
-                </a:pPr>
-                <a:r>
-                  <a:rPr/>
-                  <a:t>Time trend of </a:t>
+                  <a:t>ABC = OFL </a:t>
                 </a:r>
                 <a14:m>
                   <m:oMath xmlns:m="http://schemas.openxmlformats.org/officeDocument/2006/math">
@@ -11084,70 +11177,24 @@
                       <m:rPr>
                         <m:sty m:val="p"/>
                       </m:rPr>
-                      <m:t>Pr</m:t>
+                      <m:t>×</m:t>
                     </m:r>
                   </m:oMath>
                 </a14:m>
                 <a:r>
                   <a:rPr/>
-                  <a:t>(terminal molt) (legacy vs. new maturity).</a:t>
-                </a:r>
-              </a:p>
-              <a:p>
-                <a:pPr lvl="1" indent="-342900" marL="685800">
-                  <a:buAutoNum type="arabicPeriod"/>
-                </a:pPr>
-                <a:r>
-                  <a:rPr/>
-                  <a:t>Additional discard </a:t>
-                </a:r>
-                <a14:m>
-                  <m:oMath xmlns:m="http://schemas.openxmlformats.org/officeDocument/2006/math">
-                    <m:r>
-                      <m:t>F</m:t>
-                    </m:r>
-                  </m:oMath>
-                </a14:m>
-                <a:r>
-                  <a:rPr/>
-                  <a:t> implied by hybrid catches (lowers </a:t>
-                </a:r>
-                <a14:m>
-                  <m:oMath xmlns:m="http://schemas.openxmlformats.org/officeDocument/2006/math">
-                    <m:sSub>
-                      <m:e>
-                        <m:r>
-                          <m:t>B</m:t>
-                        </m:r>
-                      </m:e>
-                      <m:sub>
-                        <m:r>
-                          <m:t>M</m:t>
-                        </m:r>
-                        <m:r>
-                          <m:t>S</m:t>
-                        </m:r>
-                        <m:r>
-                          <m:t>Y</m:t>
-                        </m:r>
-                      </m:sub>
-                    </m:sSub>
-                  </m:oMath>
-                </a14:m>
-                <a:r>
-                  <a:rPr/>
-                  <a:t> slightly).</a:t>
+                  <a:t> (1 – buffer).</a:t>
                 </a:r>
               </a:p>
               <a:p>
                 <a:pPr lvl="0"/>
                 <a:r>
                   <a:rPr/>
-                  <a:t>The immature-index sensitivities and the new-maturity sensitivities </a:t>
+                  <a:t>SSC buffers used in recent years: </a:t>
                 </a:r>
                 <a:r>
                   <a:rPr b="1"/>
-                  <a:t>bracket the candidate set</a:t>
+                  <a:t>25% (2025), 65% (2024), 50% (2023), 25% (2021), 25% (2020)</a:t>
                 </a:r>
                 <a:r>
                   <a:rPr/>
@@ -11157,12 +11204,31 @@
               <a:p>
                 <a:pPr lvl="0"/>
                 <a:r>
+                  <a:rPr/>
+                  <a:t>Because </a:t>
+                </a:r>
+                <a:r>
                   <a:rPr b="1"/>
-                  <a:t>Tier 4 fallback</a:t>
+                  <a:t>retained catch contains hybrids that cannot currently be separated</a:t>
                 </a:r>
                 <a:r>
                   <a:rPr/>
-                  <a:t> will be presented in September following the standardized REMA-smoothed mature-male approach (October 2024 SSC).</a:t>
+                  <a:t> from snow crab, the assessment recommends that </a:t>
+                </a:r>
+                <a:r>
+                  <a:rPr b="1"/>
+                  <a:t>the buffer accommodate the unknown retained-hybrid component</a:t>
+                </a:r>
+                <a:r>
+                  <a:rPr/>
+                  <a:t>.</a:t>
+                </a:r>
+              </a:p>
+              <a:p>
+                <a:pPr lvl="0"/>
+                <a:r>
+                  <a:rPr/>
+                  <a:t>No author-recommended buffer is proposed at this time; this will be revisited in September with a smaller candidate set.</a:t>
                 </a:r>
               </a:p>
             </p:txBody>
@@ -11201,7 +11267,12 @@
             <p:ph type="title"/>
           </p:nvPr>
         </p:nvSpPr>
-        <p:spPr/>
+        <p:spPr>
+          <a:xfrm>
+            <a:off x="722313" y="3305176"/>
+            <a:ext cx="7772400" cy="1021556"/>
+          </a:xfrm>
+        </p:spPr>
         <p:txBody>
           <a:bodyPr/>
           <a:lstStyle/>
@@ -11211,97 +11282,11 @@
             </a:pPr>
             <a:r>
               <a:rPr/>
-              <a:t>ABC buffer considerations</a:t>
-            </a:r>
-          </a:p>
-        </p:txBody>
-      </p:sp>
-      <mc:AlternateContent xmlns:mc="http://schemas.openxmlformats.org/markup-compatibility/2006">
-        <mc:Choice xmlns:a14="http://schemas.microsoft.com/office/drawing/2010/main" Requires="a14">
-          <p:sp>
-            <p:nvSpPr>
-              <p:cNvPr id="3" name="Content Placeholder 2"/>
-              <p:cNvSpPr>
-                <a:spLocks noGrp="1"/>
-              </p:cNvSpPr>
-              <p:nvPr>
-                <p:ph idx="1"/>
-              </p:nvPr>
-            </p:nvSpPr>
-            <p:spPr/>
-            <p:txBody>
-              <a:bodyPr/>
-              <a:lstStyle/>
-              <a:p>
-                <a:pPr lvl="0"/>
-                <a:r>
-                  <a:rPr/>
-                  <a:t>ABC = OFL </a:t>
-                </a:r>
-                <a14:m>
-                  <m:oMath xmlns:m="http://schemas.openxmlformats.org/officeDocument/2006/math">
-                    <m:r>
-                      <m:rPr>
-                        <m:sty m:val="p"/>
-                      </m:rPr>
-                      <m:t>×</m:t>
-                    </m:r>
-                  </m:oMath>
-                </a14:m>
-                <a:r>
-                  <a:rPr/>
-                  <a:t> (1 – buffer).</a:t>
-                </a:r>
-              </a:p>
-              <a:p>
-                <a:pPr lvl="0"/>
-                <a:r>
-                  <a:rPr/>
-                  <a:t>SSC buffers used in recent years: </a:t>
-                </a:r>
-                <a:r>
-                  <a:rPr b="1"/>
-                  <a:t>25% (2025), 65% (2024), 50% (2023), 25% (2021), 25% (2020)</a:t>
-                </a:r>
-                <a:r>
-                  <a:rPr/>
-                  <a:t>.</a:t>
-                </a:r>
-              </a:p>
-              <a:p>
-                <a:pPr lvl="0"/>
-                <a:r>
-                  <a:rPr/>
-                  <a:t>Because </a:t>
-                </a:r>
-                <a:r>
-                  <a:rPr b="1"/>
-                  <a:t>retained catch contains hybrids that cannot currently be separated</a:t>
-                </a:r>
-                <a:r>
-                  <a:rPr/>
-                  <a:t> from snow crab, the assessment recommends that </a:t>
-                </a:r>
-                <a:r>
-                  <a:rPr b="1"/>
-                  <a:t>the buffer accommodate the unknown retained-hybrid component</a:t>
-                </a:r>
-                <a:r>
-                  <a:rPr/>
-                  <a:t>.</a:t>
-                </a:r>
-              </a:p>
-              <a:p>
-                <a:pPr lvl="0"/>
-                <a:r>
-                  <a:rPr/>
-                  <a:t>No author-recommended buffer is proposed at this time; this will be revisited in September with a smaller candidate set.</a:t>
-                </a:r>
-              </a:p>
-            </p:txBody>
-          </p:sp>
-        </mc:Choice>
-      </mc:AlternateContent>
+              <a:t>Author requests and recommendations</a:t>
+            </a:r>
+          </a:p>
+        </p:txBody>
+      </p:sp>
     </p:spTree>
   </p:cSld>
 </p:sld>
@@ -11334,12 +11319,7 @@
             <p:ph type="title"/>
           </p:nvPr>
         </p:nvSpPr>
-        <p:spPr>
-          <a:xfrm>
-            <a:off x="722313" y="3305176"/>
-            <a:ext cx="7772400" cy="1021556"/>
-          </a:xfrm>
-        </p:spPr>
+        <p:spPr/>
         <p:txBody>
           <a:bodyPr/>
           <a:lstStyle/>
@@ -11349,11 +11329,173 @@
             </a:pPr>
             <a:r>
               <a:rPr/>
-              <a:t>Author requests and recommendations</a:t>
-            </a:r>
-          </a:p>
-        </p:txBody>
-      </p:sp>
+              <a:t>Areas where the author seeks CPT/SSC guidance</a:t>
+            </a:r>
+          </a:p>
+        </p:txBody>
+      </p:sp>
+      <mc:AlternateContent xmlns:mc="http://schemas.openxmlformats.org/markup-compatibility/2006">
+        <mc:Choice xmlns:a14="http://schemas.microsoft.com/office/drawing/2010/main" Requires="a14">
+          <p:sp>
+            <p:nvSpPr>
+              <p:cNvPr id="3" name="Content Placeholder 2"/>
+              <p:cNvSpPr>
+                <a:spLocks noGrp="1"/>
+              </p:cNvSpPr>
+              <p:nvPr>
+                <p:ph idx="1"/>
+              </p:nvPr>
+            </p:nvSpPr>
+            <p:spPr/>
+            <p:txBody>
+              <a:bodyPr/>
+              <a:lstStyle/>
+              <a:p>
+                <a:pPr lvl="0" indent="0" marL="0">
+                  <a:buNone/>
+                </a:pPr>
+                <a:r>
+                  <a:rPr/>
+                  <a:t>This is a preliminary document. </a:t>
+                </a:r>
+                <a:r>
+                  <a:rPr b="1"/>
+                  <a:t>No author-preferred model is recommended.</a:t>
+                </a:r>
+                <a:r>
+                  <a:rPr/>
+                  <a:t> The author seeks guidance on:</a:t>
+                </a:r>
+              </a:p>
+              <a:p>
+                <a:pPr lvl="0" indent="-342900" marL="342900">
+                  <a:buAutoNum type="arabicPeriod"/>
+                </a:pPr>
+                <a:r>
+                  <a:rPr b="1"/>
+                  <a:t>Plus-group structural change</a:t>
+                </a:r>
+                <a:r>
+                  <a:rPr/>
+                  <a:t> (&gt;135 mm CW): faster, more interpretable size comp at the largest sizes, minimal change in management quantities. </a:t>
+                </a:r>
+                <a:r>
+                  <a:rPr i="1"/>
+                  <a:t>Author suggests adopting as the new structural baseline for September.</a:t>
+                </a:r>
+              </a:p>
+              <a:p>
+                <a:pPr lvl="0" indent="-342900" marL="342900">
+                  <a:buAutoNum type="arabicPeriod"/>
+                </a:pPr>
+                <a:r>
+                  <a:rPr b="1"/>
+                  <a:t>Inclusion of an immature survey index:</a:t>
+                </a:r>
+                <a:r>
+                  <a:rPr/>
+                  <a:t> resolves bimodality, but produces a much larger mature-male </a:t>
+                </a:r>
+                <a14:m>
+                  <m:oMath xmlns:m="http://schemas.openxmlformats.org/officeDocument/2006/math">
+                    <m:r>
+                      <m:t>M</m:t>
+                    </m:r>
+                  </m:oMath>
+                </a14:m>
+                <a:r>
+                  <a:rPr/>
+                  <a:t>. </a:t>
+                </a:r>
+                <a:r>
+                  <a:rPr i="1"/>
+                  <a:t>Will investigate biological credibility before September.</a:t>
+                </a:r>
+              </a:p>
+              <a:p>
+                <a:pPr lvl="0" indent="-342900" marL="342900">
+                  <a:buAutoNum type="arabicPeriod"/>
+                </a:pPr>
+                <a:r>
+                  <a:rPr b="1"/>
+                  <a:t>New maturity workflow:</a:t>
+                </a:r>
+                <a:r>
+                  <a:rPr/>
+                  <a:t> weaker temporal trend in </a:t>
+                </a:r>
+                <a14:m>
+                  <m:oMath xmlns:m="http://schemas.openxmlformats.org/officeDocument/2006/math">
+                    <m:r>
+                      <m:rPr>
+                        <m:sty m:val="p"/>
+                      </m:rPr>
+                      <m:t>Pr</m:t>
+                    </m:r>
+                  </m:oMath>
+                </a14:m>
+                <a:r>
+                  <a:rPr/>
+                  <a:t>(terminal molt) than the legacy workflow. </a:t>
+                </a:r>
+                <a:r>
+                  <a:rPr i="1"/>
+                  <a:t>No strong preference; seeking guidance.</a:t>
+                </a:r>
+              </a:p>
+              <a:p>
+                <a:pPr lvl="0" indent="-342900" marL="342900">
+                  <a:buAutoNum type="arabicPeriod"/>
+                </a:pPr>
+                <a:r>
+                  <a:rPr b="1"/>
+                  <a:t>Hybrid treatment:</a:t>
+                </a:r>
+                <a:r>
+                  <a:rPr/>
+                  <a:t> modest effect on management quantities; data-quality concerns flagged by ADF&amp;G in 1997–98. </a:t>
+                </a:r>
+                <a:r>
+                  <a:rPr i="1"/>
+                  <a:t>Author recommends one snow-only and one snow+hybrid (survey + fishery) sensitivity moving forward.</a:t>
+                </a:r>
+              </a:p>
+              <a:p>
+                <a:pPr lvl="0" indent="-342900" marL="342900">
+                  <a:buAutoNum type="arabicPeriod"/>
+                </a:pPr>
+                <a:r>
+                  <a:rPr b="1"/>
+                  <a:t>Convergence improvements:</a:t>
+                </a:r>
+                <a:r>
+                  <a:rPr/>
+                  <a:t> none of the 14 candidates is fully clean. </a:t>
+                </a:r>
+                <a:r>
+                  <a:rPr i="1"/>
+                  <a:t>Author seeks guidance on what aspects of the model could be simplified</a:t>
+                </a:r>
+                <a:r>
+                  <a:rPr/>
+                  <a:t> (male-only, fix </a:t>
+                </a:r>
+                <a14:m>
+                  <m:oMath xmlns:m="http://schemas.openxmlformats.org/officeDocument/2006/math">
+                    <m:r>
+                      <m:t>M</m:t>
+                    </m:r>
+                  </m:oMath>
+                </a14:m>
+                <a:r>
+                  <a:rPr/>
+                  <a:t>, simpler survey selectivity).</a:t>
+                </a:r>
+              </a:p>
+            </p:txBody>
+          </p:sp>
+        </mc:Choice>
+      </mc:AlternateContent>
     </p:spTree>
   </p:cSld>
 </p:sld>
@@ -11396,7 +11538,7 @@
             </a:pPr>
             <a:r>
               <a:rPr/>
-              <a:t>Areas where the author seeks CPT/SSC guidance</a:t>
+              <a:t>Plan for September 2026</a:t>
             </a:r>
           </a:p>
         </p:txBody>
@@ -11418,50 +11560,42 @@
               <a:bodyPr/>
               <a:lstStyle/>
               <a:p>
-                <a:pPr lvl="0" indent="0" marL="0">
-                  <a:buNone/>
+                <a:pPr lvl="0" indent="-342900" marL="342900">
+                  <a:buAutoNum type="alphaLcParenBoth"/>
                 </a:pPr>
                 <a:r>
+                  <a:rPr b="1"/>
+                  <a:t>Finalize structural choices</a:t>
+                </a:r>
+                <a:r>
                   <a:rPr/>
-                  <a:t>This is a preliminary document. </a:t>
-                </a:r>
-                <a:r>
-                  <a:rPr b="1"/>
-                  <a:t>No author-preferred model is recommended.</a:t>
-                </a:r>
-                <a:r>
-                  <a:rPr/>
-                  <a:t> The author seeks guidance on:</a:t>
+                  <a:t> (plus group, maturity workflow, immature survey inclusion).</a:t>
                 </a:r>
               </a:p>
               <a:p>
                 <a:pPr lvl="0" indent="-342900" marL="342900">
-                  <a:buAutoNum type="arabicPeriod"/>
+                  <a:buAutoNum type="alphaLcParenBoth"/>
                 </a:pPr>
                 <a:r>
+                  <a:rPr/>
+                  <a:t>Update the </a:t>
+                </a:r>
+                <a:r>
                   <a:rPr b="1"/>
-                  <a:t>Plus-group structural change</a:t>
+                  <a:t>Tier 4 fallback</a:t>
                 </a:r>
                 <a:r>
                   <a:rPr/>
-                  <a:t> (&gt;135 mm CW): faster, more interpretable size comp at the largest sizes, minimal change in management quantities. </a:t>
-                </a:r>
-                <a:r>
-                  <a:rPr i="1"/>
-                  <a:t>Author suggests adopting as the new structural baseline for September.</a:t>
+                  <a:t> following the October 2024 SSC standardization.</a:t>
                 </a:r>
               </a:p>
               <a:p>
                 <a:pPr lvl="0" indent="-342900" marL="342900">
-                  <a:buAutoNum type="arabicPeriod"/>
+                  <a:buAutoNum type="alphaLcParenBoth"/>
                 </a:pPr>
                 <a:r>
                   <a:rPr b="1"/>
-                  <a:t>Inclusion of an immature survey index:</a:t>
-                </a:r>
-                <a:r>
-                  <a:rPr/>
-                  <a:t> resolves bimodality, but produces a much larger mature-male </a:t>
+                  <a:t>Investigate the high mature-male </a:t>
                 </a:r>
                 <a14:m>
                   <m:oMath xmlns:m="http://schemas.openxmlformats.org/officeDocument/2006/math">
@@ -11472,91 +11606,49 @@
                 </a14:m>
                 <a:r>
                   <a:rPr/>
-                  <a:t>. </a:t>
-                </a:r>
-                <a:r>
-                  <a:rPr i="1"/>
-                  <a:t>Will investigate biological credibility before September.</a:t>
+                  <a:t> associated with the immature index – biologically credible or model misspecification?</a:t>
                 </a:r>
               </a:p>
               <a:p>
                 <a:pPr lvl="0" indent="-342900" marL="342900">
-                  <a:buAutoNum type="arabicPeriod"/>
+                  <a:buAutoNum type="alphaLcParenBoth"/>
                 </a:pPr>
                 <a:r>
+                  <a:rPr/>
+                  <a:t>Complete </a:t>
+                </a:r>
+                <a:r>
                   <a:rPr b="1"/>
-                  <a:t>New maturity workflow:</a:t>
+                  <a:t>retrospective patterns</a:t>
                 </a:r>
                 <a:r>
                   <a:rPr/>
-                  <a:t> weaker temporal trend in </a:t>
-                </a:r>
-                <a14:m>
-                  <m:oMath xmlns:m="http://schemas.openxmlformats.org/officeDocument/2006/math">
-                    <m:r>
-                      <m:rPr>
-                        <m:sty m:val="p"/>
-                      </m:rPr>
-                      <m:t>Pr</m:t>
-                    </m:r>
-                  </m:oMath>
-                </a14:m>
+                  <a:t> and </a:t>
+                </a:r>
+                <a:r>
+                  <a:rPr b="1"/>
+                  <a:t>likelihood profiles</a:t>
+                </a:r>
                 <a:r>
                   <a:rPr/>
-                  <a:t>(terminal molt) than the legacy workflow. </a:t>
-                </a:r>
-                <a:r>
-                  <a:rPr i="1"/>
-                  <a:t>No strong preference; seeking guidance.</a:t>
+                  <a:t> for the recommended models.</a:t>
                 </a:r>
               </a:p>
               <a:p>
                 <a:pPr lvl="0" indent="-342900" marL="342900">
-                  <a:buAutoNum type="arabicPeriod"/>
+                  <a:buAutoNum type="alphaLcParenBoth"/>
                 </a:pPr>
                 <a:r>
+                  <a:rPr/>
+                  <a:t>Update </a:t>
+                </a:r>
+                <a:r>
                   <a:rPr b="1"/>
-                  <a:t>Hybrid treatment:</a:t>
+                  <a:t>rebuilding</a:t>
                 </a:r>
                 <a:r>
                   <a:rPr/>
-                  <a:t> modest effect on management quantities; data-quality concerns flagged by ADF&amp;G in 1997–98. </a:t>
-                </a:r>
-                <a:r>
-                  <a:rPr i="1"/>
-                  <a:t>Author recommends one snow-only and one snow+hybrid (survey + fishery) sensitivity moving forward.</a:t>
-                </a:r>
-              </a:p>
-              <a:p>
-                <a:pPr lvl="0" indent="-342900" marL="342900">
-                  <a:buAutoNum type="arabicPeriod"/>
-                </a:pPr>
-                <a:r>
-                  <a:rPr b="1"/>
-                  <a:t>Convergence improvements:</a:t>
-                </a:r>
-                <a:r>
-                  <a:rPr/>
-                  <a:t> none of the 14 candidates is fully clean. </a:t>
-                </a:r>
-                <a:r>
-                  <a:rPr i="1"/>
-                  <a:t>Author seeks guidance on what aspects of the model could be simplified</a:t>
-                </a:r>
-                <a:r>
-                  <a:rPr/>
-                  <a:t> (male-only, fix </a:t>
-                </a:r>
-                <a14:m>
-                  <m:oMath xmlns:m="http://schemas.openxmlformats.org/officeDocument/2006/math">
-                    <m:r>
-                      <m:t>M</m:t>
-                    </m:r>
-                  </m:oMath>
-                </a14:m>
-                <a:r>
-                  <a:rPr/>
-                  <a:t>, simpler survey selectivity).</a:t>
+                  <a:t> and provide updated rebuilding timeline diagnostics.</a:t>
                 </a:r>
               </a:p>
             </p:txBody>
@@ -11595,7 +11687,12 @@
             <p:ph type="title"/>
           </p:nvPr>
         </p:nvSpPr>
-        <p:spPr/>
+        <p:spPr>
+          <a:xfrm>
+            <a:off x="722313" y="3305176"/>
+            <a:ext cx="7772400" cy="1021556"/>
+          </a:xfrm>
+        </p:spPr>
         <p:txBody>
           <a:bodyPr/>
           <a:lstStyle/>
@@ -11605,123 +11702,11 @@
             </a:pPr>
             <a:r>
               <a:rPr/>
-              <a:t>Plan for September 2026</a:t>
-            </a:r>
-          </a:p>
-        </p:txBody>
-      </p:sp>
-      <mc:AlternateContent xmlns:mc="http://schemas.openxmlformats.org/markup-compatibility/2006">
-        <mc:Choice xmlns:a14="http://schemas.microsoft.com/office/drawing/2010/main" Requires="a14">
-          <p:sp>
-            <p:nvSpPr>
-              <p:cNvPr id="3" name="Content Placeholder 2"/>
-              <p:cNvSpPr>
-                <a:spLocks noGrp="1"/>
-              </p:cNvSpPr>
-              <p:nvPr>
-                <p:ph idx="1"/>
-              </p:nvPr>
-            </p:nvSpPr>
-            <p:spPr/>
-            <p:txBody>
-              <a:bodyPr/>
-              <a:lstStyle/>
-              <a:p>
-                <a:pPr lvl="0" indent="-342900" marL="342900">
-                  <a:buAutoNum type="alphaLcParenBoth"/>
-                </a:pPr>
-                <a:r>
-                  <a:rPr b="1"/>
-                  <a:t>Finalize structural choices</a:t>
-                </a:r>
-                <a:r>
-                  <a:rPr/>
-                  <a:t> (plus group, maturity workflow, immature survey inclusion).</a:t>
-                </a:r>
-              </a:p>
-              <a:p>
-                <a:pPr lvl="0" indent="-342900" marL="342900">
-                  <a:buAutoNum type="alphaLcParenBoth"/>
-                </a:pPr>
-                <a:r>
-                  <a:rPr/>
-                  <a:t>Update the </a:t>
-                </a:r>
-                <a:r>
-                  <a:rPr b="1"/>
-                  <a:t>Tier 4 fallback</a:t>
-                </a:r>
-                <a:r>
-                  <a:rPr/>
-                  <a:t> following the October 2024 SSC standardization.</a:t>
-                </a:r>
-              </a:p>
-              <a:p>
-                <a:pPr lvl="0" indent="-342900" marL="342900">
-                  <a:buAutoNum type="alphaLcParenBoth"/>
-                </a:pPr>
-                <a:r>
-                  <a:rPr b="1"/>
-                  <a:t>Investigate the high mature-male </a:t>
-                </a:r>
-                <a14:m>
-                  <m:oMath xmlns:m="http://schemas.openxmlformats.org/officeDocument/2006/math">
-                    <m:r>
-                      <m:t>M</m:t>
-                    </m:r>
-                  </m:oMath>
-                </a14:m>
-                <a:r>
-                  <a:rPr/>
-                  <a:t> associated with the immature index – biologically credible or model misspecification?</a:t>
-                </a:r>
-              </a:p>
-              <a:p>
-                <a:pPr lvl="0" indent="-342900" marL="342900">
-                  <a:buAutoNum type="alphaLcParenBoth"/>
-                </a:pPr>
-                <a:r>
-                  <a:rPr/>
-                  <a:t>Complete </a:t>
-                </a:r>
-                <a:r>
-                  <a:rPr b="1"/>
-                  <a:t>retrospective patterns</a:t>
-                </a:r>
-                <a:r>
-                  <a:rPr/>
-                  <a:t> and </a:t>
-                </a:r>
-                <a:r>
-                  <a:rPr b="1"/>
-                  <a:t>likelihood profiles</a:t>
-                </a:r>
-                <a:r>
-                  <a:rPr/>
-                  <a:t> for the recommended models.</a:t>
-                </a:r>
-              </a:p>
-              <a:p>
-                <a:pPr lvl="0" indent="-342900" marL="342900">
-                  <a:buAutoNum type="alphaLcParenBoth"/>
-                </a:pPr>
-                <a:r>
-                  <a:rPr/>
-                  <a:t>Update </a:t>
-                </a:r>
-                <a:r>
-                  <a:rPr b="1"/>
-                  <a:t>rebuilding</a:t>
-                </a:r>
-                <a:r>
-                  <a:rPr/>
-                  <a:t> and provide updated rebuilding timeline diagnostics.</a:t>
-                </a:r>
-              </a:p>
-            </p:txBody>
-          </p:sp>
-        </mc:Choice>
-      </mc:AlternateContent>
+              <a:t>Data gaps and research priorities</a:t>
+            </a:r>
+          </a:p>
+        </p:txBody>
+      </p:sp>
     </p:spTree>
   </p:cSld>
 </p:sld>
@@ -11754,12 +11739,7 @@
             <p:ph type="title"/>
           </p:nvPr>
         </p:nvSpPr>
-        <p:spPr>
-          <a:xfrm>
-            <a:off x="722313" y="3305176"/>
-            <a:ext cx="7772400" cy="1021556"/>
-          </a:xfrm>
-        </p:spPr>
+        <p:spPr/>
         <p:txBody>
           <a:bodyPr/>
           <a:lstStyle/>
@@ -11770,6 +11750,98 @@
             <a:r>
               <a:rPr/>
               <a:t>Data gaps and research priorities</a:t>
+            </a:r>
+          </a:p>
+        </p:txBody>
+      </p:sp>
+      <p:sp>
+        <p:nvSpPr>
+          <p:cNvPr id="3" name="Content Placeholder 2"/>
+          <p:cNvSpPr>
+            <a:spLocks noGrp="1"/>
+          </p:cNvSpPr>
+          <p:nvPr>
+            <p:ph idx="1"/>
+          </p:nvPr>
+        </p:nvSpPr>
+        <p:spPr/>
+        <p:txBody>
+          <a:bodyPr/>
+          <a:lstStyle/>
+          <a:p>
+            <a:pPr lvl="0"/>
+            <a:r>
+              <a:rPr b="1"/>
+              <a:t>Hybrid identification consistency between ADF&amp;G and NMFS.</a:t>
+            </a:r>
+            <a:r>
+              <a:rPr/>
+              <a:t> Different criteria for the number of secondary characteristics required for a positive hybrid identification.</a:t>
+            </a:r>
+          </a:p>
+          <a:p>
+            <a:pPr lvl="0"/>
+            <a:r>
+              <a:rPr b="1"/>
+              <a:t>Apportionment of retained catch between snow and hybrids.</a:t>
+            </a:r>
+            <a:r>
+              <a:rPr/>
+              <a:t> Currently retained catch contains both, with no method to partition.</a:t>
+            </a:r>
+          </a:p>
+          <a:p>
+            <a:pPr lvl="0"/>
+            <a:r>
+              <a:rPr b="1"/>
+              <a:t>Quality control on early hybrid catch estimates.</a:t>
+            </a:r>
+            <a:r>
+              <a:rPr/>
+              <a:t> 1997–98 catches flagged by ADF&amp;G.</a:t>
+            </a:r>
+          </a:p>
+          <a:p>
+            <a:pPr lvl="0"/>
+            <a:r>
+              <a:rPr b="1"/>
+              <a:t>Maturity workflow comparison.</a:t>
+            </a:r>
+            <a:r>
+              <a:rPr/>
+              <a:t> Side-by-side documentation, sample-size diagnostics, and uncertainty quantification for the legacy vs. </a:t>
+            </a:r>
+            <a:r>
+              <a:rPr>
+                <a:latin typeface="Courier"/>
+              </a:rPr>
+              <a:t>sdmTMB</a:t>
+            </a:r>
+            <a:r>
+              <a:rPr/>
+              <a:t> workflows.</a:t>
+            </a:r>
+          </a:p>
+          <a:p>
+            <a:pPr lvl="0"/>
+            <a:r>
+              <a:rPr b="1"/>
+              <a:t>Source of bimodality</a:t>
+            </a:r>
+            <a:r>
+              <a:rPr/>
+              <a:t> in the snow crab assessment. Focused investigation to identify which parameter combinations produce the two clouds.</a:t>
+            </a:r>
+          </a:p>
+          <a:p>
+            <a:pPr lvl="0"/>
+            <a:r>
+              <a:rPr b="1"/>
+              <a:t>Reproductive biology of large male snow crab.</a:t>
+            </a:r>
+            <a:r>
+              <a:rPr/>
+              <a:t> Whether small males can produce progeny that become large males remains the central scientific uncertainty for management.</a:t>
             </a:r>
           </a:p>
         </p:txBody>
@@ -11806,7 +11878,12 @@
             <p:ph type="title"/>
           </p:nvPr>
         </p:nvSpPr>
-        <p:spPr/>
+        <p:spPr>
+          <a:xfrm>
+            <a:off x="722313" y="3305176"/>
+            <a:ext cx="7772400" cy="1021556"/>
+          </a:xfrm>
+        </p:spPr>
         <p:txBody>
           <a:bodyPr/>
           <a:lstStyle/>
@@ -11816,99 +11893,7 @@
             </a:pPr>
             <a:r>
               <a:rPr/>
-              <a:t>Data gaps and research priorities</a:t>
-            </a:r>
-          </a:p>
-        </p:txBody>
-      </p:sp>
-      <p:sp>
-        <p:nvSpPr>
-          <p:cNvPr id="3" name="Content Placeholder 2"/>
-          <p:cNvSpPr>
-            <a:spLocks noGrp="1"/>
-          </p:cNvSpPr>
-          <p:nvPr>
-            <p:ph idx="1"/>
-          </p:nvPr>
-        </p:nvSpPr>
-        <p:spPr/>
-        <p:txBody>
-          <a:bodyPr/>
-          <a:lstStyle/>
-          <a:p>
-            <a:pPr lvl="0"/>
-            <a:r>
-              <a:rPr b="1"/>
-              <a:t>Hybrid identification consistency between ADF&amp;G and NMFS.</a:t>
-            </a:r>
-            <a:r>
-              <a:rPr/>
-              <a:t> Different criteria for the number of secondary characteristics required for a positive hybrid identification.</a:t>
-            </a:r>
-          </a:p>
-          <a:p>
-            <a:pPr lvl="0"/>
-            <a:r>
-              <a:rPr b="1"/>
-              <a:t>Apportionment of retained catch between snow and hybrids.</a:t>
-            </a:r>
-            <a:r>
-              <a:rPr/>
-              <a:t> Currently retained catch contains both, with no method to partition.</a:t>
-            </a:r>
-          </a:p>
-          <a:p>
-            <a:pPr lvl="0"/>
-            <a:r>
-              <a:rPr b="1"/>
-              <a:t>Quality control on early hybrid catch estimates.</a:t>
-            </a:r>
-            <a:r>
-              <a:rPr/>
-              <a:t> 1997–98 catches flagged by ADF&amp;G.</a:t>
-            </a:r>
-          </a:p>
-          <a:p>
-            <a:pPr lvl="0"/>
-            <a:r>
-              <a:rPr b="1"/>
-              <a:t>Maturity workflow comparison.</a:t>
-            </a:r>
-            <a:r>
-              <a:rPr/>
-              <a:t> Side-by-side documentation, sample-size diagnostics, and uncertainty quantification for the legacy vs. </a:t>
-            </a:r>
-            <a:r>
-              <a:rPr>
-                <a:latin typeface="Courier"/>
-              </a:rPr>
-              <a:t>sdmTMB</a:t>
-            </a:r>
-            <a:r>
-              <a:rPr/>
-              <a:t> workflows.</a:t>
-            </a:r>
-          </a:p>
-          <a:p>
-            <a:pPr lvl="0"/>
-            <a:r>
-              <a:rPr b="1"/>
-              <a:t>Source of bimodality</a:t>
-            </a:r>
-            <a:r>
-              <a:rPr/>
-              <a:t> in the snow crab assessment. Focused investigation to identify which parameter combinations produce the two clouds.</a:t>
-            </a:r>
-          </a:p>
-          <a:p>
-            <a:pPr lvl="0"/>
-            <a:r>
-              <a:rPr b="1"/>
-              <a:t>Reproductive biology of large male snow crab.</a:t>
-            </a:r>
-            <a:r>
-              <a:rPr/>
-              <a:t> Whether small males can produce progeny that become large males remains the central scientific uncertainty for management.</a:t>
+              <a:t>Acknowledgments</a:t>
             </a:r>
           </a:p>
         </p:txBody>
@@ -11945,12 +11930,7 @@
             <p:ph type="title"/>
           </p:nvPr>
         </p:nvSpPr>
-        <p:spPr>
-          <a:xfrm>
-            <a:off x="722313" y="3305176"/>
-            <a:ext cx="7772400" cy="1021556"/>
-          </a:xfrm>
-        </p:spPr>
+        <p:spPr/>
         <p:txBody>
           <a:bodyPr/>
           <a:lstStyle/>
@@ -11960,7 +11940,68 @@
             </a:pPr>
             <a:r>
               <a:rPr/>
-              <a:t>Acknowledgments</a:t>
+              <a:t>Thank you</a:t>
+            </a:r>
+          </a:p>
+        </p:txBody>
+      </p:sp>
+      <p:sp>
+        <p:nvSpPr>
+          <p:cNvPr id="3" name="Content Placeholder 2"/>
+          <p:cNvSpPr>
+            <a:spLocks noGrp="1"/>
+          </p:cNvSpPr>
+          <p:nvPr>
+            <p:ph idx="1"/>
+          </p:nvPr>
+        </p:nvSpPr>
+        <p:spPr/>
+        <p:txBody>
+          <a:bodyPr/>
+          <a:lstStyle/>
+          <a:p>
+            <a:pPr lvl="0" indent="0" marL="0">
+              <a:buNone/>
+            </a:pPr>
+            <a:r>
+              <a:rPr/>
+              <a:t>Tyler Jackson and Ben Daly (ADF&amp;G) – hybrid catch, composition, and discard data products</a:t>
+            </a:r>
+          </a:p>
+          <a:p>
+            <a:pPr lvl="0" indent="0" marL="0">
+              <a:buNone/>
+            </a:pPr>
+            <a:r>
+              <a:rPr/>
+              <a:t>Erin Ryznar and the Kodiak lab – new maturity workflow</a:t>
+            </a:r>
+          </a:p>
+          <a:p>
+            <a:pPr lvl="0" indent="0" marL="0">
+              <a:buNone/>
+            </a:pPr>
+            <a:r>
+              <a:rPr/>
+              <a:t>André Punt, Buck Stockhausen, Matthieu Veron – GMACS development</a:t>
+            </a:r>
+          </a:p>
+          <a:p>
+            <a:pPr lvl="0" indent="0" marL="0">
+              <a:buNone/>
+            </a:pPr>
+            <a:r>
+              <a:rPr/>
+              <a:t>CPT and SSC – comments and guidance</a:t>
+            </a:r>
+          </a:p>
+          <a:p>
+            <a:pPr lvl="0" indent="0" marL="0">
+              <a:buNone/>
+            </a:pPr>
+            <a:r>
+              <a:rPr i="1"/>
+              <a:t>Questions and discussion welcome.</a:t>
             </a:r>
           </a:p>
         </p:txBody>
@@ -11997,7 +12038,12 @@
             <p:ph type="title"/>
           </p:nvPr>
         </p:nvSpPr>
-        <p:spPr/>
+        <p:spPr>
+          <a:xfrm>
+            <a:off x="722313" y="3305176"/>
+            <a:ext cx="7772400" cy="1021556"/>
+          </a:xfrm>
+        </p:spPr>
         <p:txBody>
           <a:bodyPr/>
           <a:lstStyle/>
@@ -12007,68 +12053,7 @@
             </a:pPr>
             <a:r>
               <a:rPr/>
-              <a:t>Thank you</a:t>
-            </a:r>
-          </a:p>
-        </p:txBody>
-      </p:sp>
-      <p:sp>
-        <p:nvSpPr>
-          <p:cNvPr id="3" name="Content Placeholder 2"/>
-          <p:cNvSpPr>
-            <a:spLocks noGrp="1"/>
-          </p:cNvSpPr>
-          <p:nvPr>
-            <p:ph idx="1"/>
-          </p:nvPr>
-        </p:nvSpPr>
-        <p:spPr/>
-        <p:txBody>
-          <a:bodyPr/>
-          <a:lstStyle/>
-          <a:p>
-            <a:pPr lvl="0" indent="0" marL="0">
-              <a:buNone/>
-            </a:pPr>
-            <a:r>
-              <a:rPr/>
-              <a:t>Tyler Jackson and Ben Daly (ADF&amp;G) – hybrid catch, composition, and discard data products</a:t>
-            </a:r>
-          </a:p>
-          <a:p>
-            <a:pPr lvl="0" indent="0" marL="0">
-              <a:buNone/>
-            </a:pPr>
-            <a:r>
-              <a:rPr/>
-              <a:t>Erin Ryznar and the Kodiak lab – new maturity workflow</a:t>
-            </a:r>
-          </a:p>
-          <a:p>
-            <a:pPr lvl="0" indent="0" marL="0">
-              <a:buNone/>
-            </a:pPr>
-            <a:r>
-              <a:rPr/>
-              <a:t>André Punt, Buck Stockhausen, Matthieu Veron – GMACS development</a:t>
-            </a:r>
-          </a:p>
-          <a:p>
-            <a:pPr lvl="0" indent="0" marL="0">
-              <a:buNone/>
-            </a:pPr>
-            <a:r>
-              <a:rPr/>
-              <a:t>CPT and SSC – comments and guidance</a:t>
-            </a:r>
-          </a:p>
-          <a:p>
-            <a:pPr lvl="0" indent="0" marL="0">
-              <a:buNone/>
-            </a:pPr>
-            <a:r>
-              <a:rPr i="1"/>
-              <a:t>Questions and discussion welcome.</a:t>
+              <a:t>Appendix</a:t>
             </a:r>
           </a:p>
         </p:txBody>
@@ -12241,58 +12226,6 @@
             <p:ph type="title"/>
           </p:nvPr>
         </p:nvSpPr>
-        <p:spPr>
-          <a:xfrm>
-            <a:off x="722313" y="3305176"/>
-            <a:ext cx="7772400" cy="1021556"/>
-          </a:xfrm>
-        </p:spPr>
-        <p:txBody>
-          <a:bodyPr/>
-          <a:lstStyle/>
-          <a:p>
-            <a:pPr lvl="0" indent="0" marL="0">
-              <a:buNone/>
-            </a:pPr>
-            <a:r>
-              <a:rPr/>
-              <a:t>Appendix</a:t>
-            </a:r>
-          </a:p>
-        </p:txBody>
-      </p:sp>
-    </p:spTree>
-  </p:cSld>
-</p:sld>
-</file>
-
-<file path=ppt/slides/slide71.xml><?xml version="1.0" encoding="utf-8"?>
-<p:sld xmlns:a="http://schemas.openxmlformats.org/drawingml/2006/main" xmlns:r="http://schemas.openxmlformats.org/officeDocument/2006/relationships" xmlns:p="http://schemas.openxmlformats.org/presentationml/2006/main">
-  <p:cSld>
-    <p:spTree>
-      <p:nvGrpSpPr>
-        <p:cNvPr id="1" name=""/>
-        <p:cNvGrpSpPr/>
-        <p:nvPr/>
-      </p:nvGrpSpPr>
-      <p:grpSpPr>
-        <a:xfrm>
-          <a:off x="0" y="0"/>
-          <a:ext cx="0" cy="0"/>
-          <a:chOff x="0" y="0"/>
-          <a:chExt cx="0" cy="0"/>
-        </a:xfrm>
-      </p:grpSpPr>
-      <p:sp>
-        <p:nvSpPr>
-          <p:cNvPr id="2" name="Title 1"/>
-          <p:cNvSpPr>
-            <a:spLocks noGrp="1"/>
-          </p:cNvSpPr>
-          <p:nvPr>
-            <p:ph type="title"/>
-          </p:nvPr>
-        </p:nvSpPr>
         <p:spPr/>
         <p:txBody>
           <a:bodyPr/>
@@ -12851,7 +12784,7 @@
 </p:sld>
 </file>
 
-<file path=ppt/slides/slide72.xml><?xml version="1.0" encoding="utf-8"?>
+<file path=ppt/slides/slide71.xml><?xml version="1.0" encoding="utf-8"?>
 <p:sld xmlns:a="http://schemas.openxmlformats.org/drawingml/2006/main" xmlns:r="http://schemas.openxmlformats.org/officeDocument/2006/relationships" xmlns:p="http://schemas.openxmlformats.org/presentationml/2006/main">
   <p:cSld>
     <p:spTree>
